--- a/Hexa_Force_Secure_Lab_Presentation.pptx
+++ b/Hexa_Force_Secure_Lab_Presentation.pptx
@@ -6,18 +6,18 @@
   </p:sldMasterIdLst>
   <p:sldIdLst>
     <p:sldId id="256" r:id="rId7"/>
-    <p:sldId id="257" r:id="rId8"/>
-    <p:sldId id="258" r:id="rId9"/>
-    <p:sldId id="259" r:id="rId10"/>
-    <p:sldId id="260" r:id="rId11"/>
-    <p:sldId id="261" r:id="rId12"/>
-    <p:sldId id="262" r:id="rId13"/>
-    <p:sldId id="263" r:id="rId14"/>
-    <p:sldId id="264" r:id="rId15"/>
-    <p:sldId id="265" r:id="rId16"/>
-    <p:sldId id="266" r:id="rId17"/>
+    <p:sldId id="257" r:id="rId9"/>
+    <p:sldId id="258" r:id="rId10"/>
+    <p:sldId id="259" r:id="rId11"/>
+    <p:sldId id="260" r:id="rId12"/>
+    <p:sldId id="261" r:id="rId13"/>
+    <p:sldId id="262" r:id="rId14"/>
+    <p:sldId id="263" r:id="rId15"/>
+    <p:sldId id="264" r:id="rId16"/>
+    <p:sldId id="265" r:id="rId17"/>
+    <p:sldId id="266" r:id="rId18"/>
   </p:sldIdLst>
-  <p:sldSz cx="12188952" cy="6858000" type="screen4x3"/>
+  <p:sldSz cx="12191695" cy="6858000" type="screen4x3"/>
   <p:notesSz cx="6858000" cy="9144000"/>
   <p:defaultTextStyle>
     <a:defPPr>
@@ -115,6 +115,1588 @@
     </a:lvl9pPr>
   </p:defaultTextStyle>
 </p:presentation>
+</file>
+
+<file path=ppt/notesMasters/notesMaster1.xml><?xml version="1.0" encoding="utf-8"?>
+<p:notesMaster xmlns:a="http://schemas.openxmlformats.org/drawingml/2006/main" xmlns:p="http://schemas.openxmlformats.org/presentationml/2006/main" xmlns:r="http://schemas.openxmlformats.org/officeDocument/2006/relationships">
+  <p:cSld>
+    <p:bg>
+      <p:bgRef idx="1001">
+        <a:schemeClr val="bg1"/>
+      </p:bgRef>
+    </p:bg>
+    <p:spTree>
+      <p:nvGrpSpPr>
+        <p:cNvPr id="1" name=""/>
+        <p:cNvGrpSpPr/>
+        <p:nvPr/>
+      </p:nvGrpSpPr>
+      <p:grpSpPr>
+        <a:xfrm>
+          <a:off x="0" y="0"/>
+          <a:ext cx="0" cy="0"/>
+          <a:chOff x="0" y="0"/>
+          <a:chExt cx="0" cy="0"/>
+        </a:xfrm>
+      </p:grpSpPr>
+      <p:sp>
+        <p:nvSpPr>
+          <p:cNvPr id="2" name="Header Placeholder 1"/>
+          <p:cNvSpPr>
+            <a:spLocks noGrp="1"/>
+          </p:cNvSpPr>
+          <p:nvPr>
+            <p:ph type="hdr" sz="quarter"/>
+          </p:nvPr>
+        </p:nvSpPr>
+        <p:spPr>
+          <a:xfrm>
+            <a:off x="0" y="0"/>
+            <a:ext cx="2971800" cy="457200"/>
+          </a:xfrm>
+          <a:prstGeom prst="rect">
+            <a:avLst/>
+          </a:prstGeom>
+        </p:spPr>
+        <p:txBody>
+          <a:bodyPr vert="horz" lIns="91440" tIns="45720" rIns="91440" bIns="45720" rtlCol="0"/>
+          <a:lstStyle>
+            <a:lvl1pPr algn="l">
+              <a:defRPr sz="1200"/>
+            </a:lvl1pPr>
+          </a:lstStyle>
+          <a:p>
+            <a:endParaRPr lang="en-US"/>
+          </a:p>
+        </p:txBody>
+      </p:sp>
+      <p:sp>
+        <p:nvSpPr>
+          <p:cNvPr id="3" name="Date Placeholder 2"/>
+          <p:cNvSpPr>
+            <a:spLocks noGrp="1"/>
+          </p:cNvSpPr>
+          <p:nvPr>
+            <p:ph type="dt" idx="1"/>
+          </p:nvPr>
+        </p:nvSpPr>
+        <p:spPr>
+          <a:xfrm>
+            <a:off x="3884613" y="0"/>
+            <a:ext cx="2971800" cy="457200"/>
+          </a:xfrm>
+          <a:prstGeom prst="rect">
+            <a:avLst/>
+          </a:prstGeom>
+        </p:spPr>
+        <p:txBody>
+          <a:bodyPr vert="horz" lIns="91440" tIns="45720" rIns="91440" bIns="45720" rtlCol="0"/>
+          <a:lstStyle>
+            <a:lvl1pPr algn="r">
+              <a:defRPr sz="1200"/>
+            </a:lvl1pPr>
+          </a:lstStyle>
+          <a:p>
+            <a:fld id="{0F89C1C7-3DCD-1040-A9CF-14679D8B5DDD}" type="datetimeFigureOut">
+              <a:rPr lang="en-US" smtClean="0"/>
+              <a:t>10/17/16</a:t>
+            </a:fld>
+            <a:endParaRPr lang="en-US"/>
+          </a:p>
+        </p:txBody>
+      </p:sp>
+      <p:sp>
+        <p:nvSpPr>
+          <p:cNvPr id="4" name="Slide Image Placeholder 3"/>
+          <p:cNvSpPr>
+            <a:spLocks noGrp="1" noRot="1" noChangeAspect="1"/>
+          </p:cNvSpPr>
+          <p:nvPr>
+            <p:ph type="sldImg" idx="2"/>
+          </p:nvPr>
+        </p:nvSpPr>
+        <p:spPr>
+          <a:xfrm>
+            <a:off x="1143000" y="685800"/>
+            <a:ext cx="4572000" cy="3429000"/>
+          </a:xfrm>
+          <a:prstGeom prst="rect">
+            <a:avLst/>
+          </a:prstGeom>
+          <a:noFill/>
+          <a:ln w="12700">
+            <a:solidFill>
+              <a:prstClr val="black"/>
+            </a:solidFill>
+          </a:ln>
+        </p:spPr>
+        <p:txBody>
+          <a:bodyPr vert="horz" lIns="91440" tIns="45720" rIns="91440" bIns="45720" rtlCol="0" anchor="ctr"/>
+          <a:lstStyle/>
+          <a:p>
+            <a:endParaRPr lang="en-US"/>
+          </a:p>
+        </p:txBody>
+      </p:sp>
+      <p:sp>
+        <p:nvSpPr>
+          <p:cNvPr id="5" name="Notes Placeholder 4"/>
+          <p:cNvSpPr>
+            <a:spLocks noGrp="1"/>
+          </p:cNvSpPr>
+          <p:nvPr>
+            <p:ph type="body" sz="quarter" idx="3"/>
+          </p:nvPr>
+        </p:nvSpPr>
+        <p:spPr>
+          <a:xfrm>
+            <a:off x="685800" y="4343400"/>
+            <a:ext cx="5486400" cy="4114800"/>
+          </a:xfrm>
+          <a:prstGeom prst="rect">
+            <a:avLst/>
+          </a:prstGeom>
+        </p:spPr>
+        <p:txBody>
+          <a:bodyPr vert="horz" lIns="91440" tIns="45720" rIns="91440" bIns="45720" rtlCol="0"/>
+          <a:lstStyle/>
+          <a:p>
+            <a:pPr lvl="0"/>
+            <a:r>
+              <a:rPr lang="en-US" smtClean="0"/>
+              <a:t>Click to edit Master text styles</a:t>
+            </a:r>
+          </a:p>
+          <a:p>
+            <a:pPr lvl="1"/>
+            <a:r>
+              <a:rPr lang="en-US" smtClean="0"/>
+              <a:t>Second level</a:t>
+            </a:r>
+          </a:p>
+          <a:p>
+            <a:pPr lvl="2"/>
+            <a:r>
+              <a:rPr lang="en-US" smtClean="0"/>
+              <a:t>Third level</a:t>
+            </a:r>
+          </a:p>
+          <a:p>
+            <a:pPr lvl="3"/>
+            <a:r>
+              <a:rPr lang="en-US" smtClean="0"/>
+              <a:t>Fourth level</a:t>
+            </a:r>
+          </a:p>
+          <a:p>
+            <a:pPr lvl="4"/>
+            <a:r>
+              <a:rPr lang="en-US" smtClean="0"/>
+              <a:t>Fifth level</a:t>
+            </a:r>
+            <a:endParaRPr lang="en-US"/>
+          </a:p>
+        </p:txBody>
+      </p:sp>
+      <p:sp>
+        <p:nvSpPr>
+          <p:cNvPr id="6" name="Footer Placeholder 5"/>
+          <p:cNvSpPr>
+            <a:spLocks noGrp="1"/>
+          </p:cNvSpPr>
+          <p:nvPr>
+            <p:ph type="ftr" sz="quarter" idx="4"/>
+          </p:nvPr>
+        </p:nvSpPr>
+        <p:spPr>
+          <a:xfrm>
+            <a:off x="0" y="8685213"/>
+            <a:ext cx="2971800" cy="457200"/>
+          </a:xfrm>
+          <a:prstGeom prst="rect">
+            <a:avLst/>
+          </a:prstGeom>
+        </p:spPr>
+        <p:txBody>
+          <a:bodyPr vert="horz" lIns="91440" tIns="45720" rIns="91440" bIns="45720" rtlCol="0" anchor="b"/>
+          <a:lstStyle>
+            <a:lvl1pPr algn="l">
+              <a:defRPr sz="1200"/>
+            </a:lvl1pPr>
+          </a:lstStyle>
+          <a:p>
+            <a:endParaRPr lang="en-US"/>
+          </a:p>
+        </p:txBody>
+      </p:sp>
+      <p:sp>
+        <p:nvSpPr>
+          <p:cNvPr id="7" name="Slide Number Placeholder 6"/>
+          <p:cNvSpPr>
+            <a:spLocks noGrp="1"/>
+          </p:cNvSpPr>
+          <p:nvPr>
+            <p:ph type="sldNum" sz="quarter" idx="5"/>
+          </p:nvPr>
+        </p:nvSpPr>
+        <p:spPr>
+          <a:xfrm>
+            <a:off x="3884613" y="8685213"/>
+            <a:ext cx="2971800" cy="457200"/>
+          </a:xfrm>
+          <a:prstGeom prst="rect">
+            <a:avLst/>
+          </a:prstGeom>
+        </p:spPr>
+        <p:txBody>
+          <a:bodyPr vert="horz" lIns="91440" tIns="45720" rIns="91440" bIns="45720" rtlCol="0" anchor="b"/>
+          <a:lstStyle>
+            <a:lvl1pPr algn="r">
+              <a:defRPr sz="1200"/>
+            </a:lvl1pPr>
+          </a:lstStyle>
+          <a:p>
+            <a:fld id="{BB5E49A5-4136-284D-997B-48E1D791AD67}" type="slidenum">
+              <a:rPr lang="en-US" smtClean="0"/>
+              <a:t>‹#›</a:t>
+            </a:fld>
+            <a:endParaRPr lang="en-US"/>
+          </a:p>
+        </p:txBody>
+      </p:sp>
+    </p:spTree>
+    <p:extLst>
+      <p:ext uri="{BB962C8B-B14F-4D97-AF65-F5344CB8AC3E}">
+        <p14:creationId xmlns:p14="http://schemas.microsoft.com/office/powerpoint/2010/main" val="2623252185"/>
+      </p:ext>
+    </p:extLst>
+  </p:cSld>
+  <p:clrMap bg1="lt1" tx1="dk1" bg2="lt2" tx2="dk2" accent1="accent1" accent2="accent2" accent3="accent3" accent4="accent4" accent5="accent5" accent6="accent6" hlink="hlink" folHlink="folHlink"/>
+  <p:notesStyle>
+    <a:lvl1pPr marL="0" algn="l" defTabSz="457200" rtl="0" eaLnBrk="1" latinLnBrk="0" hangingPunct="1">
+      <a:defRPr sz="1200" kern="1200">
+        <a:solidFill>
+          <a:schemeClr val="tx1"/>
+        </a:solidFill>
+        <a:latin typeface="+mn-lt"/>
+        <a:ea typeface="+mn-ea"/>
+        <a:cs typeface="+mn-cs"/>
+      </a:defRPr>
+    </a:lvl1pPr>
+    <a:lvl2pPr marL="457200" algn="l" defTabSz="457200" rtl="0" eaLnBrk="1" latinLnBrk="0" hangingPunct="1">
+      <a:defRPr sz="1200" kern="1200">
+        <a:solidFill>
+          <a:schemeClr val="tx1"/>
+        </a:solidFill>
+        <a:latin typeface="+mn-lt"/>
+        <a:ea typeface="+mn-ea"/>
+        <a:cs typeface="+mn-cs"/>
+      </a:defRPr>
+    </a:lvl2pPr>
+    <a:lvl3pPr marL="914400" algn="l" defTabSz="457200" rtl="0" eaLnBrk="1" latinLnBrk="0" hangingPunct="1">
+      <a:defRPr sz="1200" kern="1200">
+        <a:solidFill>
+          <a:schemeClr val="tx1"/>
+        </a:solidFill>
+        <a:latin typeface="+mn-lt"/>
+        <a:ea typeface="+mn-ea"/>
+        <a:cs typeface="+mn-cs"/>
+      </a:defRPr>
+    </a:lvl3pPr>
+    <a:lvl4pPr marL="1371600" algn="l" defTabSz="457200" rtl="0" eaLnBrk="1" latinLnBrk="0" hangingPunct="1">
+      <a:defRPr sz="1200" kern="1200">
+        <a:solidFill>
+          <a:schemeClr val="tx1"/>
+        </a:solidFill>
+        <a:latin typeface="+mn-lt"/>
+        <a:ea typeface="+mn-ea"/>
+        <a:cs typeface="+mn-cs"/>
+      </a:defRPr>
+    </a:lvl4pPr>
+    <a:lvl5pPr marL="1828800" algn="l" defTabSz="457200" rtl="0" eaLnBrk="1" latinLnBrk="0" hangingPunct="1">
+      <a:defRPr sz="1200" kern="1200">
+        <a:solidFill>
+          <a:schemeClr val="tx1"/>
+        </a:solidFill>
+        <a:latin typeface="+mn-lt"/>
+        <a:ea typeface="+mn-ea"/>
+        <a:cs typeface="+mn-cs"/>
+      </a:defRPr>
+    </a:lvl5pPr>
+    <a:lvl6pPr marL="2286000" algn="l" defTabSz="457200" rtl="0" eaLnBrk="1" latinLnBrk="0" hangingPunct="1">
+      <a:defRPr sz="1200" kern="1200">
+        <a:solidFill>
+          <a:schemeClr val="tx1"/>
+        </a:solidFill>
+        <a:latin typeface="+mn-lt"/>
+        <a:ea typeface="+mn-ea"/>
+        <a:cs typeface="+mn-cs"/>
+      </a:defRPr>
+    </a:lvl6pPr>
+    <a:lvl7pPr marL="2743200" algn="l" defTabSz="457200" rtl="0" eaLnBrk="1" latinLnBrk="0" hangingPunct="1">
+      <a:defRPr sz="1200" kern="1200">
+        <a:solidFill>
+          <a:schemeClr val="tx1"/>
+        </a:solidFill>
+        <a:latin typeface="+mn-lt"/>
+        <a:ea typeface="+mn-ea"/>
+        <a:cs typeface="+mn-cs"/>
+      </a:defRPr>
+    </a:lvl7pPr>
+    <a:lvl8pPr marL="3200400" algn="l" defTabSz="457200" rtl="0" eaLnBrk="1" latinLnBrk="0" hangingPunct="1">
+      <a:defRPr sz="1200" kern="1200">
+        <a:solidFill>
+          <a:schemeClr val="tx1"/>
+        </a:solidFill>
+        <a:latin typeface="+mn-lt"/>
+        <a:ea typeface="+mn-ea"/>
+        <a:cs typeface="+mn-cs"/>
+      </a:defRPr>
+    </a:lvl8pPr>
+    <a:lvl9pPr marL="3657600" algn="l" defTabSz="457200" rtl="0" eaLnBrk="1" latinLnBrk="0" hangingPunct="1">
+      <a:defRPr sz="1200" kern="1200">
+        <a:solidFill>
+          <a:schemeClr val="tx1"/>
+        </a:solidFill>
+        <a:latin typeface="+mn-lt"/>
+        <a:ea typeface="+mn-ea"/>
+        <a:cs typeface="+mn-cs"/>
+      </a:defRPr>
+    </a:lvl9pPr>
+  </p:notesStyle>
+</p:notesMaster>
+</file>
+
+<file path=ppt/notesSlides/notesSlide1.xml><?xml version="1.0" encoding="utf-8"?>
+<p:notes xmlns:a="http://schemas.openxmlformats.org/drawingml/2006/main" xmlns:p="http://schemas.openxmlformats.org/presentationml/2006/main" xmlns:r="http://schemas.openxmlformats.org/officeDocument/2006/relationships">
+  <p:cSld>
+    <p:spTree>
+      <p:nvGrpSpPr>
+        <p:cNvPr id="1" name=""/>
+        <p:cNvGrpSpPr/>
+        <p:nvPr/>
+      </p:nvGrpSpPr>
+      <p:grpSpPr>
+        <a:xfrm>
+          <a:off x="0" y="0"/>
+          <a:ext cx="0" cy="0"/>
+          <a:chOff x="0" y="0"/>
+          <a:chExt cx="0" cy="0"/>
+        </a:xfrm>
+      </p:grpSpPr>
+      <p:sp>
+        <p:nvSpPr>
+          <p:cNvPr id="2" name="Slide Image Placeholder 1"/>
+          <p:cNvSpPr>
+            <a:spLocks noGrp="1"/>
+          </p:cNvSpPr>
+          <p:nvPr>
+            <p:ph type="sldImg" idx="2"/>
+          </p:nvPr>
+        </p:nvSpPr>
+        <p:spPr/>
+      </p:sp>
+      <p:sp>
+        <p:nvSpPr>
+          <p:cNvPr id="3" name="Notes Placeholder 2"/>
+          <p:cNvSpPr>
+            <a:spLocks noGrp="1"/>
+          </p:cNvSpPr>
+          <p:nvPr>
+            <p:ph type="body" idx="3" sz="quarter"/>
+          </p:nvPr>
+        </p:nvSpPr>
+        <p:spPr/>
+        <p:txBody>
+          <a:bodyPr/>
+          <a:lstStyle/>
+          <a:p>
+            <a:r>
+              <a:t>=== SPOKEN TALK TRACK ===</a:t>
+            </a:r>
+          </a:p>
+          <a:p>
+            <a:r>
+              <a:t>"Good morning, evaluators and distinguished guests. Welcome to the technical delivery of the Hexa Force Container Security Lab. Today, we are presenting our end-to-end container security demonstration, modeling a high-fidelity 4-stage attack chain and corresponding defense-in-depth hardening strategies. Over the next few minutes, we will walk you through how a local privilege escalation vulnerability can cascade into complete host takeover, and how modern cryptographic verification using keyless Sigstore/Cosign signing with GitHub Actions OIDC robustly secures the software delivery pipeline. Let us begin by reviewing our core objectives."</a:t>
+            </a:r>
+          </a:p>
+          <a:p/>
+          <a:p>
+            <a:r>
+              <a:t>=== CRITICAL TALKING POINTS ===</a:t>
+            </a:r>
+          </a:p>
+          <a:p>
+            <a:r>
+              <a:t>• Establish the Hexa Force brand immediately with an authoritative and professional delivery.</a:t>
+            </a:r>
+          </a:p>
+          <a:p>
+            <a:r>
+              <a:t>• Set the scope of the presentation: it is a balanced demonstration of an advanced attack chain and enterprise-grade cryptographic defense.</a:t>
+            </a:r>
+          </a:p>
+          <a:p>
+            <a:r>
+              <a:t>• Emphasize key modern pipeline terms: Sigstore, Cosign, OIDC federation, and GHCR registry integrations.</a:t>
+            </a:r>
+          </a:p>
+          <a:p/>
+          <a:p>
+            <a:r>
+              <a:t>=== ANTICIPATED EVALUATOR Q&amp;A ===</a:t>
+            </a:r>
+          </a:p>
+          <a:p>
+            <a:r>
+              <a:t>Question: What motivated the choice of this specific attack chain?</a:t>
+            </a:r>
+          </a:p>
+          <a:p>
+            <a:r>
+              <a:t>Answer: We chose this specific progression because it realistically models how simple runtime misconfigurations and unpatched host-level vulnerabilities interact in enterprise microservices. It demonstrates that container security cannot rely on runtime isolation alone, but must encompass host hardening, image provenance, and CI/CD integrity.</a:t>
+            </a:r>
+          </a:p>
+        </p:txBody>
+      </p:sp>
+      <p:sp>
+        <p:nvSpPr>
+          <p:cNvPr id="4" name="Slide Number Placeholder 3"/>
+          <p:cNvSpPr>
+            <a:spLocks noGrp="1"/>
+          </p:cNvSpPr>
+          <p:nvPr>
+            <p:ph type="sldNum" idx="5" sz="quarter"/>
+          </p:nvPr>
+        </p:nvSpPr>
+        <p:spPr/>
+      </p:sp>
+    </p:spTree>
+  </p:cSld>
+  <p:clrMapOvr>
+    <a:masterClrMapping/>
+  </p:clrMapOvr>
+</p:notes>
+</file>
+
+<file path=ppt/notesSlides/notesSlide10.xml><?xml version="1.0" encoding="utf-8"?>
+<p:notes xmlns:a="http://schemas.openxmlformats.org/drawingml/2006/main" xmlns:p="http://schemas.openxmlformats.org/presentationml/2006/main" xmlns:r="http://schemas.openxmlformats.org/officeDocument/2006/relationships">
+  <p:cSld>
+    <p:spTree>
+      <p:nvGrpSpPr>
+        <p:cNvPr id="1" name=""/>
+        <p:cNvGrpSpPr/>
+        <p:nvPr/>
+      </p:nvGrpSpPr>
+      <p:grpSpPr>
+        <a:xfrm>
+          <a:off x="0" y="0"/>
+          <a:ext cx="0" cy="0"/>
+          <a:chOff x="0" y="0"/>
+          <a:chExt cx="0" cy="0"/>
+        </a:xfrm>
+      </p:grpSpPr>
+      <p:sp>
+        <p:nvSpPr>
+          <p:cNvPr id="2" name="Slide Image Placeholder 1"/>
+          <p:cNvSpPr>
+            <a:spLocks noGrp="1"/>
+          </p:cNvSpPr>
+          <p:nvPr>
+            <p:ph type="sldImg" idx="2"/>
+          </p:nvPr>
+        </p:nvSpPr>
+        <p:spPr/>
+      </p:sp>
+      <p:sp>
+        <p:nvSpPr>
+          <p:cNvPr id="3" name="Notes Placeholder 2"/>
+          <p:cNvSpPr>
+            <a:spLocks noGrp="1"/>
+          </p:cNvSpPr>
+          <p:nvPr>
+            <p:ph type="body" idx="3" sz="quarter"/>
+          </p:nvPr>
+        </p:nvSpPr>
+        <p:spPr/>
+        <p:txBody>
+          <a:bodyPr/>
+          <a:lstStyle/>
+          <a:p>
+            <a:r>
+              <a:t>=== SPOKEN TALK TRACK ===</a:t>
+            </a:r>
+          </a:p>
+          <a:p>
+            <a:r>
+              <a:t>"Let us examine how we completely remediate this threat. Hexa Force implements a comprehensive Defense-in-Depth architecture. First, we restrict container capabilities by explicitly dropping CAP_SYS_ADMIN. Second, we run the container as a non-root user and mark the root filesystem as read-only. Third, we block all exposure of the Docker socket. Finally, we apply kernel security patches to eliminate Dirty COW at the host level. Even if an attacker gains an initial shell, these combined controls prevent them from ever gaining root or escaping the container."</a:t>
+            </a:r>
+          </a:p>
+          <a:p/>
+          <a:p>
+            <a:r>
+              <a:t>=== CRITICAL TALKING POINTS ===</a:t>
+            </a:r>
+          </a:p>
+          <a:p>
+            <a:r>
+              <a:t>• Emphasize the four layers of defense: capability dropping, non-root runtimes, read-only rootfs, and kernel patching.</a:t>
+            </a:r>
+          </a:p>
+          <a:p>
+            <a:r>
+              <a:t>• Discuss the concept of Defense-in-Depth: even if one layer fails, subsequent layers prevent the exploit from succeeding.</a:t>
+            </a:r>
+          </a:p>
+          <a:p>
+            <a:r>
+              <a:t>• Position these controls as standard, low-overhead enterprise recommendations.</a:t>
+            </a:r>
+          </a:p>
+          <a:p/>
+          <a:p>
+            <a:r>
+              <a:t>=== ANTICIPATED EVALUATOR Q&amp;A ===</a:t>
+            </a:r>
+          </a:p>
+          <a:p>
+            <a:r>
+              <a:t>Question: What is the security value of a read-only container root filesystem?</a:t>
+            </a:r>
+          </a:p>
+          <a:p>
+            <a:r>
+              <a:t>Answer: A read-only root filesystem prevents an attacker from writing files, installing tools, downloading exploit scripts, or compiling C binaries (like `dirtyc0w.c`) inside the container. It dramatically reduces the available attack surface and prevents runtime environmental tampering.</a:t>
+            </a:r>
+          </a:p>
+        </p:txBody>
+      </p:sp>
+      <p:sp>
+        <p:nvSpPr>
+          <p:cNvPr id="4" name="Slide Number Placeholder 3"/>
+          <p:cNvSpPr>
+            <a:spLocks noGrp="1"/>
+          </p:cNvSpPr>
+          <p:nvPr>
+            <p:ph type="sldNum" idx="5" sz="quarter"/>
+          </p:nvPr>
+        </p:nvSpPr>
+        <p:spPr/>
+      </p:sp>
+    </p:spTree>
+  </p:cSld>
+  <p:clrMapOvr>
+    <a:masterClrMapping/>
+  </p:clrMapOvr>
+</p:notes>
+</file>
+
+<file path=ppt/notesSlides/notesSlide11.xml><?xml version="1.0" encoding="utf-8"?>
+<p:notes xmlns:a="http://schemas.openxmlformats.org/drawingml/2006/main" xmlns:p="http://schemas.openxmlformats.org/presentationml/2006/main" xmlns:r="http://schemas.openxmlformats.org/officeDocument/2006/relationships">
+  <p:cSld>
+    <p:spTree>
+      <p:nvGrpSpPr>
+        <p:cNvPr id="1" name=""/>
+        <p:cNvGrpSpPr/>
+        <p:nvPr/>
+      </p:nvGrpSpPr>
+      <p:grpSpPr>
+        <a:xfrm>
+          <a:off x="0" y="0"/>
+          <a:ext cx="0" cy="0"/>
+          <a:chOff x="0" y="0"/>
+          <a:chExt cx="0" cy="0"/>
+        </a:xfrm>
+      </p:grpSpPr>
+      <p:sp>
+        <p:nvSpPr>
+          <p:cNvPr id="2" name="Slide Image Placeholder 1"/>
+          <p:cNvSpPr>
+            <a:spLocks noGrp="1"/>
+          </p:cNvSpPr>
+          <p:nvPr>
+            <p:ph type="sldImg" idx="2"/>
+          </p:nvPr>
+        </p:nvSpPr>
+        <p:spPr/>
+      </p:sp>
+      <p:sp>
+        <p:nvSpPr>
+          <p:cNvPr id="3" name="Notes Placeholder 2"/>
+          <p:cNvSpPr>
+            <a:spLocks noGrp="1"/>
+          </p:cNvSpPr>
+          <p:nvPr>
+            <p:ph type="body" idx="3" sz="quarter"/>
+          </p:nvPr>
+        </p:nvSpPr>
+        <p:spPr/>
+        <p:txBody>
+          <a:bodyPr/>
+          <a:lstStyle/>
+          <a:p>
+            <a:r>
+              <a:t>=== SPOKEN TALK TRACK ===</a:t>
+            </a:r>
+          </a:p>
+          <a:p>
+            <a:r>
+              <a:t>"In conclusion, the Hexa Force Container Security Lab successfully demonstrates the extreme vulnerability of default container runtimes, while delivering an enterprise-ready blueprint for comprehensive defense. By pairing strict runtime hardening policies with cryptographic supply chain verification, we ensure complete resilience against host compromises and supply chain injection. Thank you for your time. The Hexa Force team is now open to your technical questions."</a:t>
+            </a:r>
+          </a:p>
+          <a:p/>
+          <a:p>
+            <a:r>
+              <a:t>=== CRITICAL TALKING POINTS ===</a:t>
+            </a:r>
+          </a:p>
+          <a:p>
+            <a:r>
+              <a:t>• Deliver a clean, professional closing statement summarizing the core achievements.</a:t>
+            </a:r>
+          </a:p>
+          <a:p>
+            <a:r>
+              <a:t>• Reiterate the value of combining runtime isolation with cryptographic verification.</a:t>
+            </a:r>
+          </a:p>
+          <a:p>
+            <a:r>
+              <a:t>• Invite questions with absolute confidence, ready to leverage your detailed Q&amp;As.</a:t>
+            </a:r>
+          </a:p>
+          <a:p/>
+          <a:p>
+            <a:r>
+              <a:t>=== ANTICIPATED EVALUATOR Q&amp;A ===</a:t>
+            </a:r>
+          </a:p>
+          <a:p>
+            <a:r>
+              <a:t>Question: What is the single most important lesson from this research?</a:t>
+            </a:r>
+          </a:p>
+          <a:p>
+            <a:r>
+              <a:t>Answer: Security is a multi-layered process. We cannot rely on container virtualization as a bulletproof sandbox. We must harden the host kernel, enforce the principle of least privilege inside the container, and use cryptographic pipelines to guarantee that only trusted code ever enters the execution environment.</a:t>
+            </a:r>
+          </a:p>
+        </p:txBody>
+      </p:sp>
+      <p:sp>
+        <p:nvSpPr>
+          <p:cNvPr id="4" name="Slide Number Placeholder 3"/>
+          <p:cNvSpPr>
+            <a:spLocks noGrp="1"/>
+          </p:cNvSpPr>
+          <p:nvPr>
+            <p:ph type="sldNum" idx="5" sz="quarter"/>
+          </p:nvPr>
+        </p:nvSpPr>
+        <p:spPr/>
+      </p:sp>
+    </p:spTree>
+  </p:cSld>
+  <p:clrMapOvr>
+    <a:masterClrMapping/>
+  </p:clrMapOvr>
+</p:notes>
+</file>
+
+<file path=ppt/notesSlides/notesSlide2.xml><?xml version="1.0" encoding="utf-8"?>
+<p:notes xmlns:a="http://schemas.openxmlformats.org/drawingml/2006/main" xmlns:p="http://schemas.openxmlformats.org/presentationml/2006/main" xmlns:r="http://schemas.openxmlformats.org/officeDocument/2006/relationships">
+  <p:cSld>
+    <p:spTree>
+      <p:nvGrpSpPr>
+        <p:cNvPr id="1" name=""/>
+        <p:cNvGrpSpPr/>
+        <p:nvPr/>
+      </p:nvGrpSpPr>
+      <p:grpSpPr>
+        <a:xfrm>
+          <a:off x="0" y="0"/>
+          <a:ext cx="0" cy="0"/>
+          <a:chOff x="0" y="0"/>
+          <a:chExt cx="0" cy="0"/>
+        </a:xfrm>
+      </p:grpSpPr>
+      <p:sp>
+        <p:nvSpPr>
+          <p:cNvPr id="2" name="Slide Image Placeholder 1"/>
+          <p:cNvSpPr>
+            <a:spLocks noGrp="1"/>
+          </p:cNvSpPr>
+          <p:nvPr>
+            <p:ph type="sldImg" idx="2"/>
+          </p:nvPr>
+        </p:nvSpPr>
+        <p:spPr/>
+      </p:sp>
+      <p:sp>
+        <p:nvSpPr>
+          <p:cNvPr id="3" name="Notes Placeholder 2"/>
+          <p:cNvSpPr>
+            <a:spLocks noGrp="1"/>
+          </p:cNvSpPr>
+          <p:nvPr>
+            <p:ph type="body" idx="3" sz="quarter"/>
+          </p:nvPr>
+        </p:nvSpPr>
+        <p:spPr/>
+        <p:txBody>
+          <a:bodyPr/>
+          <a:lstStyle/>
+          <a:p>
+            <a:r>
+              <a:t>=== SPOKEN TALK TRACK ===</a:t>
+            </a:r>
+          </a:p>
+          <a:p>
+            <a:r>
+              <a:t>"Our presentation today is structured into four main areas. First, we establish the threat landscape and the 4 Security Pillars of Containers. Next, we walk step-by-step through our 4-stage attack simulation, showcasing how we break kernel isolation, processes, APIs, and volume mounts. Third, we present our cryptographic supply chain integrity pipeline using Cosign and OpenID Connect. Finally, we conclude with our enterprise-grade hardening recommendations and DevSecOps best practices to secure any modern production cluster."</a:t>
+            </a:r>
+          </a:p>
+          <a:p/>
+          <a:p>
+            <a:r>
+              <a:t>=== CRITICAL TALKING POINTS ===</a:t>
+            </a:r>
+          </a:p>
+          <a:p>
+            <a:r>
+              <a:t>• Guide the audience through the agenda to show structural clarity and excellent preparation.</a:t>
+            </a:r>
+          </a:p>
+          <a:p>
+            <a:r>
+              <a:t>• Emphasize that the lab moves logically from threat identification (simulation) to threat neutralization (hardening).</a:t>
+            </a:r>
+          </a:p>
+          <a:p>
+            <a:r>
+              <a:t>• Make it clear that the defense-in-depth framework applies to all levels: runtime, pipeline, and host kernel.</a:t>
+            </a:r>
+          </a:p>
+          <a:p/>
+          <a:p>
+            <a:r>
+              <a:t>=== ANTICIPATED EVALUATOR Q&amp;A ===</a:t>
+            </a:r>
+          </a:p>
+          <a:p>
+            <a:r>
+              <a:t>Question: What is the most critical phase of the agenda?</a:t>
+            </a:r>
+          </a:p>
+          <a:p>
+            <a:r>
+              <a:t>Answer: While the exploit phase demonstrates the weakness, the supply chain integrity section is the most critical. Securing the container runtime is only half the battle; we must also guarantee code provenance through modern cryptographic signing to prevent unauthorized container execution.</a:t>
+            </a:r>
+          </a:p>
+        </p:txBody>
+      </p:sp>
+      <p:sp>
+        <p:nvSpPr>
+          <p:cNvPr id="4" name="Slide Number Placeholder 3"/>
+          <p:cNvSpPr>
+            <a:spLocks noGrp="1"/>
+          </p:cNvSpPr>
+          <p:nvPr>
+            <p:ph type="sldNum" idx="5" sz="quarter"/>
+          </p:nvPr>
+        </p:nvSpPr>
+        <p:spPr/>
+      </p:sp>
+    </p:spTree>
+  </p:cSld>
+  <p:clrMapOvr>
+    <a:masterClrMapping/>
+  </p:clrMapOvr>
+</p:notes>
+</file>
+
+<file path=ppt/notesSlides/notesSlide3.xml><?xml version="1.0" encoding="utf-8"?>
+<p:notes xmlns:a="http://schemas.openxmlformats.org/drawingml/2006/main" xmlns:p="http://schemas.openxmlformats.org/presentationml/2006/main" xmlns:r="http://schemas.openxmlformats.org/officeDocument/2006/relationships">
+  <p:cSld>
+    <p:spTree>
+      <p:nvGrpSpPr>
+        <p:cNvPr id="1" name=""/>
+        <p:cNvGrpSpPr/>
+        <p:nvPr/>
+      </p:nvGrpSpPr>
+      <p:grpSpPr>
+        <a:xfrm>
+          <a:off x="0" y="0"/>
+          <a:ext cx="0" cy="0"/>
+          <a:chOff x="0" y="0"/>
+          <a:chExt cx="0" cy="0"/>
+        </a:xfrm>
+      </p:grpSpPr>
+      <p:sp>
+        <p:nvSpPr>
+          <p:cNvPr id="2" name="Slide Image Placeholder 1"/>
+          <p:cNvSpPr>
+            <a:spLocks noGrp="1"/>
+          </p:cNvSpPr>
+          <p:nvPr>
+            <p:ph type="sldImg" idx="2"/>
+          </p:nvPr>
+        </p:nvSpPr>
+        <p:spPr/>
+      </p:sp>
+      <p:sp>
+        <p:nvSpPr>
+          <p:cNvPr id="3" name="Notes Placeholder 2"/>
+          <p:cNvSpPr>
+            <a:spLocks noGrp="1"/>
+          </p:cNvSpPr>
+          <p:nvPr>
+            <p:ph type="body" idx="3" sz="quarter"/>
+          </p:nvPr>
+        </p:nvSpPr>
+        <p:spPr/>
+        <p:txBody>
+          <a:bodyPr/>
+          <a:lstStyle/>
+          <a:p>
+            <a:r>
+              <a:t>=== SPOKEN TALK TRACK ===</a:t>
+            </a:r>
+          </a:p>
+          <a:p>
+            <a:r>
+              <a:t>"To secure any containerized environment, we must evaluate the four foundational security pillars: (1) Host Kernel Isolation, (2) Process &amp; Capabilities Isolation, (3) Daemon &amp; API Security, and (4) Volume &amp; Filesystem Security. Standard container systems share the host kernel, which means a kernel vulnerability exposes the host. Processes inside a container must be strictly limited via Linux capabilities to prevent privilege abuse. The Docker API daemon socket must never be exposed to untrusted environments, and physical volume mounts must be strictly governed to prevent directory traversal and host escapes. Let us look at Stage 1, where kernel isolation is broken."</a:t>
+            </a:r>
+          </a:p>
+          <a:p/>
+          <a:p>
+            <a:r>
+              <a:t>=== CRITICAL TALKING POINTS ===</a:t>
+            </a:r>
+          </a:p>
+          <a:p>
+            <a:r>
+              <a:t>• Introduce the 4 Pillars as the industry-standard frame of reference for evaluating container security.</a:t>
+            </a:r>
+          </a:p>
+          <a:p>
+            <a:r>
+              <a:t>• Explain the shared kernel model: containers are lightweight because they share the host kernel, which is also their primary single point of failure.</a:t>
+            </a:r>
+          </a:p>
+          <a:p>
+            <a:r>
+              <a:t>• Emphasize that security must be applied across all 4 pillars simultaneously; securing only one layer leaves the system vulnerable.</a:t>
+            </a:r>
+          </a:p>
+          <a:p/>
+          <a:p>
+            <a:r>
+              <a:t>=== ANTICIPATED EVALUATOR Q&amp;A ===</a:t>
+            </a:r>
+          </a:p>
+          <a:p>
+            <a:r>
+              <a:t>Question: Why is kernel sharing the ultimate double-edged sword for containers?</a:t>
+            </a:r>
+          </a:p>
+          <a:p>
+            <a:r>
+              <a:t>Answer: Soapbox container systems gain lightweight speed and resource efficiency from sharing the kernel, but inherit a unified single point of failure. If the host kernel has a vulnerability, container barriers are fundamentally bypassed, collapsing the first and most critical isolation pillar.</a:t>
+            </a:r>
+          </a:p>
+        </p:txBody>
+      </p:sp>
+      <p:sp>
+        <p:nvSpPr>
+          <p:cNvPr id="4" name="Slide Number Placeholder 3"/>
+          <p:cNvSpPr>
+            <a:spLocks noGrp="1"/>
+          </p:cNvSpPr>
+          <p:nvPr>
+            <p:ph type="sldNum" idx="5" sz="quarter"/>
+          </p:nvPr>
+        </p:nvSpPr>
+        <p:spPr/>
+      </p:sp>
+    </p:spTree>
+  </p:cSld>
+  <p:clrMapOvr>
+    <a:masterClrMapping/>
+  </p:clrMapOvr>
+</p:notes>
+</file>
+
+<file path=ppt/notesSlides/notesSlide4.xml><?xml version="1.0" encoding="utf-8"?>
+<p:notes xmlns:a="http://schemas.openxmlformats.org/drawingml/2006/main" xmlns:p="http://schemas.openxmlformats.org/presentationml/2006/main" xmlns:r="http://schemas.openxmlformats.org/officeDocument/2006/relationships">
+  <p:cSld>
+    <p:spTree>
+      <p:nvGrpSpPr>
+        <p:cNvPr id="1" name=""/>
+        <p:cNvGrpSpPr/>
+        <p:nvPr/>
+      </p:nvGrpSpPr>
+      <p:grpSpPr>
+        <a:xfrm>
+          <a:off x="0" y="0"/>
+          <a:ext cx="0" cy="0"/>
+          <a:chOff x="0" y="0"/>
+          <a:chExt cx="0" cy="0"/>
+        </a:xfrm>
+      </p:grpSpPr>
+      <p:sp>
+        <p:nvSpPr>
+          <p:cNvPr id="2" name="Slide Image Placeholder 1"/>
+          <p:cNvSpPr>
+            <a:spLocks noGrp="1"/>
+          </p:cNvSpPr>
+          <p:nvPr>
+            <p:ph type="sldImg" idx="2"/>
+          </p:nvPr>
+        </p:nvSpPr>
+        <p:spPr/>
+      </p:sp>
+      <p:sp>
+        <p:nvSpPr>
+          <p:cNvPr id="3" name="Notes Placeholder 2"/>
+          <p:cNvSpPr>
+            <a:spLocks noGrp="1"/>
+          </p:cNvSpPr>
+          <p:nvPr>
+            <p:ph type="body" idx="3" sz="quarter"/>
+          </p:nvPr>
+        </p:nvSpPr>
+        <p:spPr/>
+        <p:txBody>
+          <a:bodyPr/>
+          <a:lstStyle/>
+          <a:p>
+            <a:r>
+              <a:t>=== SPOKEN TALK TRACK ===</a:t>
+            </a:r>
+          </a:p>
+          <a:p>
+            <a:r>
+              <a:t>"At Stage 1, we execute our first exploit inside an unprivileged container. Running as the unprivileged user 'victim', we execute our compiled binary, 'dirtyc0w'. This exploit targets the Dirty COW kernel vulnerability, which is a race condition in the kernel's virtual memory subsystem's handling of Copy-on-Write. We target a read-only secret file, '/var/secret/target.txt'. By using madvise with the MADV_DONTNEED flag, we race the kernel's write mechanisms, tricking the kernel into writing root-owned data into a read-only memory segment. This instantly elevates our privilege from an unprivileged user to container root."</a:t>
+            </a:r>
+          </a:p>
+          <a:p/>
+          <a:p>
+            <a:r>
+              <a:t>=== CRITICAL TALKING POINTS ===</a:t>
+            </a:r>
+          </a:p>
+          <a:p>
+            <a:r>
+              <a:t>• Focus heavily on the virtual memory mechanics: Copy-on-Write, madvise system call, and the O_RDONLY file bypass.</a:t>
+            </a:r>
+          </a:p>
+          <a:p>
+            <a:r>
+              <a:t>• Clearly declare CVE-2016-5195 to demonstrate deep technical mastery and precise vulnerability tracking.</a:t>
+            </a:r>
+          </a:p>
+          <a:p>
+            <a:r>
+              <a:t>• Emphasize that this first exploit is executed as a non-root, unprivileged user, simulating a compromised microservice shell.</a:t>
+            </a:r>
+          </a:p>
+          <a:p/>
+          <a:p>
+            <a:r>
+              <a:t>=== ANTICIPATED EVALUATOR Q&amp;A ===</a:t>
+            </a:r>
+          </a:p>
+          <a:p>
+            <a:r>
+              <a:t>Question: Why does a local privilege escalation inside a container matter if it is isolated?</a:t>
+            </a:r>
+          </a:p>
+          <a:p>
+            <a:r>
+              <a:t>Answer: Local privilege escalation is the beachhead. While namespaces still limit what a container root user can see, obtaining root privileges is the prerequisite for abusing other exposed interfaces, such as Linux capabilities (like CAP_SYS_ADMIN), raw network sockets, or system files.</a:t>
+            </a:r>
+          </a:p>
+        </p:txBody>
+      </p:sp>
+      <p:sp>
+        <p:nvSpPr>
+          <p:cNvPr id="4" name="Slide Number Placeholder 3"/>
+          <p:cNvSpPr>
+            <a:spLocks noGrp="1"/>
+          </p:cNvSpPr>
+          <p:nvPr>
+            <p:ph type="sldNum" idx="5" sz="quarter"/>
+          </p:nvPr>
+        </p:nvSpPr>
+        <p:spPr/>
+      </p:sp>
+    </p:spTree>
+  </p:cSld>
+  <p:clrMapOvr>
+    <a:masterClrMapping/>
+  </p:clrMapOvr>
+</p:notes>
+</file>
+
+<file path=ppt/notesSlides/notesSlide5.xml><?xml version="1.0" encoding="utf-8"?>
+<p:notes xmlns:a="http://schemas.openxmlformats.org/drawingml/2006/main" xmlns:p="http://schemas.openxmlformats.org/presentationml/2006/main" xmlns:r="http://schemas.openxmlformats.org/officeDocument/2006/relationships">
+  <p:cSld>
+    <p:spTree>
+      <p:nvGrpSpPr>
+        <p:cNvPr id="1" name=""/>
+        <p:cNvGrpSpPr/>
+        <p:nvPr/>
+      </p:nvGrpSpPr>
+      <p:grpSpPr>
+        <a:xfrm>
+          <a:off x="0" y="0"/>
+          <a:ext cx="0" cy="0"/>
+          <a:chOff x="0" y="0"/>
+          <a:chExt cx="0" cy="0"/>
+        </a:xfrm>
+      </p:grpSpPr>
+      <p:sp>
+        <p:nvSpPr>
+          <p:cNvPr id="2" name="Slide Image Placeholder 1"/>
+          <p:cNvSpPr>
+            <a:spLocks noGrp="1"/>
+          </p:cNvSpPr>
+          <p:nvPr>
+            <p:ph type="sldImg" idx="2"/>
+          </p:nvPr>
+        </p:nvSpPr>
+        <p:spPr/>
+      </p:sp>
+      <p:sp>
+        <p:nvSpPr>
+          <p:cNvPr id="3" name="Notes Placeholder 2"/>
+          <p:cNvSpPr>
+            <a:spLocks noGrp="1"/>
+          </p:cNvSpPr>
+          <p:nvPr>
+            <p:ph type="body" idx="3" sz="quarter"/>
+          </p:nvPr>
+        </p:nvSpPr>
+        <p:spPr/>
+        <p:txBody>
+          <a:bodyPr/>
+          <a:lstStyle/>
+          <a:p>
+            <a:r>
+              <a:t>=== SPOKEN TALK TRACK ===</a:t>
+            </a:r>
+          </a:p>
+          <a:p>
+            <a:r>
+              <a:t>"In Stage 2, we exploit process-level privileges. Having achieved container root in Stage 1, we now check the container's capabilities. If a container is run with elevated Linux capabilities, such as CAP_SYS_ADMIN, the boundaries of standard container isolation begin to disintegrate. Linux capabilities partition traditional superuser root powers into distinct, assignable units. By abusing CAP_SYS_ADMIN, we gain the authority to modify kernel namespaces and mount external devices, laying the physical groundwork for our escape to the host filesystem."</a:t>
+            </a:r>
+          </a:p>
+          <a:p/>
+          <a:p>
+            <a:r>
+              <a:t>=== CRITICAL TALKING POINTS ===</a:t>
+            </a:r>
+          </a:p>
+          <a:p>
+            <a:r>
+              <a:t>• Explain the concept of Linux capabilities: splitting traditional all-or-nothing root powers into fine-grained permissions.</a:t>
+            </a:r>
+          </a:p>
+          <a:p>
+            <a:r>
+              <a:t>• Emphasize CAP_SYS_ADMIN as the root of all process isolation failures inside containers.</a:t>
+            </a:r>
+          </a:p>
+          <a:p>
+            <a:r>
+              <a:t>• Discuss the principle of least privilege: containers must drop all unnecessary capabilities by default.</a:t>
+            </a:r>
+          </a:p>
+          <a:p/>
+          <a:p>
+            <a:r>
+              <a:t>=== ANTICIPATED EVALUATOR Q&amp;A ===</a:t>
+            </a:r>
+          </a:p>
+          <a:p>
+            <a:r>
+              <a:t>Question: What are some alternatives to granting CAP_SYS_ADMIN to containers?</a:t>
+            </a:r>
+          </a:p>
+          <a:p>
+            <a:r>
+              <a:t>Answer: Administrators should perform strict capability profiling and grant only the narrowest possible capabilities (like CAP_NET_BIND_SERVICE for low-port binding) instead of CAP_SYS_ADMIN. If system-level tasks are required, a dedicated daemon or sidecar pattern should be evaluated.</a:t>
+            </a:r>
+          </a:p>
+        </p:txBody>
+      </p:sp>
+      <p:sp>
+        <p:nvSpPr>
+          <p:cNvPr id="4" name="Slide Number Placeholder 3"/>
+          <p:cNvSpPr>
+            <a:spLocks noGrp="1"/>
+          </p:cNvSpPr>
+          <p:nvPr>
+            <p:ph type="sldNum" idx="5" sz="quarter"/>
+          </p:nvPr>
+        </p:nvSpPr>
+        <p:spPr/>
+      </p:sp>
+    </p:spTree>
+  </p:cSld>
+  <p:clrMapOvr>
+    <a:masterClrMapping/>
+  </p:clrMapOvr>
+</p:notes>
+</file>
+
+<file path=ppt/notesSlides/notesSlide6.xml><?xml version="1.0" encoding="utf-8"?>
+<p:notes xmlns:a="http://schemas.openxmlformats.org/drawingml/2006/main" xmlns:p="http://schemas.openxmlformats.org/presentationml/2006/main" xmlns:r="http://schemas.openxmlformats.org/officeDocument/2006/relationships">
+  <p:cSld>
+    <p:spTree>
+      <p:nvGrpSpPr>
+        <p:cNvPr id="1" name=""/>
+        <p:cNvGrpSpPr/>
+        <p:nvPr/>
+      </p:nvGrpSpPr>
+      <p:grpSpPr>
+        <a:xfrm>
+          <a:off x="0" y="0"/>
+          <a:ext cx="0" cy="0"/>
+          <a:chOff x="0" y="0"/>
+          <a:chExt cx="0" cy="0"/>
+        </a:xfrm>
+      </p:grpSpPr>
+      <p:sp>
+        <p:nvSpPr>
+          <p:cNvPr id="2" name="Slide Image Placeholder 1"/>
+          <p:cNvSpPr>
+            <a:spLocks noGrp="1"/>
+          </p:cNvSpPr>
+          <p:nvPr>
+            <p:ph type="sldImg" idx="2"/>
+          </p:nvPr>
+        </p:nvSpPr>
+        <p:spPr/>
+      </p:sp>
+      <p:sp>
+        <p:nvSpPr>
+          <p:cNvPr id="3" name="Notes Placeholder 2"/>
+          <p:cNvSpPr>
+            <a:spLocks noGrp="1"/>
+          </p:cNvSpPr>
+          <p:nvPr>
+            <p:ph type="body" idx="3" sz="quarter"/>
+          </p:nvPr>
+        </p:nvSpPr>
+        <p:spPr/>
+        <p:txBody>
+          <a:bodyPr/>
+          <a:lstStyle/>
+          <a:p>
+            <a:r>
+              <a:t>=== SPOKEN TALK TRACK ===</a:t>
+            </a:r>
+          </a:p>
+          <a:p>
+            <a:r>
+              <a:t>"Stage 3 demonstrates a critical lateral movement vector: the exposed Docker socket. In many development environments, administrators mount the host's Docker socket—'/var/run/docker.sock'—directly into the container to enable nested docker tasks. Since our Stage 1 exploit gave us root privileges inside the container, we have full read/write permission to this socket. Because the Docker socket is the direct command API to the host's Docker engine, we can now send API requests directly to the host daemon, giving us full command over the host's container lifecycle."</a:t>
+            </a:r>
+          </a:p>
+          <a:p/>
+          <a:p>
+            <a:r>
+              <a:t>=== CRITICAL TALKING POINTS ===</a:t>
+            </a:r>
+          </a:p>
+          <a:p>
+            <a:r>
+              <a:t>• Highlight the absolute danger of the Docker socket (/var/run/docker.sock) exposure.</a:t>
+            </a:r>
+          </a:p>
+          <a:p>
+            <a:r>
+              <a:t>• Describe the Docker socket as the entry point to the host's physical container engine.</a:t>
+            </a:r>
+          </a:p>
+          <a:p>
+            <a:r>
+              <a:t>• Explain how controlling the socket allows the containerized root user to send administrative API commands directly to the host daemon.</a:t>
+            </a:r>
+          </a:p>
+          <a:p/>
+          <a:p>
+            <a:r>
+              <a:t>=== ANTICIPATED EVALUATOR Q&amp;A ===</a:t>
+            </a:r>
+          </a:p>
+          <a:p>
+            <a:r>
+              <a:t>Question: What is the principal security risk of mounting the Docker socket inside a container?</a:t>
+            </a:r>
+          </a:p>
+          <a:p>
+            <a:r>
+              <a:t>Answer: Mounting the Docker socket is equivalent to granting root access to the physical host. Anyone with access to the socket can send commands to the host Docker daemon to pull arbitrary images, create new privileged containers, and mount the host's physical hard drives, rendering container isolation completely obsolete.</a:t>
+            </a:r>
+          </a:p>
+        </p:txBody>
+      </p:sp>
+      <p:sp>
+        <p:nvSpPr>
+          <p:cNvPr id="4" name="Slide Number Placeholder 3"/>
+          <p:cNvSpPr>
+            <a:spLocks noGrp="1"/>
+          </p:cNvSpPr>
+          <p:nvPr>
+            <p:ph type="sldNum" idx="5" sz="quarter"/>
+          </p:nvPr>
+        </p:nvSpPr>
+        <p:spPr/>
+      </p:sp>
+    </p:spTree>
+  </p:cSld>
+  <p:clrMapOvr>
+    <a:masterClrMapping/>
+  </p:clrMapOvr>
+</p:notes>
+</file>
+
+<file path=ppt/notesSlides/notesSlide7.xml><?xml version="1.0" encoding="utf-8"?>
+<p:notes xmlns:a="http://schemas.openxmlformats.org/drawingml/2006/main" xmlns:p="http://schemas.openxmlformats.org/presentationml/2006/main" xmlns:r="http://schemas.openxmlformats.org/officeDocument/2006/relationships">
+  <p:cSld>
+    <p:spTree>
+      <p:nvGrpSpPr>
+        <p:cNvPr id="1" name=""/>
+        <p:cNvGrpSpPr/>
+        <p:nvPr/>
+      </p:nvGrpSpPr>
+      <p:grpSpPr>
+        <a:xfrm>
+          <a:off x="0" y="0"/>
+          <a:ext cx="0" cy="0"/>
+          <a:chOff x="0" y="0"/>
+          <a:chExt cx="0" cy="0"/>
+        </a:xfrm>
+      </p:grpSpPr>
+      <p:sp>
+        <p:nvSpPr>
+          <p:cNvPr id="2" name="Slide Image Placeholder 1"/>
+          <p:cNvSpPr>
+            <a:spLocks noGrp="1"/>
+          </p:cNvSpPr>
+          <p:nvPr>
+            <p:ph type="sldImg" idx="2"/>
+          </p:nvPr>
+        </p:nvSpPr>
+        <p:spPr/>
+      </p:sp>
+      <p:sp>
+        <p:nvSpPr>
+          <p:cNvPr id="3" name="Notes Placeholder 2"/>
+          <p:cNvSpPr>
+            <a:spLocks noGrp="1"/>
+          </p:cNvSpPr>
+          <p:nvPr>
+            <p:ph type="body" idx="3" sz="quarter"/>
+          </p:nvPr>
+        </p:nvSpPr>
+        <p:spPr/>
+        <p:txBody>
+          <a:bodyPr/>
+          <a:lstStyle/>
+          <a:p>
+            <a:r>
+              <a:t>=== SPOKEN TALK TRACK ===</a:t>
+            </a:r>
+          </a:p>
+          <a:p>
+            <a:r>
+              <a:t>"In Stage 4, we execute the final breakout. Using our access to the Docker socket, we issue an API command to launch a new, highly privileged container on the host. In its configuration, we mount the host's physical root filesystem to '/mnt/host' inside the container. Because this container runs with full host namespace access, we traverse directly into '/mnt/host/etc/cron.d' and write a malicious cron job. When the host's cron daemon executes, it runs our script and opens a root-privileged reverse shell back to our attack machine. We have achieved complete host takeover."</a:t>
+            </a:r>
+          </a:p>
+          <a:p/>
+          <a:p>
+            <a:r>
+              <a:t>=== CRITICAL TALKING POINTS ===</a:t>
+            </a:r>
+          </a:p>
+          <a:p>
+            <a:r>
+              <a:t>• Detail the mechanical steps of host escape: privileged container instantiation $_x000D_ightarrow$ root filesystem mount $_x000D_ightarrow$ cron job injection.</a:t>
+            </a:r>
+          </a:p>
+          <a:p>
+            <a:r>
+              <a:t>• Emphasize the threat of persistence: writing to `/etc/cron.d` guarantees that the host daemon will re-execute the reverse shell periodically.</a:t>
+            </a:r>
+          </a:p>
+          <a:p>
+            <a:r>
+              <a:t>• Establish that this completes a full, high-severity exploit chain from a low-privileged container user to total physical host control.</a:t>
+            </a:r>
+          </a:p>
+          <a:p/>
+          <a:p>
+            <a:r>
+              <a:t>=== ANTICIPATED EVALUATOR Q&amp;A ===</a:t>
+            </a:r>
+          </a:p>
+          <a:p>
+            <a:r>
+              <a:t>Question: How can host filesystem mounting be blocked at the enterprise level?</a:t>
+            </a:r>
+          </a:p>
+          <a:p>
+            <a:r>
+              <a:t>Answer: Enterprises should implement Kubernetes Pod Security Admissions (PSA) or open-source policies (like OPA Gatekeeper or Kyverno) to strictly enforce that containers cannot run in privileged mode, share the host PID/IPC namespaces, or mount host paths.</a:t>
+            </a:r>
+          </a:p>
+        </p:txBody>
+      </p:sp>
+      <p:sp>
+        <p:nvSpPr>
+          <p:cNvPr id="4" name="Slide Number Placeholder 3"/>
+          <p:cNvSpPr>
+            <a:spLocks noGrp="1"/>
+          </p:cNvSpPr>
+          <p:nvPr>
+            <p:ph type="sldNum" idx="5" sz="quarter"/>
+          </p:nvPr>
+        </p:nvSpPr>
+        <p:spPr/>
+      </p:sp>
+    </p:spTree>
+  </p:cSld>
+  <p:clrMapOvr>
+    <a:masterClrMapping/>
+  </p:clrMapOvr>
+</p:notes>
+</file>
+
+<file path=ppt/notesSlides/notesSlide8.xml><?xml version="1.0" encoding="utf-8"?>
+<p:notes xmlns:a="http://schemas.openxmlformats.org/drawingml/2006/main" xmlns:p="http://schemas.openxmlformats.org/presentationml/2006/main" xmlns:r="http://schemas.openxmlformats.org/officeDocument/2006/relationships">
+  <p:cSld>
+    <p:spTree>
+      <p:nvGrpSpPr>
+        <p:cNvPr id="1" name=""/>
+        <p:cNvGrpSpPr/>
+        <p:nvPr/>
+      </p:nvGrpSpPr>
+      <p:grpSpPr>
+        <a:xfrm>
+          <a:off x="0" y="0"/>
+          <a:ext cx="0" cy="0"/>
+          <a:chOff x="0" y="0"/>
+          <a:chExt cx="0" cy="0"/>
+        </a:xfrm>
+      </p:grpSpPr>
+      <p:sp>
+        <p:nvSpPr>
+          <p:cNvPr id="2" name="Slide Image Placeholder 1"/>
+          <p:cNvSpPr>
+            <a:spLocks noGrp="1"/>
+          </p:cNvSpPr>
+          <p:nvPr>
+            <p:ph type="sldImg" idx="2"/>
+          </p:nvPr>
+        </p:nvSpPr>
+        <p:spPr/>
+      </p:sp>
+      <p:sp>
+        <p:nvSpPr>
+          <p:cNvPr id="3" name="Notes Placeholder 2"/>
+          <p:cNvSpPr>
+            <a:spLocks noGrp="1"/>
+          </p:cNvSpPr>
+          <p:nvPr>
+            <p:ph type="body" idx="3" sz="quarter"/>
+          </p:nvPr>
+        </p:nvSpPr>
+        <p:spPr/>
+        <p:txBody>
+          <a:bodyPr/>
+          <a:lstStyle/>
+          <a:p>
+            <a:r>
+              <a:t>=== SPOKEN TALK TRACK ===</a:t>
+            </a:r>
+          </a:p>
+          <a:p>
+            <a:r>
+              <a:t>"Beyond runtime hardening, Hexa Force secures the software supply chain using state-of-the-art keyless container signing via Cosign. Traditional signing relies on storing highly sensitive cryptographic private keys. If these keys are leaked, the supply chain is compromised. Hexa Force avoids this completely. We leverage OpenID Connect to exchange GitHub Action build identities for temporary, 10-minute certificates. Cosign signs the built image, recording the signature in the immutable public Rekor transparency log, guaranteeing container origin and integrity."</a:t>
+            </a:r>
+          </a:p>
+          <a:p/>
+          <a:p>
+            <a:r>
+              <a:t>=== CRITICAL TALKING POINTS ===</a:t>
+            </a:r>
+          </a:p>
+          <a:p>
+            <a:r>
+              <a:t>• Contrast traditional key management with modern keyless container signing.</a:t>
+            </a:r>
+          </a:p>
+          <a:p>
+            <a:r>
+              <a:t>• Define the role of Sigstore: Fulcio issues short-lived certificates, Rekor provides the immutable public ledger.</a:t>
+            </a:r>
+          </a:p>
+          <a:p>
+            <a:r>
+              <a:t>• Explain the cryptographic trust path: the signature is bound to a specific OIDC builder identity, verifying code provenance.</a:t>
+            </a:r>
+          </a:p>
+          <a:p/>
+          <a:p>
+            <a:r>
+              <a:t>=== ANTICIPATED EVALUATOR Q&amp;A ===</a:t>
+            </a:r>
+          </a:p>
+          <a:p>
+            <a:r>
+              <a:t>Question: What is Fulcio's role in keyless signing?</a:t>
+            </a:r>
+          </a:p>
+          <a:p>
+            <a:r>
+              <a:t>Answer: Fulcio is the Sigstore Certificate Authority. It issues short-lived (10-minute) X.509 certificates. The certificate is bound to an OIDC token issued by a trusted identity provider (like GitHub Actions), proving that the build pipeline itself signed the container.</a:t>
+            </a:r>
+          </a:p>
+        </p:txBody>
+      </p:sp>
+      <p:sp>
+        <p:nvSpPr>
+          <p:cNvPr id="4" name="Slide Number Placeholder 3"/>
+          <p:cNvSpPr>
+            <a:spLocks noGrp="1"/>
+          </p:cNvSpPr>
+          <p:nvPr>
+            <p:ph type="sldNum" idx="5" sz="quarter"/>
+          </p:nvPr>
+        </p:nvSpPr>
+        <p:spPr/>
+      </p:sp>
+    </p:spTree>
+  </p:cSld>
+  <p:clrMapOvr>
+    <a:masterClrMapping/>
+  </p:clrMapOvr>
+</p:notes>
+</file>
+
+<file path=ppt/notesSlides/notesSlide9.xml><?xml version="1.0" encoding="utf-8"?>
+<p:notes xmlns:a="http://schemas.openxmlformats.org/drawingml/2006/main" xmlns:p="http://schemas.openxmlformats.org/presentationml/2006/main" xmlns:r="http://schemas.openxmlformats.org/officeDocument/2006/relationships">
+  <p:cSld>
+    <p:spTree>
+      <p:nvGrpSpPr>
+        <p:cNvPr id="1" name=""/>
+        <p:cNvGrpSpPr/>
+        <p:nvPr/>
+      </p:nvGrpSpPr>
+      <p:grpSpPr>
+        <a:xfrm>
+          <a:off x="0" y="0"/>
+          <a:ext cx="0" cy="0"/>
+          <a:chOff x="0" y="0"/>
+          <a:chExt cx="0" cy="0"/>
+        </a:xfrm>
+      </p:grpSpPr>
+      <p:sp>
+        <p:nvSpPr>
+          <p:cNvPr id="2" name="Slide Image Placeholder 1"/>
+          <p:cNvSpPr>
+            <a:spLocks noGrp="1"/>
+          </p:cNvSpPr>
+          <p:nvPr>
+            <p:ph type="sldImg" idx="2"/>
+          </p:nvPr>
+        </p:nvSpPr>
+        <p:spPr/>
+      </p:sp>
+      <p:sp>
+        <p:nvSpPr>
+          <p:cNvPr id="3" name="Notes Placeholder 2"/>
+          <p:cNvSpPr>
+            <a:spLocks noGrp="1"/>
+          </p:cNvSpPr>
+          <p:nvPr>
+            <p:ph type="body" idx="3" sz="quarter"/>
+          </p:nvPr>
+        </p:nvSpPr>
+        <p:spPr/>
+        <p:txBody>
+          <a:bodyPr/>
+          <a:lstStyle/>
+          <a:p>
+            <a:r>
+              <a:t>=== SPOKEN TALK TRACK ===</a:t>
+            </a:r>
+          </a:p>
+          <a:p>
+            <a:r>
+              <a:t>"We operationalize this supply chain defense by automating the entire pipeline inside GitHub Actions. Upon a push to the main branch, our workflow triggers. It builds the Docker image, dynamically converts the image tag to lowercase using bash expansion to ensure compatibility with container registry specifications, and pushes it to the GitHub Container Registry. Immediately, Cosign uses the OIDC identity to sign the image. This seamless, automated pipeline guarantees that only verified and signed code is allowed to run in our production environment."</a:t>
+            </a:r>
+          </a:p>
+          <a:p/>
+          <a:p>
+            <a:r>
+              <a:t>=== CRITICAL TALKING POINTS ===</a:t>
+            </a:r>
+          </a:p>
+          <a:p>
+            <a:r>
+              <a:t>• Highlight the automation aspects of the GHA workflow: building, lowercasing, pushing to GHCR, and signing.</a:t>
+            </a:r>
+          </a:p>
+          <a:p>
+            <a:r>
+              <a:t>• Explain the lowercase string translation `${GITHUB_REPOSITORY,,}` as a crucial Docker OCI registry compliance step.</a:t>
+            </a:r>
+          </a:p>
+          <a:p>
+            <a:r>
+              <a:t>• Position the CI/CD pipeline as the core policy enforcement point of your security program.</a:t>
+            </a:r>
+          </a:p>
+          <a:p/>
+          <a:p>
+            <a:r>
+              <a:t>=== ANTICIPATED EVALUATOR Q&amp;A ===</a:t>
+            </a:r>
+          </a:p>
+          <a:p>
+            <a:r>
+              <a:t>Question: How does signature verification work inside a Kubernetes cluster?</a:t>
+            </a:r>
+          </a:p>
+          <a:p>
+            <a:r>
+              <a:t>Answer: A validation controller (like Cosign Policy Controller or Kyverno) runs as an Admission Controller in the cluster. When a new pod request is made, the controller queries the Rekor transparency log to verify the image's cryptographic signature against the allowed OIDC builder identity, rejecting any unsigned or unverified images.</a:t>
+            </a:r>
+          </a:p>
+        </p:txBody>
+      </p:sp>
+      <p:sp>
+        <p:nvSpPr>
+          <p:cNvPr id="4" name="Slide Number Placeholder 3"/>
+          <p:cNvSpPr>
+            <a:spLocks noGrp="1"/>
+          </p:cNvSpPr>
+          <p:nvPr>
+            <p:ph type="sldNum" idx="5" sz="quarter"/>
+          </p:nvPr>
+        </p:nvSpPr>
+        <p:spPr/>
+      </p:sp>
+    </p:spTree>
+  </p:cSld>
+  <p:clrMapOvr>
+    <a:masterClrMapping/>
+  </p:clrMapOvr>
+</p:notes>
 </file>
 
 <file path=ppt/slideLayouts/slideLayout1.xml><?xml version="1.0" encoding="utf-8"?>
@@ -3108,14 +4690,57 @@
       <p:grpSpPr/>
       <p:sp>
         <p:nvSpPr>
-          <p:cNvPr id="2" name="TextBox 1"/>
+          <p:cNvPr id="2" name="Rectangle 1"/>
+          <p:cNvSpPr/>
+          <p:nvPr/>
+        </p:nvSpPr>
+        <p:spPr>
+          <a:xfrm>
+            <a:off x="685800" y="2011680"/>
+            <a:ext cx="109728" cy="2926080"/>
+          </a:xfrm>
+          <a:prstGeom prst="rect">
+            <a:avLst/>
+          </a:prstGeom>
+          <a:solidFill>
+            <a:srgbClr val="2563EB"/>
+          </a:solidFill>
+          <a:ln>
+            <a:noFill/>
+          </a:ln>
+        </p:spPr>
+        <p:style>
+          <a:lnRef idx="1">
+            <a:schemeClr val="accent1"/>
+          </a:lnRef>
+          <a:fillRef idx="3">
+            <a:schemeClr val="accent1"/>
+          </a:fillRef>
+          <a:effectRef idx="2">
+            <a:schemeClr val="accent1"/>
+          </a:effectRef>
+          <a:fontRef idx="minor">
+            <a:schemeClr val="lt1"/>
+          </a:fontRef>
+        </p:style>
+        <p:txBody>
+          <a:bodyPr rtlCol="0" anchor="ctr"/>
+          <a:lstStyle/>
+          <a:p>
+            <a:pPr algn="ctr"/>
+          </a:p>
+        </p:txBody>
+      </p:sp>
+      <p:sp>
+        <p:nvSpPr>
+          <p:cNvPr id="3" name="TextBox 2"/>
           <p:cNvSpPr txBox="1"/>
           <p:nvPr/>
         </p:nvSpPr>
         <p:spPr>
           <a:xfrm>
-            <a:off x="731520" y="1828800"/>
-            <a:ext cx="10698480" cy="3200400"/>
+            <a:off x="914400" y="2011680"/>
+            <a:ext cx="10058400" cy="365760"/>
           </a:xfrm>
           <a:prstGeom prst="rect">
             <a:avLst/>
@@ -3129,61 +4754,29 @@
           <a:lstStyle/>
           <a:p>
             <a:pPr>
-              <a:spcAft>
-                <a:spcPts val="400"/>
-              </a:spcAft>
-              <a:defRPr sz="5400" b="1">
-                <a:solidFill>
-                  <a:srgbClr val="06B6D4"/>
-                </a:solidFill>
-                <a:latin typeface="Trebuchet MS"/>
-              </a:defRPr>
-            </a:pPr>
-            <a:r>
-              <a:t>HEXA FORCE CONTAINER LAB</a:t>
-            </a:r>
-          </a:p>
-          <a:p>
-            <a:pPr>
-              <a:spcAft>
-                <a:spcPts val="1400"/>
-              </a:spcAft>
-              <a:defRPr sz="2600">
-                <a:solidFill>
-                  <a:srgbClr val="FFFFFF"/>
-                </a:solidFill>
-                <a:latin typeface="Trebuchet MS"/>
-              </a:defRPr>
-            </a:pPr>
-            <a:r>
-              <a:t>4-Stage DevSecOps Attack &amp; Mitigation Laboratory</a:t>
-            </a:r>
-          </a:p>
-          <a:p>
-            <a:pPr>
-              <a:defRPr sz="1300" i="1">
-                <a:solidFill>
-                  <a:srgbClr val="94A3B8"/>
-                </a:solidFill>
-                <a:latin typeface="Calibri"/>
-              </a:defRPr>
-            </a:pPr>
-            <a:r>
-              <a:t>Presented by Hexa Force | Cryptographically Signed Container Architectures, OIDC Trust, and DevSecOps Containment Rules</a:t>
-            </a:r>
-          </a:p>
-        </p:txBody>
-      </p:sp>
-      <p:sp>
-        <p:nvSpPr>
-          <p:cNvPr id="3" name="TextBox 2"/>
+              <a:defRPr sz="1100" b="1">
+                <a:solidFill>
+                  <a:srgbClr val="2563EB"/>
+                </a:solidFill>
+                <a:latin typeface="Arial"/>
+              </a:defRPr>
+            </a:pPr>
+            <a:r>
+              <a:t>HEXA FORCE LAB DELIVERY</a:t>
+            </a:r>
+          </a:p>
+        </p:txBody>
+      </p:sp>
+      <p:sp>
+        <p:nvSpPr>
+          <p:cNvPr id="4" name="TextBox 3"/>
           <p:cNvSpPr txBox="1"/>
           <p:nvPr/>
         </p:nvSpPr>
         <p:spPr>
           <a:xfrm>
-            <a:off x="731520" y="5486400"/>
-            <a:ext cx="10698480" cy="731520"/>
+            <a:off x="914400" y="2377440"/>
+            <a:ext cx="10058400" cy="1645920"/>
           </a:xfrm>
           <a:prstGeom prst="rect">
             <a:avLst/>
@@ -3191,21 +4784,61 @@
           <a:noFill/>
         </p:spPr>
         <p:txBody>
-          <a:bodyPr wrap="none">
+          <a:bodyPr wrap="square">
             <a:spAutoFit/>
           </a:bodyPr>
           <a:lstStyle/>
           <a:p>
             <a:pPr>
-              <a:defRPr sz="1100" b="1">
+              <a:defRPr sz="4200" b="1">
+                <a:solidFill>
+                  <a:srgbClr val="FFFFFF"/>
+                </a:solidFill>
+                <a:latin typeface="Arial"/>
+              </a:defRPr>
+            </a:pPr>
+            <a:r>
+              <a:t>HEXA FORCE CONTAINER LAB</a:t>
+            </a:r>
+          </a:p>
+        </p:txBody>
+      </p:sp>
+      <p:sp>
+        <p:nvSpPr>
+          <p:cNvPr id="5" name="TextBox 4"/>
+          <p:cNvSpPr txBox="1"/>
+          <p:nvPr/>
+        </p:nvSpPr>
+        <p:spPr>
+          <a:xfrm>
+            <a:off x="914400" y="3931920"/>
+            <a:ext cx="10058400" cy="914400"/>
+          </a:xfrm>
+          <a:prstGeom prst="rect">
+            <a:avLst/>
+          </a:prstGeom>
+          <a:noFill/>
+        </p:spPr>
+        <p:txBody>
+          <a:bodyPr wrap="square">
+            <a:spAutoFit/>
+          </a:bodyPr>
+          <a:lstStyle/>
+          <a:p>
+            <a:pPr>
+              <a:defRPr sz="1600">
                 <a:solidFill>
                   <a:srgbClr val="94A3B8"/>
                 </a:solidFill>
-                <a:latin typeface="Trebuchet MS"/>
-              </a:defRPr>
-            </a:pPr>
-            <a:r>
-              <a:t>PIPELINE ORCHESTRATION &amp; LAB MANUAL  |  HEXA FORCE INTEGRATION BRIEFING</a:t>
+                <a:latin typeface="Arial"/>
+              </a:defRPr>
+            </a:pPr>
+            <a:r>
+              <a:t>4-Stage DevSecOps Attack &amp; Mitigation Laboratory</a:t>
+            </a:r>
+            <a:br/>
+            <a:r>
+              <a:t>Cryptographically Signed Container Architectures, OIDC Trust, and DevSecOps Containment Rules</a:t>
             </a:r>
           </a:p>
         </p:txBody>
@@ -3244,8 +4877,8 @@
         </p:nvSpPr>
         <p:spPr>
           <a:xfrm>
-            <a:off x="731520" y="365760"/>
-            <a:ext cx="10698480" cy="274320"/>
+            <a:off x="685800" y="365760"/>
+            <a:ext cx="10817352" cy="274320"/>
           </a:xfrm>
           <a:prstGeom prst="rect">
             <a:avLst/>
@@ -3259,15 +4892,15 @@
           <a:lstStyle/>
           <a:p>
             <a:pPr>
-              <a:defRPr sz="1000" b="1">
-                <a:solidFill>
-                  <a:srgbClr val="06B6D4"/>
-                </a:solidFill>
-                <a:latin typeface="Trebuchet MS"/>
-              </a:defRPr>
-            </a:pPr>
-            <a:r>
-              <a:t>BEST PRACTICES GUIDE</a:t>
+              <a:defRPr sz="950" b="1">
+                <a:solidFill>
+                  <a:srgbClr val="2563EB"/>
+                </a:solidFill>
+                <a:latin typeface="Arial"/>
+              </a:defRPr>
+            </a:pPr>
+            <a:r>
+              <a:t>HEXA FORCE CONTAINER SECURITY SERIES</a:t>
             </a:r>
           </a:p>
         </p:txBody>
@@ -3280,8 +4913,8 @@
         </p:nvSpPr>
         <p:spPr>
           <a:xfrm>
-            <a:off x="731520" y="548640"/>
-            <a:ext cx="10698480" cy="731520"/>
+            <a:off x="685800" y="594360"/>
+            <a:ext cx="10817352" cy="731520"/>
           </a:xfrm>
           <a:prstGeom prst="rect">
             <a:avLst/>
@@ -3295,11 +4928,11 @@
           <a:lstStyle/>
           <a:p>
             <a:pPr>
-              <a:defRPr sz="2600" b="1">
+              <a:defRPr sz="2800" b="1">
                 <a:solidFill>
                   <a:srgbClr val="FFFFFF"/>
                 </a:solidFill>
-                <a:latin typeface="Trebuchet MS"/>
+                <a:latin typeface="Arial"/>
               </a:defRPr>
             </a:pPr>
             <a:r>
@@ -3316,8 +4949,8 @@
         </p:nvSpPr>
         <p:spPr>
           <a:xfrm>
-            <a:off x="731520" y="1645920"/>
-            <a:ext cx="3291840" cy="4389120"/>
+            <a:off x="685800" y="1645920"/>
+            <a:ext cx="5120640" cy="4389120"/>
           </a:xfrm>
           <a:prstGeom prst="rect">
             <a:avLst/>
@@ -3325,10 +4958,8 @@
           <a:solidFill>
             <a:srgbClr val="1E293B"/>
           </a:solidFill>
-          <a:ln w="19050">
-            <a:solidFill>
-              <a:srgbClr val="EF4444"/>
-            </a:solidFill>
+          <a:ln>
+            <a:noFill/>
           </a:ln>
         </p:spPr>
         <p:style>
@@ -3346,100 +4977,110 @@
           </a:fontRef>
         </p:style>
         <p:txBody>
-          <a:bodyPr rtlCol="0" anchor="ctr" wrap="square" lIns="182880" rIns="182880" tIns="182880" bIns="182880"/>
-          <a:lstStyle/>
-          <a:p>
-            <a:pPr algn="ctr">
+          <a:bodyPr rtlCol="0" anchor="ctr"/>
+          <a:lstStyle/>
+          <a:p>
+            <a:pPr algn="ctr"/>
+          </a:p>
+        </p:txBody>
+      </p:sp>
+      <p:sp>
+        <p:nvSpPr>
+          <p:cNvPr id="5" name="TextBox 4"/>
+          <p:cNvSpPr txBox="1"/>
+          <p:nvPr/>
+        </p:nvSpPr>
+        <p:spPr>
+          <a:xfrm>
+            <a:off x="868680" y="1828800"/>
+            <a:ext cx="4754880" cy="4023360"/>
+          </a:xfrm>
+          <a:prstGeom prst="rect">
+            <a:avLst/>
+          </a:prstGeom>
+          <a:noFill/>
+        </p:spPr>
+        <p:txBody>
+          <a:bodyPr wrap="square" lIns="0" rIns="0" tIns="0" bIns="0">
+            <a:spAutoFit/>
+          </a:bodyPr>
+          <a:lstStyle/>
+          <a:p>
+            <a:pPr>
               <a:spcAft>
-                <a:spcPts val="400"/>
+                <a:spcPts val="1000"/>
               </a:spcAft>
-              <a:defRPr sz="1400" b="1">
-                <a:solidFill>
-                  <a:srgbClr val="FFFFFF"/>
-                </a:solidFill>
-                <a:latin typeface="Trebuchet MS"/>
-              </a:defRPr>
-            </a:pPr>
-            <a:r>
-              <a:t>1. HOST CONTROLS</a:t>
+              <a:defRPr sz="1300" b="1">
+                <a:solidFill>
+                  <a:srgbClr val="2563EB"/>
+                </a:solidFill>
+                <a:latin typeface="Arial"/>
+              </a:defRPr>
+            </a:pPr>
+            <a:r>
+              <a:t>RUNTIME DEFENSES</a:t>
             </a:r>
           </a:p>
           <a:p>
             <a:pPr>
               <a:spcAft>
-                <a:spcPts val="800"/>
+                <a:spcPts val="600"/>
               </a:spcAft>
-              <a:defRPr sz="1100" b="1">
-                <a:solidFill>
-                  <a:srgbClr val="EF4444"/>
-                </a:solidFill>
-                <a:latin typeface="Calibri"/>
-              </a:defRPr>
-            </a:pPr>
-            <a:r>
-              <a:t>Kernel Security Level</a:t>
+              <a:defRPr sz="1300">
+                <a:solidFill>
+                  <a:srgbClr val="F1F5F9"/>
+                </a:solidFill>
+                <a:latin typeface="Arial"/>
+              </a:defRPr>
+            </a:pPr>
+            <a:r>
+              <a:t>• Drop excessive Linux capabilities: drop CAP_SYS_ADMIN and run with '--cap-drop=ALL' by default.</a:t>
             </a:r>
           </a:p>
           <a:p>
             <a:pPr>
               <a:spcAft>
-                <a:spcPts val="400"/>
+                <a:spcPts val="600"/>
               </a:spcAft>
-              <a:defRPr sz="1200">
-                <a:solidFill>
-                  <a:srgbClr val="94A3B8"/>
-                </a:solidFill>
-                <a:latin typeface="Calibri"/>
-              </a:defRPr>
-            </a:pPr>
-            <a:r>
-              <a:t>• Apply host kernel updates immediately to resolve CVE-2016-5195.</a:t>
+              <a:defRPr sz="1300">
+                <a:solidFill>
+                  <a:srgbClr val="F1F5F9"/>
+                </a:solidFill>
+                <a:latin typeface="Arial"/>
+              </a:defRPr>
+            </a:pPr>
+            <a:r>
+              <a:t>• Set read-only filesystems: run containers with '--read-only' to block exploit downloads and compilations.</a:t>
             </a:r>
           </a:p>
           <a:p>
             <a:pPr>
               <a:spcAft>
-                <a:spcPts val="400"/>
+                <a:spcPts val="600"/>
               </a:spcAft>
-              <a:defRPr sz="1200">
-                <a:solidFill>
-                  <a:srgbClr val="94A3B8"/>
-                </a:solidFill>
-                <a:latin typeface="Calibri"/>
-              </a:defRPr>
-            </a:pPr>
-            <a:r>
-              <a:t>• Implement seccomp security rules to block madvise MADV_DONTNEED if not required.</a:t>
-            </a:r>
-          </a:p>
-          <a:p>
-            <a:pPr>
-              <a:spcAft>
-                <a:spcPts val="400"/>
-              </a:spcAft>
-              <a:defRPr sz="1200">
-                <a:solidFill>
-                  <a:srgbClr val="94A3B8"/>
-                </a:solidFill>
-                <a:latin typeface="Calibri"/>
-              </a:defRPr>
-            </a:pPr>
-            <a:r>
-              <a:t>• Employ sandbox container engines (gVisor) in untrusted public environments.</a:t>
-            </a:r>
-          </a:p>
-        </p:txBody>
-      </p:sp>
-      <p:sp>
-        <p:nvSpPr>
-          <p:cNvPr id="5" name="Rectangle 4"/>
+              <a:defRPr sz="1300">
+                <a:solidFill>
+                  <a:srgbClr val="F1F5F9"/>
+                </a:solidFill>
+                <a:latin typeface="Arial"/>
+              </a:defRPr>
+            </a:pPr>
+            <a:r>
+              <a:t>• Non-root execution: enforce 'USER victim' or non-root UID policies.</a:t>
+            </a:r>
+          </a:p>
+        </p:txBody>
+      </p:sp>
+      <p:sp>
+        <p:nvSpPr>
+          <p:cNvPr id="6" name="Rectangle 5"/>
           <p:cNvSpPr/>
           <p:nvPr/>
         </p:nvSpPr>
         <p:spPr>
           <a:xfrm>
-            <a:off x="4389120" y="1645920"/>
-            <a:ext cx="3291840" cy="4389120"/>
+            <a:off x="6217920" y="1645920"/>
+            <a:ext cx="5120640" cy="4389120"/>
           </a:xfrm>
           <a:prstGeom prst="rect">
             <a:avLst/>
@@ -3449,7 +5090,7 @@
           </a:solidFill>
           <a:ln w="19050">
             <a:solidFill>
-              <a:srgbClr val="06B6D4"/>
+              <a:srgbClr val="10B981"/>
             </a:solidFill>
           </a:ln>
         </p:spPr>
@@ -3468,208 +5109,96 @@
           </a:fontRef>
         </p:style>
         <p:txBody>
-          <a:bodyPr rtlCol="0" anchor="ctr" wrap="square" lIns="182880" rIns="182880" tIns="182880" bIns="182880"/>
-          <a:lstStyle/>
-          <a:p>
-            <a:pPr algn="ctr">
-              <a:spcAft>
-                <a:spcPts val="400"/>
-              </a:spcAft>
-              <a:defRPr sz="1400" b="1">
-                <a:solidFill>
-                  <a:srgbClr val="FFFFFF"/>
-                </a:solidFill>
-                <a:latin typeface="Trebuchet MS"/>
-              </a:defRPr>
-            </a:pPr>
-            <a:r>
-              <a:t>2. CONTAINER CONFIGURATION</a:t>
-            </a:r>
-          </a:p>
-          <a:p>
-            <a:pPr>
-              <a:spcAft>
-                <a:spcPts val="800"/>
-              </a:spcAft>
-              <a:defRPr sz="1100" b="1">
-                <a:solidFill>
-                  <a:srgbClr val="06B6D4"/>
-                </a:solidFill>
-                <a:latin typeface="Calibri"/>
-              </a:defRPr>
-            </a:pPr>
-            <a:r>
-              <a:t>Least Privilege Isolation</a:t>
-            </a:r>
-          </a:p>
-          <a:p>
-            <a:pPr>
-              <a:spcAft>
-                <a:spcPts val="400"/>
-              </a:spcAft>
-              <a:defRPr sz="1200">
-                <a:solidFill>
-                  <a:srgbClr val="94A3B8"/>
-                </a:solidFill>
-                <a:latin typeface="Calibri"/>
-              </a:defRPr>
-            </a:pPr>
-            <a:r>
-              <a:t>• Never employ --pid=host namespaces.</a:t>
-            </a:r>
-          </a:p>
-          <a:p>
-            <a:pPr>
-              <a:spcAft>
-                <a:spcPts val="400"/>
-              </a:spcAft>
-              <a:defRPr sz="1200">
-                <a:solidFill>
-                  <a:srgbClr val="94A3B8"/>
-                </a:solidFill>
-                <a:latin typeface="Calibri"/>
-              </a:defRPr>
-            </a:pPr>
-            <a:r>
-              <a:t>• Drop all default privileges: docker run --cap-drop=ALL.</a:t>
-            </a:r>
-          </a:p>
-          <a:p>
-            <a:pPr>
-              <a:spcAft>
-                <a:spcPts val="400"/>
-              </a:spcAft>
-              <a:defRPr sz="1200">
-                <a:solidFill>
-                  <a:srgbClr val="94A3B8"/>
-                </a:solidFill>
-                <a:latin typeface="Calibri"/>
-              </a:defRPr>
-            </a:pPr>
-            <a:r>
-              <a:t>• Run services as custom USER victim (unprivileged accounts).</a:t>
-            </a:r>
-          </a:p>
-        </p:txBody>
-      </p:sp>
-      <p:sp>
-        <p:nvSpPr>
-          <p:cNvPr id="6" name="Rectangle 5"/>
-          <p:cNvSpPr/>
+          <a:bodyPr rtlCol="0" anchor="ctr"/>
+          <a:lstStyle/>
+          <a:p>
+            <a:pPr algn="ctr"/>
+          </a:p>
+        </p:txBody>
+      </p:sp>
+      <p:sp>
+        <p:nvSpPr>
+          <p:cNvPr id="7" name="TextBox 6"/>
+          <p:cNvSpPr txBox="1"/>
           <p:nvPr/>
         </p:nvSpPr>
         <p:spPr>
           <a:xfrm>
-            <a:off x="8046720" y="1645920"/>
-            <a:ext cx="3291840" cy="4389120"/>
+            <a:off x="6400800" y="1828800"/>
+            <a:ext cx="4754880" cy="4023360"/>
           </a:xfrm>
           <a:prstGeom prst="rect">
             <a:avLst/>
           </a:prstGeom>
-          <a:solidFill>
-            <a:srgbClr val="1E293B"/>
-          </a:solidFill>
-          <a:ln w="19050">
-            <a:solidFill>
-              <a:srgbClr val="22C55E"/>
-            </a:solidFill>
-          </a:ln>
-        </p:spPr>
-        <p:style>
-          <a:lnRef idx="1">
-            <a:schemeClr val="accent1"/>
-          </a:lnRef>
-          <a:fillRef idx="3">
-            <a:schemeClr val="accent1"/>
-          </a:fillRef>
-          <a:effectRef idx="2">
-            <a:schemeClr val="accent1"/>
-          </a:effectRef>
-          <a:fontRef idx="minor">
-            <a:schemeClr val="lt1"/>
-          </a:fontRef>
-        </p:style>
-        <p:txBody>
-          <a:bodyPr rtlCol="0" anchor="ctr" wrap="square" lIns="182880" rIns="182880" tIns="182880" bIns="182880"/>
-          <a:lstStyle/>
-          <a:p>
-            <a:pPr algn="ctr">
+          <a:noFill/>
+        </p:spPr>
+        <p:txBody>
+          <a:bodyPr wrap="square" lIns="0" rIns="0" tIns="0" bIns="0">
+            <a:spAutoFit/>
+          </a:bodyPr>
+          <a:lstStyle/>
+          <a:p>
+            <a:pPr>
               <a:spcAft>
-                <a:spcPts val="400"/>
+                <a:spcPts val="1000"/>
               </a:spcAft>
-              <a:defRPr sz="1400" b="1">
-                <a:solidFill>
-                  <a:srgbClr val="FFFFFF"/>
-                </a:solidFill>
-                <a:latin typeface="Trebuchet MS"/>
-              </a:defRPr>
-            </a:pPr>
-            <a:r>
-              <a:t>3. STORAGE &amp; STORAGE APIS</a:t>
+              <a:defRPr sz="1300" b="1">
+                <a:solidFill>
+                  <a:srgbClr val="10B981"/>
+                </a:solidFill>
+                <a:latin typeface="Arial"/>
+              </a:defRPr>
+            </a:pPr>
+            <a:r>
+              <a:t>HOST &amp; INFRASTRUCTURE DEFENSES</a:t>
             </a:r>
           </a:p>
           <a:p>
             <a:pPr>
               <a:spcAft>
-                <a:spcPts val="800"/>
+                <a:spcPts val="600"/>
               </a:spcAft>
-              <a:defRPr sz="1100" b="1">
-                <a:solidFill>
-                  <a:srgbClr val="22C55E"/>
-                </a:solidFill>
-                <a:latin typeface="Calibri"/>
-              </a:defRPr>
-            </a:pPr>
-            <a:r>
-              <a:t>Access Controls</a:t>
+              <a:defRPr sz="1300">
+                <a:solidFill>
+                  <a:srgbClr val="F1F5F9"/>
+                </a:solidFill>
+                <a:latin typeface="Arial"/>
+              </a:defRPr>
+            </a:pPr>
+            <a:r>
+              <a:t>• Host Kernel Patching: Strictly enforce regular patching schedules for CVE-2016-5195 and other kernel exploits.</a:t>
             </a:r>
           </a:p>
           <a:p>
             <a:pPr>
               <a:spcAft>
-                <a:spcPts val="400"/>
+                <a:spcPts val="600"/>
               </a:spcAft>
-              <a:defRPr sz="1200">
-                <a:solidFill>
-                  <a:srgbClr val="94A3B8"/>
-                </a:solidFill>
-                <a:latin typeface="Calibri"/>
-              </a:defRPr>
-            </a:pPr>
-            <a:r>
-              <a:t>• Enforce read-only volumes strictly using the :ro flag.</a:t>
+              <a:defRPr sz="1300">
+                <a:solidFill>
+                  <a:srgbClr val="F1F5F9"/>
+                </a:solidFill>
+                <a:latin typeface="Arial"/>
+              </a:defRPr>
+            </a:pPr>
+            <a:r>
+              <a:t>• Socket Restrictions: Completely block mounting '/var/run/docker.sock' in application containers.</a:t>
             </a:r>
           </a:p>
           <a:p>
             <a:pPr>
               <a:spcAft>
-                <a:spcPts val="400"/>
+                <a:spcPts val="600"/>
               </a:spcAft>
-              <a:defRPr sz="1200">
-                <a:solidFill>
-                  <a:srgbClr val="94A3B8"/>
-                </a:solidFill>
-                <a:latin typeface="Calibri"/>
-              </a:defRPr>
-            </a:pPr>
-            <a:r>
-              <a:t>• Prohibit mounting /var/run/docker.sock UNIX sockets.</a:t>
-            </a:r>
-          </a:p>
-          <a:p>
-            <a:pPr>
-              <a:spcAft>
-                <a:spcPts val="400"/>
-              </a:spcAft>
-              <a:defRPr sz="1200">
-                <a:solidFill>
-                  <a:srgbClr val="94A3B8"/>
-                </a:solidFill>
-                <a:latin typeface="Calibri"/>
-              </a:defRPr>
-            </a:pPr>
-            <a:r>
-              <a:t>• Avoid mounting critical host configurations (/etc, /opt, /root).</a:t>
+              <a:defRPr sz="1300">
+                <a:solidFill>
+                  <a:srgbClr val="F1F5F9"/>
+                </a:solidFill>
+                <a:latin typeface="Arial"/>
+              </a:defRPr>
+            </a:pPr>
+            <a:r>
+              <a:t>• LSM Sandboxing: Deploy AppArmor or SELinux profiles.</a:t>
             </a:r>
           </a:p>
         </p:txBody>
@@ -3708,8 +5237,8 @@
         </p:nvSpPr>
         <p:spPr>
           <a:xfrm>
-            <a:off x="731520" y="365760"/>
-            <a:ext cx="10698480" cy="274320"/>
+            <a:off x="685800" y="365760"/>
+            <a:ext cx="10817352" cy="274320"/>
           </a:xfrm>
           <a:prstGeom prst="rect">
             <a:avLst/>
@@ -3723,15 +5252,15 @@
           <a:lstStyle/>
           <a:p>
             <a:pPr>
-              <a:defRPr sz="1000" b="1">
-                <a:solidFill>
-                  <a:srgbClr val="06B6D4"/>
-                </a:solidFill>
-                <a:latin typeface="Trebuchet MS"/>
-              </a:defRPr>
-            </a:pPr>
-            <a:r>
-              <a:t>KEY TAKEAWAYS</a:t>
+              <a:defRPr sz="950" b="1">
+                <a:solidFill>
+                  <a:srgbClr val="2563EB"/>
+                </a:solidFill>
+                <a:latin typeface="Arial"/>
+              </a:defRPr>
+            </a:pPr>
+            <a:r>
+              <a:t>HEXA FORCE CONTAINER SECURITY SERIES</a:t>
             </a:r>
           </a:p>
         </p:txBody>
@@ -3744,8 +5273,8 @@
         </p:nvSpPr>
         <p:spPr>
           <a:xfrm>
-            <a:off x="731520" y="548640"/>
-            <a:ext cx="10698480" cy="731520"/>
+            <a:off x="685800" y="594360"/>
+            <a:ext cx="10817352" cy="731520"/>
           </a:xfrm>
           <a:prstGeom prst="rect">
             <a:avLst/>
@@ -3759,11 +5288,11 @@
           <a:lstStyle/>
           <a:p>
             <a:pPr>
-              <a:defRPr sz="2600" b="1">
+              <a:defRPr sz="2800" b="1">
                 <a:solidFill>
                   <a:srgbClr val="FFFFFF"/>
                 </a:solidFill>
-                <a:latin typeface="Trebuchet MS"/>
+                <a:latin typeface="Arial"/>
               </a:defRPr>
             </a:pPr>
             <a:r>
@@ -3774,213 +5303,14 @@
       </p:sp>
       <p:sp>
         <p:nvSpPr>
-          <p:cNvPr id="4" name="TextBox 3"/>
-          <p:cNvSpPr txBox="1"/>
-          <p:nvPr/>
-        </p:nvSpPr>
-        <p:spPr>
-          <a:xfrm>
-            <a:off x="731520" y="1645920"/>
-            <a:ext cx="5486400" cy="4572000"/>
-          </a:xfrm>
-          <a:prstGeom prst="rect">
-            <a:avLst/>
-          </a:prstGeom>
-          <a:noFill/>
-        </p:spPr>
-        <p:txBody>
-          <a:bodyPr wrap="square" lIns="0" rIns="0" tIns="0" bIns="0">
-            <a:spAutoFit/>
-          </a:bodyPr>
-          <a:lstStyle/>
-          <a:p>
-            <a:pPr>
-              <a:spcAft>
-                <a:spcPts val="1000"/>
-              </a:spcAft>
-              <a:defRPr sz="1500" b="1">
-                <a:solidFill>
-                  <a:srgbClr val="FFFFFF"/>
-                </a:solidFill>
-                <a:latin typeface="Calibri"/>
-              </a:defRPr>
-            </a:pPr>
-            <a:r>
-              <a:t>•  Containers Share Host OS Foundations</a:t>
-            </a:r>
-          </a:p>
-          <a:p>
-            <a:pPr>
-              <a:spcAft>
-                <a:spcPts val="1000"/>
-              </a:spcAft>
-              <a:defRPr sz="1400">
-                <a:solidFill>
-                  <a:srgbClr val="94A3B8"/>
-                </a:solidFill>
-                <a:latin typeface="Calibri"/>
-              </a:defRPr>
-            </a:pPr>
-            <a:r>
-              <a:t>   •  Container containment is only as strong as the host kernel.</a:t>
-            </a:r>
-          </a:p>
-          <a:p>
-            <a:pPr>
-              <a:spcAft>
-                <a:spcPts val="1000"/>
-              </a:spcAft>
-              <a:defRPr sz="1400">
-                <a:solidFill>
-                  <a:srgbClr val="94A3B8"/>
-                </a:solidFill>
-                <a:latin typeface="Calibri"/>
-              </a:defRPr>
-            </a:pPr>
-            <a:r>
-              <a:t>   •  Bypassing kernel barriers compromises all namespaces.</a:t>
-            </a:r>
-          </a:p>
-          <a:p>
-            <a:pPr>
-              <a:spcAft>
-                <a:spcPts val="1000"/>
-              </a:spcAft>
-              <a:defRPr sz="1500" b="1">
-                <a:solidFill>
-                  <a:srgbClr val="FFFFFF"/>
-                </a:solidFill>
-                <a:latin typeface="Calibri"/>
-              </a:defRPr>
-            </a:pPr>
-            <a:r>
-              <a:t>•  Mitigations are Multi-layered</a:t>
-            </a:r>
-          </a:p>
-          <a:p>
-            <a:pPr>
-              <a:spcAft>
-                <a:spcPts val="1000"/>
-              </a:spcAft>
-              <a:defRPr sz="1400">
-                <a:solidFill>
-                  <a:srgbClr val="94A3B8"/>
-                </a:solidFill>
-                <a:latin typeface="Calibri"/>
-              </a:defRPr>
-            </a:pPr>
-            <a:r>
-              <a:t>   •  Securing pipelines requires host updates, capabilities control,</a:t>
-            </a:r>
-          </a:p>
-          <a:p>
-            <a:pPr>
-              <a:spcAft>
-                <a:spcPts val="1000"/>
-              </a:spcAft>
-              <a:defRPr sz="1400">
-                <a:solidFill>
-                  <a:srgbClr val="94A3B8"/>
-                </a:solidFill>
-                <a:latin typeface="Calibri"/>
-              </a:defRPr>
-            </a:pPr>
-            <a:r>
-              <a:t>   •  socket restrictions, and read-only storage settings.</a:t>
-            </a:r>
-          </a:p>
-          <a:p>
-            <a:pPr>
-              <a:spcAft>
-                <a:spcPts val="1000"/>
-              </a:spcAft>
-              <a:defRPr sz="1500" b="1">
-                <a:solidFill>
-                  <a:srgbClr val="22C55E"/>
-                </a:solidFill>
-                <a:latin typeface="Calibri"/>
-              </a:defRPr>
-            </a:pPr>
-            <a:r>
-              <a:t>🟢  Successful Hexa Force Outcome</a:t>
-            </a:r>
-          </a:p>
-          <a:p>
-            <a:pPr>
-              <a:spcAft>
-                <a:spcPts val="1000"/>
-              </a:spcAft>
-              <a:defRPr sz="1400">
-                <a:solidFill>
-                  <a:srgbClr val="94A3B8"/>
-                </a:solidFill>
-                <a:latin typeface="Calibri"/>
-              </a:defRPr>
-            </a:pPr>
-            <a:r>
-              <a:t>   •  The CI/CD pipeline verified that modern kernels and proper</a:t>
-            </a:r>
-          </a:p>
-          <a:p>
-            <a:pPr>
-              <a:spcAft>
-                <a:spcPts val="1000"/>
-              </a:spcAft>
-              <a:defRPr sz="1400">
-                <a:solidFill>
-                  <a:srgbClr val="94A3B8"/>
-                </a:solidFill>
-                <a:latin typeface="Calibri"/>
-              </a:defRPr>
-            </a:pPr>
-            <a:r>
-              <a:t>   •  read-only volume controls successfully contain advanced escapes.</a:t>
-            </a:r>
-          </a:p>
-          <a:p>
-            <a:pPr>
-              <a:spcAft>
-                <a:spcPts val="1000"/>
-              </a:spcAft>
-              <a:defRPr sz="1500" b="1">
-                <a:solidFill>
-                  <a:srgbClr val="FFFFFF"/>
-                </a:solidFill>
-                <a:latin typeface="Calibri"/>
-              </a:defRPr>
-            </a:pPr>
-            <a:r>
-              <a:t>•  Continuous Security Regression Testing</a:t>
-            </a:r>
-          </a:p>
-          <a:p>
-            <a:pPr>
-              <a:spcAft>
-                <a:spcPts val="1000"/>
-              </a:spcAft>
-              <a:defRPr sz="1400">
-                <a:solidFill>
-                  <a:srgbClr val="94A3B8"/>
-                </a:solidFill>
-                <a:latin typeface="Calibri"/>
-              </a:defRPr>
-            </a:pPr>
-            <a:r>
-              <a:t>   •  Integrating automated lab checks in GHA stops regressions before deploy.</a:t>
-            </a:r>
-          </a:p>
-        </p:txBody>
-      </p:sp>
-      <p:sp>
-        <p:nvSpPr>
-          <p:cNvPr id="5" name="Rectangle 4"/>
+          <p:cNvPr id="4" name="Rectangle 3"/>
           <p:cNvSpPr/>
           <p:nvPr/>
         </p:nvSpPr>
         <p:spPr>
           <a:xfrm>
-            <a:off x="6583680" y="1645920"/>
-            <a:ext cx="4846320" cy="4389120"/>
+            <a:off x="685800" y="1645920"/>
+            <a:ext cx="5120640" cy="4389120"/>
           </a:xfrm>
           <a:prstGeom prst="rect">
             <a:avLst/>
@@ -3988,10 +5318,8 @@
           <a:solidFill>
             <a:srgbClr val="1E293B"/>
           </a:solidFill>
-          <a:ln w="19050">
-            <a:solidFill>
-              <a:srgbClr val="06B6D4"/>
-            </a:solidFill>
+          <a:ln>
+            <a:noFill/>
           </a:ln>
         </p:spPr>
         <p:style>
@@ -4009,86 +5337,194 @@
           </a:fontRef>
         </p:style>
         <p:txBody>
-          <a:bodyPr rtlCol="0" anchor="ctr" wrap="square" lIns="182880" rIns="182880" tIns="182880" bIns="182880"/>
-          <a:lstStyle/>
-          <a:p>
-            <a:pPr algn="ctr">
+          <a:bodyPr rtlCol="0" anchor="ctr"/>
+          <a:lstStyle/>
+          <a:p>
+            <a:pPr algn="ctr"/>
+          </a:p>
+        </p:txBody>
+      </p:sp>
+      <p:sp>
+        <p:nvSpPr>
+          <p:cNvPr id="5" name="TextBox 4"/>
+          <p:cNvSpPr txBox="1"/>
+          <p:nvPr/>
+        </p:nvSpPr>
+        <p:spPr>
+          <a:xfrm>
+            <a:off x="868680" y="1828800"/>
+            <a:ext cx="4754880" cy="4023360"/>
+          </a:xfrm>
+          <a:prstGeom prst="rect">
+            <a:avLst/>
+          </a:prstGeom>
+          <a:noFill/>
+        </p:spPr>
+        <p:txBody>
+          <a:bodyPr wrap="square" lIns="0" rIns="0" tIns="0" bIns="0">
+            <a:spAutoFit/>
+          </a:bodyPr>
+          <a:lstStyle/>
+          <a:p>
+            <a:pPr>
               <a:spcAft>
-                <a:spcPts val="400"/>
+                <a:spcPts val="1000"/>
               </a:spcAft>
-              <a:defRPr sz="1400" b="1">
-                <a:solidFill>
-                  <a:srgbClr val="FFFFFF"/>
-                </a:solidFill>
-                <a:latin typeface="Trebuchet MS"/>
-              </a:defRPr>
-            </a:pPr>
-            <a:r>
-              <a:t>THE GOLDEN RULE OF DEVSECOPS</a:t>
+              <a:defRPr sz="1300" b="1">
+                <a:solidFill>
+                  <a:srgbClr val="2563EB"/>
+                </a:solidFill>
+                <a:latin typeface="Arial"/>
+              </a:defRPr>
+            </a:pPr>
+            <a:r>
+              <a:t>SUMMARY OF SUCCESS</a:t>
             </a:r>
           </a:p>
           <a:p>
             <a:pPr>
               <a:spcAft>
-                <a:spcPts val="800"/>
+                <a:spcPts val="600"/>
               </a:spcAft>
-              <a:defRPr sz="1100" b="1">
-                <a:solidFill>
-                  <a:srgbClr val="06B6D4"/>
-                </a:solidFill>
-                <a:latin typeface="Calibri"/>
-              </a:defRPr>
-            </a:pPr>
-            <a:r>
-              <a:t>Final Recommendation</a:t>
+              <a:defRPr sz="1300">
+                <a:solidFill>
+                  <a:srgbClr val="F1F5F9"/>
+                </a:solidFill>
+                <a:latin typeface="Arial"/>
+              </a:defRPr>
+            </a:pPr>
+            <a:r>
+              <a:t>• Exploit chain fully mapped: demonstrated how minor misconfigurations interact with kernel vulnerabilities to allow host escape.</a:t>
             </a:r>
           </a:p>
           <a:p>
             <a:pPr>
               <a:spcAft>
-                <a:spcPts val="400"/>
+                <a:spcPts val="600"/>
               </a:spcAft>
-              <a:defRPr sz="1200">
-                <a:solidFill>
-                  <a:srgbClr val="94A3B8"/>
-                </a:solidFill>
-                <a:latin typeface="Calibri"/>
-              </a:defRPr>
-            </a:pPr>
-            <a:r>
-              <a:t>• Containers are NOT isolation virtual machines.</a:t>
-            </a:r>
-          </a:p>
+              <a:defRPr sz="1300">
+                <a:solidFill>
+                  <a:srgbClr val="F1F5F9"/>
+                </a:solidFill>
+                <a:latin typeface="Arial"/>
+              </a:defRPr>
+            </a:pPr>
+            <a:r>
+              <a:t>• Supply Chain Secured: implemented modern keyless signing to guarantee deployment provenance.</a:t>
+            </a:r>
+          </a:p>
+        </p:txBody>
+      </p:sp>
+      <p:sp>
+        <p:nvSpPr>
+          <p:cNvPr id="6" name="Rectangle 5"/>
+          <p:cNvSpPr/>
+          <p:nvPr/>
+        </p:nvSpPr>
+        <p:spPr>
+          <a:xfrm>
+            <a:off x="6217920" y="1645920"/>
+            <a:ext cx="5120640" cy="4389120"/>
+          </a:xfrm>
+          <a:prstGeom prst="rect">
+            <a:avLst/>
+          </a:prstGeom>
+          <a:solidFill>
+            <a:srgbClr val="1E293B"/>
+          </a:solidFill>
+          <a:ln>
+            <a:noFill/>
+          </a:ln>
+        </p:spPr>
+        <p:style>
+          <a:lnRef idx="1">
+            <a:schemeClr val="accent1"/>
+          </a:lnRef>
+          <a:fillRef idx="3">
+            <a:schemeClr val="accent1"/>
+          </a:fillRef>
+          <a:effectRef idx="2">
+            <a:schemeClr val="accent1"/>
+          </a:effectRef>
+          <a:fontRef idx="minor">
+            <a:schemeClr val="lt1"/>
+          </a:fontRef>
+        </p:style>
+        <p:txBody>
+          <a:bodyPr rtlCol="0" anchor="ctr"/>
+          <a:lstStyle/>
+          <a:p>
+            <a:pPr algn="ctr"/>
+          </a:p>
+        </p:txBody>
+      </p:sp>
+      <p:sp>
+        <p:nvSpPr>
+          <p:cNvPr id="7" name="TextBox 6"/>
+          <p:cNvSpPr txBox="1"/>
+          <p:nvPr/>
+        </p:nvSpPr>
+        <p:spPr>
+          <a:xfrm>
+            <a:off x="6400800" y="1828800"/>
+            <a:ext cx="4754880" cy="4023360"/>
+          </a:xfrm>
+          <a:prstGeom prst="rect">
+            <a:avLst/>
+          </a:prstGeom>
+          <a:noFill/>
+        </p:spPr>
+        <p:txBody>
+          <a:bodyPr wrap="square" lIns="0" rIns="0" tIns="0" bIns="0">
+            <a:spAutoFit/>
+          </a:bodyPr>
+          <a:lstStyle/>
           <a:p>
             <a:pPr>
               <a:spcAft>
-                <a:spcPts val="400"/>
+                <a:spcPts val="1000"/>
               </a:spcAft>
-              <a:defRPr sz="1200">
-                <a:solidFill>
-                  <a:srgbClr val="94A3B8"/>
-                </a:solidFill>
-                <a:latin typeface="Calibri"/>
-              </a:defRPr>
-            </a:pPr>
-            <a:r>
-              <a:t>• Host OS updates are the baseline requirement for container cluster security.</a:t>
+              <a:defRPr sz="1300" b="1">
+                <a:solidFill>
+                  <a:srgbClr val="2563EB"/>
+                </a:solidFill>
+                <a:latin typeface="Arial"/>
+              </a:defRPr>
+            </a:pPr>
+            <a:r>
+              <a:t>STRATEGIC MISSION</a:t>
             </a:r>
           </a:p>
           <a:p>
             <a:pPr>
               <a:spcAft>
-                <a:spcPts val="400"/>
+                <a:spcPts val="600"/>
               </a:spcAft>
-              <a:defRPr sz="1200">
-                <a:solidFill>
-                  <a:srgbClr val="94A3B8"/>
-                </a:solidFill>
-                <a:latin typeface="Calibri"/>
-              </a:defRPr>
-            </a:pPr>
-            <a:r>
-              <a:t>• Drop capabilities, run as unprivileged users, mount volumes read-only, and audit docker.sock exposure constantly.</a:t>
+              <a:defRPr sz="1300">
+                <a:solidFill>
+                  <a:srgbClr val="F1F5F9"/>
+                </a:solidFill>
+                <a:latin typeface="Arial"/>
+              </a:defRPr>
+            </a:pPr>
+            <a:r>
+              <a:t>• Security as an Enabler: integrating cryptographic signing directly into CI/CD ensures automation without slowing delivery.</a:t>
+            </a:r>
+          </a:p>
+          <a:p>
+            <a:pPr>
+              <a:spcAft>
+                <a:spcPts val="600"/>
+              </a:spcAft>
+              <a:defRPr sz="1300">
+                <a:solidFill>
+                  <a:srgbClr val="F1F5F9"/>
+                </a:solidFill>
+                <a:latin typeface="Arial"/>
+              </a:defRPr>
+            </a:pPr>
+            <a:r>
+              <a:t>• Continuous Hardening: container virtualization is not a security boundary; defense must be applied continuously across the pipeline.</a:t>
             </a:r>
           </a:p>
         </p:txBody>
@@ -4127,8 +5563,8 @@
         </p:nvSpPr>
         <p:spPr>
           <a:xfrm>
-            <a:off x="731520" y="365760"/>
-            <a:ext cx="10698480" cy="274320"/>
+            <a:off x="685800" y="365760"/>
+            <a:ext cx="10817352" cy="274320"/>
           </a:xfrm>
           <a:prstGeom prst="rect">
             <a:avLst/>
@@ -4142,15 +5578,15 @@
           <a:lstStyle/>
           <a:p>
             <a:pPr>
-              <a:defRPr sz="1000" b="1">
-                <a:solidFill>
-                  <a:srgbClr val="06B6D4"/>
-                </a:solidFill>
-                <a:latin typeface="Trebuchet MS"/>
-              </a:defRPr>
-            </a:pPr>
-            <a:r>
-              <a:t>EXECUTIVE PRESENTATION GUIDE</a:t>
+              <a:defRPr sz="950" b="1">
+                <a:solidFill>
+                  <a:srgbClr val="2563EB"/>
+                </a:solidFill>
+                <a:latin typeface="Arial"/>
+              </a:defRPr>
+            </a:pPr>
+            <a:r>
+              <a:t>HEXA FORCE CONTAINER SECURITY SERIES</a:t>
             </a:r>
           </a:p>
         </p:txBody>
@@ -4163,8 +5599,8 @@
         </p:nvSpPr>
         <p:spPr>
           <a:xfrm>
-            <a:off x="731520" y="548640"/>
-            <a:ext cx="10698480" cy="731520"/>
+            <a:off x="685800" y="594360"/>
+            <a:ext cx="10817352" cy="731520"/>
           </a:xfrm>
           <a:prstGeom prst="rect">
             <a:avLst/>
@@ -4178,11 +5614,11 @@
           <a:lstStyle/>
           <a:p>
             <a:pPr>
-              <a:defRPr sz="2600" b="1">
+              <a:defRPr sz="2800" b="1">
                 <a:solidFill>
                   <a:srgbClr val="FFFFFF"/>
                 </a:solidFill>
-                <a:latin typeface="Trebuchet MS"/>
+                <a:latin typeface="Arial"/>
               </a:defRPr>
             </a:pPr>
             <a:r>
@@ -4193,14 +5629,57 @@
       </p:sp>
       <p:sp>
         <p:nvSpPr>
-          <p:cNvPr id="4" name="TextBox 3"/>
+          <p:cNvPr id="4" name="Rectangle 3"/>
+          <p:cNvSpPr/>
+          <p:nvPr/>
+        </p:nvSpPr>
+        <p:spPr>
+          <a:xfrm>
+            <a:off x="685800" y="1645920"/>
+            <a:ext cx="5120640" cy="4389120"/>
+          </a:xfrm>
+          <a:prstGeom prst="rect">
+            <a:avLst/>
+          </a:prstGeom>
+          <a:solidFill>
+            <a:srgbClr val="1E293B"/>
+          </a:solidFill>
+          <a:ln>
+            <a:noFill/>
+          </a:ln>
+        </p:spPr>
+        <p:style>
+          <a:lnRef idx="1">
+            <a:schemeClr val="accent1"/>
+          </a:lnRef>
+          <a:fillRef idx="3">
+            <a:schemeClr val="accent1"/>
+          </a:fillRef>
+          <a:effectRef idx="2">
+            <a:schemeClr val="accent1"/>
+          </a:effectRef>
+          <a:fontRef idx="minor">
+            <a:schemeClr val="lt1"/>
+          </a:fontRef>
+        </p:style>
+        <p:txBody>
+          <a:bodyPr rtlCol="0" anchor="ctr"/>
+          <a:lstStyle/>
+          <a:p>
+            <a:pPr algn="ctr"/>
+          </a:p>
+        </p:txBody>
+      </p:sp>
+      <p:sp>
+        <p:nvSpPr>
+          <p:cNvPr id="5" name="TextBox 4"/>
           <p:cNvSpPr txBox="1"/>
           <p:nvPr/>
         </p:nvSpPr>
         <p:spPr>
           <a:xfrm>
-            <a:off x="731520" y="1645920"/>
-            <a:ext cx="5029200" cy="4389120"/>
+            <a:off x="868680" y="1828800"/>
+            <a:ext cx="4754880" cy="4023360"/>
           </a:xfrm>
           <a:prstGeom prst="rect">
             <a:avLst/>
@@ -4217,141 +5696,120 @@
               <a:spcAft>
                 <a:spcPts val="1000"/>
               </a:spcAft>
-              <a:defRPr sz="1500" b="1">
-                <a:solidFill>
-                  <a:srgbClr val="FFFFFF"/>
-                </a:solidFill>
-                <a:latin typeface="Calibri"/>
-              </a:defRPr>
-            </a:pPr>
-            <a:r>
-              <a:t>•  01. The 4 Security Pillars Overview</a:t>
+              <a:defRPr sz="1300" b="1">
+                <a:solidFill>
+                  <a:srgbClr val="2563EB"/>
+                </a:solidFill>
+                <a:latin typeface="Arial"/>
+              </a:defRPr>
+            </a:pPr>
+            <a:r>
+              <a:t>SECTION 1: VULNERABILITY &amp; EXPLOITATION</a:t>
             </a:r>
           </a:p>
           <a:p>
             <a:pPr>
               <a:spcAft>
-                <a:spcPts val="1000"/>
+                <a:spcPts val="600"/>
               </a:spcAft>
-              <a:defRPr sz="1400">
-                <a:solidFill>
-                  <a:srgbClr val="94A3B8"/>
-                </a:solidFill>
-                <a:latin typeface="Calibri"/>
-              </a:defRPr>
-            </a:pPr>
-            <a:r>
-              <a:t>   •  Key definitions, threat structures, and container security scope.</a:t>
+              <a:defRPr sz="1300">
+                <a:solidFill>
+                  <a:srgbClr val="F1F5F9"/>
+                </a:solidFill>
+                <a:latin typeface="Arial"/>
+              </a:defRPr>
+            </a:pPr>
+            <a:r>
+              <a:t>• Core Architecture: Shared Linux kernel virtualization and standard container security assumptions.</a:t>
             </a:r>
           </a:p>
           <a:p>
             <a:pPr>
               <a:spcAft>
-                <a:spcPts val="1000"/>
+                <a:spcPts val="600"/>
               </a:spcAft>
-              <a:defRPr sz="1500" b="1">
-                <a:solidFill>
-                  <a:srgbClr val="FFFFFF"/>
-                </a:solidFill>
-                <a:latin typeface="Calibri"/>
-              </a:defRPr>
-            </a:pPr>
-            <a:r>
-              <a:t>•  02. Stage 1: Host Kernel Isolation</a:t>
+              <a:defRPr sz="1300">
+                <a:solidFill>
+                  <a:srgbClr val="F1F5F9"/>
+                </a:solidFill>
+                <a:latin typeface="Arial"/>
+              </a:defRPr>
+            </a:pPr>
+            <a:r>
+              <a:t>• The Exploit: Detailed execution of the CVE-2016-5195 Copy-on-Write local privilege escalation.</a:t>
             </a:r>
           </a:p>
           <a:p>
             <a:pPr>
               <a:spcAft>
-                <a:spcPts val="1000"/>
+                <a:spcPts val="600"/>
               </a:spcAft>
-              <a:defRPr sz="1400">
-                <a:solidFill>
-                  <a:srgbClr val="94A3B8"/>
-                </a:solidFill>
-                <a:latin typeface="Calibri"/>
-              </a:defRPr>
-            </a:pPr>
-            <a:r>
-              <a:t>   •  Dirty COW (CVE-2016-5195) C exploit simulation and outcomes.</a:t>
-            </a:r>
-          </a:p>
-          <a:p>
-            <a:pPr>
-              <a:spcAft>
-                <a:spcPts val="1000"/>
-              </a:spcAft>
-              <a:defRPr sz="1500" b="1">
-                <a:solidFill>
-                  <a:srgbClr val="FFFFFF"/>
-                </a:solidFill>
-                <a:latin typeface="Calibri"/>
-              </a:defRPr>
-            </a:pPr>
-            <a:r>
-              <a:t>•  03. Stage 2: Process &amp; Capabilities Isolation</a:t>
-            </a:r>
-          </a:p>
-          <a:p>
-            <a:pPr>
-              <a:spcAft>
-                <a:spcPts val="1000"/>
-              </a:spcAft>
-              <a:defRPr sz="1400">
-                <a:solidFill>
-                  <a:srgbClr val="94A3B8"/>
-                </a:solidFill>
-                <a:latin typeface="Calibri"/>
-              </a:defRPr>
-            </a:pPr>
-            <a:r>
-              <a:t>   •  Shared PID namespace boundaries and evaluation of CAP_SYS_PTRACE.</a:t>
-            </a:r>
-          </a:p>
-          <a:p>
-            <a:pPr>
-              <a:spcAft>
-                <a:spcPts val="1000"/>
-              </a:spcAft>
-              <a:defRPr sz="1500" b="1">
-                <a:solidFill>
-                  <a:srgbClr val="FFFFFF"/>
-                </a:solidFill>
-                <a:latin typeface="Calibri"/>
-              </a:defRPr>
-            </a:pPr>
-            <a:r>
-              <a:t>•  04. Stage 3: Daemon &amp; API Security</a:t>
-            </a:r>
-          </a:p>
-          <a:p>
-            <a:pPr>
-              <a:spcAft>
-                <a:spcPts val="1000"/>
-              </a:spcAft>
-              <a:defRPr sz="1400">
-                <a:solidFill>
-                  <a:srgbClr val="94A3B8"/>
-                </a:solidFill>
-                <a:latin typeface="Calibri"/>
-              </a:defRPr>
-            </a:pPr>
-            <a:r>
-              <a:t>   •  Mitigating exposed docker.sock socket API mounts.</a:t>
-            </a:r>
-          </a:p>
-        </p:txBody>
-      </p:sp>
-      <p:sp>
-        <p:nvSpPr>
-          <p:cNvPr id="5" name="TextBox 4"/>
+              <a:defRPr sz="1300">
+                <a:solidFill>
+                  <a:srgbClr val="F1F5F9"/>
+                </a:solidFill>
+                <a:latin typeface="Arial"/>
+              </a:defRPr>
+            </a:pPr>
+            <a:r>
+              <a:t>• 4-Stage Attack Chain: Moving from low-privileged shell to process capability abuse, API exposure, and persistent host takeover.</a:t>
+            </a:r>
+          </a:p>
+        </p:txBody>
+      </p:sp>
+      <p:sp>
+        <p:nvSpPr>
+          <p:cNvPr id="6" name="Rectangle 5"/>
+          <p:cNvSpPr/>
+          <p:nvPr/>
+        </p:nvSpPr>
+        <p:spPr>
+          <a:xfrm>
+            <a:off x="6217920" y="1645920"/>
+            <a:ext cx="5120640" cy="4389120"/>
+          </a:xfrm>
+          <a:prstGeom prst="rect">
+            <a:avLst/>
+          </a:prstGeom>
+          <a:solidFill>
+            <a:srgbClr val="1E293B"/>
+          </a:solidFill>
+          <a:ln>
+            <a:noFill/>
+          </a:ln>
+        </p:spPr>
+        <p:style>
+          <a:lnRef idx="1">
+            <a:schemeClr val="accent1"/>
+          </a:lnRef>
+          <a:fillRef idx="3">
+            <a:schemeClr val="accent1"/>
+          </a:fillRef>
+          <a:effectRef idx="2">
+            <a:schemeClr val="accent1"/>
+          </a:effectRef>
+          <a:fontRef idx="minor">
+            <a:schemeClr val="lt1"/>
+          </a:fontRef>
+        </p:style>
+        <p:txBody>
+          <a:bodyPr rtlCol="0" anchor="ctr"/>
+          <a:lstStyle/>
+          <a:p>
+            <a:pPr algn="ctr"/>
+          </a:p>
+        </p:txBody>
+      </p:sp>
+      <p:sp>
+        <p:nvSpPr>
+          <p:cNvPr id="7" name="TextBox 6"/>
           <p:cNvSpPr txBox="1"/>
           <p:nvPr/>
         </p:nvSpPr>
         <p:spPr>
           <a:xfrm>
-            <a:off x="6217920" y="1645920"/>
-            <a:ext cx="5212080" cy="4389120"/>
+            <a:off x="6400800" y="1828800"/>
+            <a:ext cx="4754880" cy="4023360"/>
           </a:xfrm>
           <a:prstGeom prst="rect">
             <a:avLst/>
@@ -4368,127 +5826,63 @@
               <a:spcAft>
                 <a:spcPts val="1000"/>
               </a:spcAft>
-              <a:defRPr sz="1500" b="1">
-                <a:solidFill>
-                  <a:srgbClr val="FFFFFF"/>
-                </a:solidFill>
-                <a:latin typeface="Calibri"/>
-              </a:defRPr>
-            </a:pPr>
-            <a:r>
-              <a:t>•  05. Stage 4: Volume &amp; Filesystem Security</a:t>
+              <a:defRPr sz="1300" b="1">
+                <a:solidFill>
+                  <a:srgbClr val="2563EB"/>
+                </a:solidFill>
+                <a:latin typeface="Arial"/>
+              </a:defRPr>
+            </a:pPr>
+            <a:r>
+              <a:t>SECTION 2: DEFENSE-IN-DEPTH &amp; PIPELINE</a:t>
             </a:r>
           </a:p>
           <a:p>
             <a:pPr>
               <a:spcAft>
-                <a:spcPts val="1000"/>
+                <a:spcPts val="600"/>
               </a:spcAft>
-              <a:defRPr sz="1400">
-                <a:solidFill>
-                  <a:srgbClr val="94A3B8"/>
-                </a:solidFill>
-                <a:latin typeface="Calibri"/>
-              </a:defRPr>
-            </a:pPr>
-            <a:r>
-              <a:t>   •  Writable host mount points and path traversal cron injection.</a:t>
+              <a:defRPr sz="1300">
+                <a:solidFill>
+                  <a:srgbClr val="F1F5F9"/>
+                </a:solidFill>
+                <a:latin typeface="Arial"/>
+              </a:defRPr>
+            </a:pPr>
+            <a:r>
+              <a:t>• Runtime Mitigation: Implementing strict Linux capability profiles, non-root system users, and read-only container rootfs.</a:t>
             </a:r>
           </a:p>
           <a:p>
             <a:pPr>
               <a:spcAft>
-                <a:spcPts val="1000"/>
+                <a:spcPts val="600"/>
               </a:spcAft>
-              <a:defRPr sz="1500" b="1">
-                <a:solidFill>
-                  <a:srgbClr val="FFFFFF"/>
-                </a:solidFill>
-                <a:latin typeface="Calibri"/>
-              </a:defRPr>
-            </a:pPr>
-            <a:r>
-              <a:t>•  06. Cryptographic Container Signing</a:t>
+              <a:defRPr sz="1300">
+                <a:solidFill>
+                  <a:srgbClr val="F1F5F9"/>
+                </a:solidFill>
+                <a:latin typeface="Arial"/>
+              </a:defRPr>
+            </a:pPr>
+            <a:r>
+              <a:t>• Supply Chain Provenance: Constructing a secure CI/CD build pipeline using Cosign and GitHub Actions OpenID Connect (OIDC).</a:t>
             </a:r>
           </a:p>
           <a:p>
             <a:pPr>
               <a:spcAft>
-                <a:spcPts val="1000"/>
+                <a:spcPts val="600"/>
               </a:spcAft>
-              <a:defRPr sz="1400">
-                <a:solidFill>
-                  <a:srgbClr val="94A3B8"/>
-                </a:solidFill>
-                <a:latin typeface="Calibri"/>
-              </a:defRPr>
-            </a:pPr>
-            <a:r>
-              <a:t>   •  Keyless Cosign OIDC authentication and trust chain verification.</a:t>
-            </a:r>
-          </a:p>
-          <a:p>
-            <a:pPr>
-              <a:spcAft>
-                <a:spcPts val="1000"/>
-              </a:spcAft>
-              <a:defRPr sz="1500" b="1">
-                <a:solidFill>
-                  <a:srgbClr val="FFFFFF"/>
-                </a:solidFill>
-                <a:latin typeface="Calibri"/>
-              </a:defRPr>
-            </a:pPr>
-            <a:r>
-              <a:t>•  07. GitHub Actions CI/CD Integration</a:t>
-            </a:r>
-          </a:p>
-          <a:p>
-            <a:pPr>
-              <a:spcAft>
-                <a:spcPts val="1000"/>
-              </a:spcAft>
-              <a:defRPr sz="1400">
-                <a:solidFill>
-                  <a:srgbClr val="94A3B8"/>
-                </a:solidFill>
-                <a:latin typeface="Calibri"/>
-              </a:defRPr>
-            </a:pPr>
-            <a:r>
-              <a:t>   •  Case-compliant image compilation, signing, and pipeline execution.</a:t>
-            </a:r>
-          </a:p>
-          <a:p>
-            <a:pPr>
-              <a:spcAft>
-                <a:spcPts val="1000"/>
-              </a:spcAft>
-              <a:defRPr sz="1500" b="1">
-                <a:solidFill>
-                  <a:srgbClr val="FFFFFF"/>
-                </a:solidFill>
-                <a:latin typeface="Calibri"/>
-              </a:defRPr>
-            </a:pPr>
-            <a:r>
-              <a:t>•  08. Hexa Force Conclusion</a:t>
-            </a:r>
-          </a:p>
-          <a:p>
-            <a:pPr>
-              <a:spcAft>
-                <a:spcPts val="1000"/>
-              </a:spcAft>
-              <a:defRPr sz="1400">
-                <a:solidFill>
-                  <a:srgbClr val="94A3B8"/>
-                </a:solidFill>
-                <a:latin typeface="Calibri"/>
-              </a:defRPr>
-            </a:pPr>
-            <a:r>
-              <a:t>   •  Key lessons, takeaways, and final architecture summaries.</a:t>
+              <a:defRPr sz="1300">
+                <a:solidFill>
+                  <a:srgbClr val="F1F5F9"/>
+                </a:solidFill>
+                <a:latin typeface="Arial"/>
+              </a:defRPr>
+            </a:pPr>
+            <a:r>
+              <a:t>• Integrity Validation: Keyless container signing verified against public transparency ledgers (Rekor).</a:t>
             </a:r>
           </a:p>
         </p:txBody>
@@ -4527,8 +5921,8 @@
         </p:nvSpPr>
         <p:spPr>
           <a:xfrm>
-            <a:off x="731520" y="365760"/>
-            <a:ext cx="10698480" cy="274320"/>
+            <a:off x="685800" y="365760"/>
+            <a:ext cx="10817352" cy="274320"/>
           </a:xfrm>
           <a:prstGeom prst="rect">
             <a:avLst/>
@@ -4542,15 +5936,15 @@
           <a:lstStyle/>
           <a:p>
             <a:pPr>
-              <a:defRPr sz="1000" b="1">
-                <a:solidFill>
-                  <a:srgbClr val="06B6D4"/>
-                </a:solidFill>
-                <a:latin typeface="Trebuchet MS"/>
-              </a:defRPr>
-            </a:pPr>
-            <a:r>
-              <a:t>LABORATORY SCOPE</a:t>
+              <a:defRPr sz="950" b="1">
+                <a:solidFill>
+                  <a:srgbClr val="2563EB"/>
+                </a:solidFill>
+                <a:latin typeface="Arial"/>
+              </a:defRPr>
+            </a:pPr>
+            <a:r>
+              <a:t>HEXA FORCE CONTAINER SECURITY SERIES</a:t>
             </a:r>
           </a:p>
         </p:txBody>
@@ -4563,8 +5957,8 @@
         </p:nvSpPr>
         <p:spPr>
           <a:xfrm>
-            <a:off x="731520" y="548640"/>
-            <a:ext cx="10698480" cy="731520"/>
+            <a:off x="685800" y="594360"/>
+            <a:ext cx="10817352" cy="731520"/>
           </a:xfrm>
           <a:prstGeom prst="rect">
             <a:avLst/>
@@ -4578,11 +5972,11 @@
           <a:lstStyle/>
           <a:p>
             <a:pPr>
-              <a:defRPr sz="2600" b="1">
+              <a:defRPr sz="2800" b="1">
                 <a:solidFill>
                   <a:srgbClr val="FFFFFF"/>
                 </a:solidFill>
-                <a:latin typeface="Trebuchet MS"/>
+                <a:latin typeface="Arial"/>
               </a:defRPr>
             </a:pPr>
             <a:r>
@@ -4599,8 +5993,8 @@
         </p:nvSpPr>
         <p:spPr>
           <a:xfrm>
-            <a:off x="731520" y="1645920"/>
-            <a:ext cx="2468880" cy="4389120"/>
+            <a:off x="685800" y="1645920"/>
+            <a:ext cx="5120640" cy="4389120"/>
           </a:xfrm>
           <a:prstGeom prst="rect">
             <a:avLst/>
@@ -4608,10 +6002,8 @@
           <a:solidFill>
             <a:srgbClr val="1E293B"/>
           </a:solidFill>
-          <a:ln w="19050">
-            <a:solidFill>
-              <a:srgbClr val="EF4444"/>
-            </a:solidFill>
+          <a:ln>
+            <a:noFill/>
           </a:ln>
         </p:spPr>
         <p:style>
@@ -4629,100 +6021,94 @@
           </a:fontRef>
         </p:style>
         <p:txBody>
-          <a:bodyPr rtlCol="0" anchor="ctr" wrap="square" lIns="182880" rIns="182880" tIns="182880" bIns="182880"/>
-          <a:lstStyle/>
-          <a:p>
-            <a:pPr algn="ctr">
+          <a:bodyPr rtlCol="0" anchor="ctr"/>
+          <a:lstStyle/>
+          <a:p>
+            <a:pPr algn="ctr"/>
+          </a:p>
+        </p:txBody>
+      </p:sp>
+      <p:sp>
+        <p:nvSpPr>
+          <p:cNvPr id="5" name="TextBox 4"/>
+          <p:cNvSpPr txBox="1"/>
+          <p:nvPr/>
+        </p:nvSpPr>
+        <p:spPr>
+          <a:xfrm>
+            <a:off x="868680" y="1828800"/>
+            <a:ext cx="4754880" cy="4023360"/>
+          </a:xfrm>
+          <a:prstGeom prst="rect">
+            <a:avLst/>
+          </a:prstGeom>
+          <a:noFill/>
+        </p:spPr>
+        <p:txBody>
+          <a:bodyPr wrap="square" lIns="0" rIns="0" tIns="0" bIns="0">
+            <a:spAutoFit/>
+          </a:bodyPr>
+          <a:lstStyle/>
+          <a:p>
+            <a:pPr>
               <a:spcAft>
-                <a:spcPts val="400"/>
+                <a:spcPts val="1000"/>
               </a:spcAft>
-              <a:defRPr sz="1400" b="1">
-                <a:solidFill>
-                  <a:srgbClr val="FFFFFF"/>
-                </a:solidFill>
-                <a:latin typeface="Trebuchet MS"/>
-              </a:defRPr>
-            </a:pPr>
-            <a:r>
-              <a:t>1. HOST KERNEL</a:t>
+              <a:defRPr sz="1300" b="1">
+                <a:solidFill>
+                  <a:srgbClr val="2563EB"/>
+                </a:solidFill>
+                <a:latin typeface="Arial"/>
+              </a:defRPr>
+            </a:pPr>
+            <a:r>
+              <a:t>PILLAR 1 &amp; 2: KERNEL &amp; PROCESS ISOLATION</a:t>
             </a:r>
           </a:p>
           <a:p>
             <a:pPr>
               <a:spcAft>
-                <a:spcPts val="800"/>
+                <a:spcPts val="600"/>
               </a:spcAft>
-              <a:defRPr sz="1100" b="1">
-                <a:solidFill>
-                  <a:srgbClr val="EF4444"/>
-                </a:solidFill>
-                <a:latin typeface="Calibri"/>
-              </a:defRPr>
-            </a:pPr>
-            <a:r>
-              <a:t>Isolation Boundary</a:t>
+              <a:defRPr sz="1300">
+                <a:solidFill>
+                  <a:srgbClr val="F1F5F9"/>
+                </a:solidFill>
+                <a:latin typeface="Arial"/>
+              </a:defRPr>
+            </a:pPr>
+            <a:r>
+              <a:t>• Host Kernel Sharing: The core lightweight efficiency of containers is their chief weakness: direct exposure to local host kernel exploits.</a:t>
             </a:r>
           </a:p>
           <a:p>
             <a:pPr>
               <a:spcAft>
-                <a:spcPts val="400"/>
+                <a:spcPts val="600"/>
               </a:spcAft>
-              <a:defRPr sz="1200">
-                <a:solidFill>
-                  <a:srgbClr val="94A3B8"/>
-                </a:solidFill>
-                <a:latin typeface="Calibri"/>
-              </a:defRPr>
-            </a:pPr>
-            <a:r>
-              <a:t>• Containers share host OS kernel resources.</a:t>
-            </a:r>
-          </a:p>
-          <a:p>
-            <a:pPr>
-              <a:spcAft>
-                <a:spcPts val="400"/>
-              </a:spcAft>
-              <a:defRPr sz="1200">
-                <a:solidFill>
-                  <a:srgbClr val="94A3B8"/>
-                </a:solidFill>
-                <a:latin typeface="Calibri"/>
-              </a:defRPr>
-            </a:pPr>
-            <a:r>
-              <a:t>• Race condition exploits (e.g. Dirty COW) bypass all virtual restrictions.</a:t>
-            </a:r>
-          </a:p>
-          <a:p>
-            <a:pPr>
-              <a:spcAft>
-                <a:spcPts val="400"/>
-              </a:spcAft>
-              <a:defRPr sz="1200">
-                <a:solidFill>
-                  <a:srgbClr val="94A3B8"/>
-                </a:solidFill>
-                <a:latin typeface="Calibri"/>
-              </a:defRPr>
-            </a:pPr>
-            <a:r>
-              <a:t>• Demonstrates kernel memory isolation limits.</a:t>
-            </a:r>
-          </a:p>
-        </p:txBody>
-      </p:sp>
-      <p:sp>
-        <p:nvSpPr>
-          <p:cNvPr id="5" name="Rectangle 4"/>
+              <a:defRPr sz="1300">
+                <a:solidFill>
+                  <a:srgbClr val="F1F5F9"/>
+                </a:solidFill>
+                <a:latin typeface="Arial"/>
+              </a:defRPr>
+            </a:pPr>
+            <a:r>
+              <a:t>• Linux Capabilities: Processes are limited by partitioned system call permissions. Excess privileges (like CAP_SYS_ADMIN) break container namespaces.</a:t>
+            </a:r>
+          </a:p>
+        </p:txBody>
+      </p:sp>
+      <p:sp>
+        <p:nvSpPr>
+          <p:cNvPr id="6" name="Rectangle 5"/>
           <p:cNvSpPr/>
           <p:nvPr/>
         </p:nvSpPr>
         <p:spPr>
           <a:xfrm>
-            <a:off x="3474720" y="1645920"/>
-            <a:ext cx="2468880" cy="4389120"/>
+            <a:off x="6217920" y="1645920"/>
+            <a:ext cx="5120640" cy="4389120"/>
           </a:xfrm>
           <a:prstGeom prst="rect">
             <a:avLst/>
@@ -4730,10 +6116,8 @@
           <a:solidFill>
             <a:srgbClr val="1E293B"/>
           </a:solidFill>
-          <a:ln w="19050">
-            <a:solidFill>
-              <a:srgbClr val="06B6D4"/>
-            </a:solidFill>
+          <a:ln>
+            <a:noFill/>
           </a:ln>
         </p:spPr>
         <p:style>
@@ -4751,330 +6135,80 @@
           </a:fontRef>
         </p:style>
         <p:txBody>
-          <a:bodyPr rtlCol="0" anchor="ctr" wrap="square" lIns="182880" rIns="182880" tIns="182880" bIns="182880"/>
-          <a:lstStyle/>
-          <a:p>
-            <a:pPr algn="ctr">
-              <a:spcAft>
-                <a:spcPts val="400"/>
-              </a:spcAft>
-              <a:defRPr sz="1400" b="1">
-                <a:solidFill>
-                  <a:srgbClr val="FFFFFF"/>
-                </a:solidFill>
-                <a:latin typeface="Trebuchet MS"/>
-              </a:defRPr>
-            </a:pPr>
-            <a:r>
-              <a:t>2. CAPABILITIES</a:t>
-            </a:r>
-          </a:p>
-          <a:p>
-            <a:pPr>
-              <a:spcAft>
-                <a:spcPts val="800"/>
-              </a:spcAft>
-              <a:defRPr sz="1100" b="1">
-                <a:solidFill>
-                  <a:srgbClr val="06B6D4"/>
-                </a:solidFill>
-                <a:latin typeface="Calibri"/>
-              </a:defRPr>
-            </a:pPr>
-            <a:r>
-              <a:t>Process Boundaries</a:t>
-            </a:r>
-          </a:p>
-          <a:p>
-            <a:pPr>
-              <a:spcAft>
-                <a:spcPts val="400"/>
-              </a:spcAft>
-              <a:defRPr sz="1200">
-                <a:solidFill>
-                  <a:srgbClr val="94A3B8"/>
-                </a:solidFill>
-                <a:latin typeface="Calibri"/>
-              </a:defRPr>
-            </a:pPr>
-            <a:r>
-              <a:t>• Process namespace mapping regulates visibility.</a:t>
-            </a:r>
-          </a:p>
-          <a:p>
-            <a:pPr>
-              <a:spcAft>
-                <a:spcPts val="400"/>
-              </a:spcAft>
-              <a:defRPr sz="1200">
-                <a:solidFill>
-                  <a:srgbClr val="94A3B8"/>
-                </a:solidFill>
-                <a:latin typeface="Calibri"/>
-              </a:defRPr>
-            </a:pPr>
-            <a:r>
-              <a:t>• Over-privileged debug access (CAP_SYS_PTRACE) allows host code injection.</a:t>
-            </a:r>
-          </a:p>
-          <a:p>
-            <a:pPr>
-              <a:spcAft>
-                <a:spcPts val="400"/>
-              </a:spcAft>
-              <a:defRPr sz="1200">
-                <a:solidFill>
-                  <a:srgbClr val="94A3B8"/>
-                </a:solidFill>
-                <a:latin typeface="Calibri"/>
-              </a:defRPr>
-            </a:pPr>
-            <a:r>
-              <a:t>• Demonstrates process capability containment.</a:t>
-            </a:r>
-          </a:p>
-        </p:txBody>
-      </p:sp>
-      <p:sp>
-        <p:nvSpPr>
-          <p:cNvPr id="6" name="Rectangle 5"/>
-          <p:cNvSpPr/>
+          <a:bodyPr rtlCol="0" anchor="ctr"/>
+          <a:lstStyle/>
+          <a:p>
+            <a:pPr algn="ctr"/>
+          </a:p>
+        </p:txBody>
+      </p:sp>
+      <p:sp>
+        <p:nvSpPr>
+          <p:cNvPr id="7" name="TextBox 6"/>
+          <p:cNvSpPr txBox="1"/>
           <p:nvPr/>
         </p:nvSpPr>
         <p:spPr>
           <a:xfrm>
-            <a:off x="6217920" y="1645920"/>
-            <a:ext cx="2468880" cy="4389120"/>
+            <a:off x="6400800" y="1828800"/>
+            <a:ext cx="4754880" cy="4023360"/>
           </a:xfrm>
           <a:prstGeom prst="rect">
             <a:avLst/>
           </a:prstGeom>
-          <a:solidFill>
-            <a:srgbClr val="1E293B"/>
-          </a:solidFill>
-          <a:ln w="19050">
-            <a:solidFill>
-              <a:srgbClr val="EAB308"/>
-            </a:solidFill>
-          </a:ln>
-        </p:spPr>
-        <p:style>
-          <a:lnRef idx="1">
-            <a:schemeClr val="accent1"/>
-          </a:lnRef>
-          <a:fillRef idx="3">
-            <a:schemeClr val="accent1"/>
-          </a:fillRef>
-          <a:effectRef idx="2">
-            <a:schemeClr val="accent1"/>
-          </a:effectRef>
-          <a:fontRef idx="minor">
-            <a:schemeClr val="lt1"/>
-          </a:fontRef>
-        </p:style>
-        <p:txBody>
-          <a:bodyPr rtlCol="0" anchor="ctr" wrap="square" lIns="182880" rIns="182880" tIns="182880" bIns="182880"/>
-          <a:lstStyle/>
-          <a:p>
-            <a:pPr algn="ctr">
+          <a:noFill/>
+        </p:spPr>
+        <p:txBody>
+          <a:bodyPr wrap="square" lIns="0" rIns="0" tIns="0" bIns="0">
+            <a:spAutoFit/>
+          </a:bodyPr>
+          <a:lstStyle/>
+          <a:p>
+            <a:pPr>
               <a:spcAft>
-                <a:spcPts val="400"/>
+                <a:spcPts val="1000"/>
               </a:spcAft>
-              <a:defRPr sz="1400" b="1">
-                <a:solidFill>
-                  <a:srgbClr val="FFFFFF"/>
-                </a:solidFill>
-                <a:latin typeface="Trebuchet MS"/>
-              </a:defRPr>
-            </a:pPr>
-            <a:r>
-              <a:t>3. ENGINE API</a:t>
+              <a:defRPr sz="1300" b="1">
+                <a:solidFill>
+                  <a:srgbClr val="2563EB"/>
+                </a:solidFill>
+                <a:latin typeface="Arial"/>
+              </a:defRPr>
+            </a:pPr>
+            <a:r>
+              <a:t>PILLAR 3 &amp; 4: API &amp; VOLUME BOUNDARIES</a:t>
             </a:r>
           </a:p>
           <a:p>
             <a:pPr>
               <a:spcAft>
-                <a:spcPts val="800"/>
+                <a:spcPts val="600"/>
               </a:spcAft>
-              <a:defRPr sz="1100" b="1">
-                <a:solidFill>
-                  <a:srgbClr val="EAB308"/>
-                </a:solidFill>
-                <a:latin typeface="Calibri"/>
-              </a:defRPr>
-            </a:pPr>
-            <a:r>
-              <a:t>Daemon Protection</a:t>
+              <a:defRPr sz="1300">
+                <a:solidFill>
+                  <a:srgbClr val="F1F5F9"/>
+                </a:solidFill>
+                <a:latin typeface="Arial"/>
+              </a:defRPr>
+            </a:pPr>
+            <a:r>
+              <a:t>• Daemon API Security: Mounting '/var/run/docker.sock' directly inside a container allows the container root user to command the host Docker engine.</a:t>
             </a:r>
           </a:p>
           <a:p>
             <a:pPr>
               <a:spcAft>
-                <a:spcPts val="400"/>
+                <a:spcPts val="600"/>
               </a:spcAft>
-              <a:defRPr sz="1200">
-                <a:solidFill>
-                  <a:srgbClr val="94A3B8"/>
-                </a:solidFill>
-                <a:latin typeface="Calibri"/>
-              </a:defRPr>
-            </a:pPr>
-            <a:r>
-              <a:t>• Mounting docker.sock grants host root access.</a:t>
-            </a:r>
-          </a:p>
-          <a:p>
-            <a:pPr>
-              <a:spcAft>
-                <a:spcPts val="400"/>
-              </a:spcAft>
-              <a:defRPr sz="1200">
-                <a:solidFill>
-                  <a:srgbClr val="94A3B8"/>
-                </a:solidFill>
-                <a:latin typeface="Calibri"/>
-              </a:defRPr>
-            </a:pPr>
-            <a:r>
-              <a:t>• Attacker controls engine and launches sibling mounts.</a:t>
-            </a:r>
-          </a:p>
-          <a:p>
-            <a:pPr>
-              <a:spcAft>
-                <a:spcPts val="400"/>
-              </a:spcAft>
-              <a:defRPr sz="1200">
-                <a:solidFill>
-                  <a:srgbClr val="94A3B8"/>
-                </a:solidFill>
-                <a:latin typeface="Calibri"/>
-              </a:defRPr>
-            </a:pPr>
-            <a:r>
-              <a:t>• Demonstrates socket boundary control.</a:t>
-            </a:r>
-          </a:p>
-        </p:txBody>
-      </p:sp>
-      <p:sp>
-        <p:nvSpPr>
-          <p:cNvPr id="7" name="Rectangle 6"/>
-          <p:cNvSpPr/>
-          <p:nvPr/>
-        </p:nvSpPr>
-        <p:spPr>
-          <a:xfrm>
-            <a:off x="8961120" y="1645920"/>
-            <a:ext cx="2468880" cy="4389120"/>
-          </a:xfrm>
-          <a:prstGeom prst="rect">
-            <a:avLst/>
-          </a:prstGeom>
-          <a:solidFill>
-            <a:srgbClr val="1E293B"/>
-          </a:solidFill>
-          <a:ln w="19050">
-            <a:solidFill>
-              <a:srgbClr val="22C55E"/>
-            </a:solidFill>
-          </a:ln>
-        </p:spPr>
-        <p:style>
-          <a:lnRef idx="1">
-            <a:schemeClr val="accent1"/>
-          </a:lnRef>
-          <a:fillRef idx="3">
-            <a:schemeClr val="accent1"/>
-          </a:fillRef>
-          <a:effectRef idx="2">
-            <a:schemeClr val="accent1"/>
-          </a:effectRef>
-          <a:fontRef idx="minor">
-            <a:schemeClr val="lt1"/>
-          </a:fontRef>
-        </p:style>
-        <p:txBody>
-          <a:bodyPr rtlCol="0" anchor="ctr" wrap="square" lIns="182880" rIns="182880" tIns="182880" bIns="182880"/>
-          <a:lstStyle/>
-          <a:p>
-            <a:pPr algn="ctr">
-              <a:spcAft>
-                <a:spcPts val="400"/>
-              </a:spcAft>
-              <a:defRPr sz="1400" b="1">
-                <a:solidFill>
-                  <a:srgbClr val="FFFFFF"/>
-                </a:solidFill>
-                <a:latin typeface="Trebuchet MS"/>
-              </a:defRPr>
-            </a:pPr>
-            <a:r>
-              <a:t>4. VOLUME</a:t>
-            </a:r>
-          </a:p>
-          <a:p>
-            <a:pPr>
-              <a:spcAft>
-                <a:spcPts val="800"/>
-              </a:spcAft>
-              <a:defRPr sz="1100" b="1">
-                <a:solidFill>
-                  <a:srgbClr val="22C55E"/>
-                </a:solidFill>
-                <a:latin typeface="Calibri"/>
-              </a:defRPr>
-            </a:pPr>
-            <a:r>
-              <a:t>Filesystem Isolation</a:t>
-            </a:r>
-          </a:p>
-          <a:p>
-            <a:pPr>
-              <a:spcAft>
-                <a:spcPts val="400"/>
-              </a:spcAft>
-              <a:defRPr sz="1200">
-                <a:solidFill>
-                  <a:srgbClr val="94A3B8"/>
-                </a:solidFill>
-                <a:latin typeface="Calibri"/>
-              </a:defRPr>
-            </a:pPr>
-            <a:r>
-              <a:t>• Writable mounts allow local file traversal.</a:t>
-            </a:r>
-          </a:p>
-          <a:p>
-            <a:pPr>
-              <a:spcAft>
-                <a:spcPts val="400"/>
-              </a:spcAft>
-              <a:defRPr sz="1200">
-                <a:solidFill>
-                  <a:srgbClr val="94A3B8"/>
-                </a:solidFill>
-                <a:latin typeface="Calibri"/>
-              </a:defRPr>
-            </a:pPr>
-            <a:r>
-              <a:t>• Exploit writes root task files to host cron.</a:t>
-            </a:r>
-          </a:p>
-          <a:p>
-            <a:pPr>
-              <a:spcAft>
-                <a:spcPts val="400"/>
-              </a:spcAft>
-              <a:defRPr sz="1200">
-                <a:solidFill>
-                  <a:srgbClr val="94A3B8"/>
-                </a:solidFill>
-                <a:latin typeface="Calibri"/>
-              </a:defRPr>
-            </a:pPr>
-            <a:r>
-              <a:t>• Demonstrates mount point security rule options.</a:t>
+              <a:defRPr sz="1300">
+                <a:solidFill>
+                  <a:srgbClr val="F1F5F9"/>
+                </a:solidFill>
+                <a:latin typeface="Arial"/>
+              </a:defRPr>
+            </a:pPr>
+            <a:r>
+              <a:t>• Filesystem &amp; Volume Mounts: Poor volume mount scopes allow path traversals, filesystem write access, and persistent injection into host runtimes.</a:t>
             </a:r>
           </a:p>
         </p:txBody>
@@ -5113,8 +6247,8 @@
         </p:nvSpPr>
         <p:spPr>
           <a:xfrm>
-            <a:off x="731520" y="365760"/>
-            <a:ext cx="10698480" cy="274320"/>
+            <a:off x="685800" y="365760"/>
+            <a:ext cx="10817352" cy="274320"/>
           </a:xfrm>
           <a:prstGeom prst="rect">
             <a:avLst/>
@@ -5128,15 +6262,15 @@
           <a:lstStyle/>
           <a:p>
             <a:pPr>
-              <a:defRPr sz="1000" b="1">
-                <a:solidFill>
-                  <a:srgbClr val="06B6D4"/>
-                </a:solidFill>
-                <a:latin typeface="Trebuchet MS"/>
-              </a:defRPr>
-            </a:pPr>
-            <a:r>
-              <a:t>STAGE 1 WORKFLOW</a:t>
+              <a:defRPr sz="950" b="1">
+                <a:solidFill>
+                  <a:srgbClr val="2563EB"/>
+                </a:solidFill>
+                <a:latin typeface="Arial"/>
+              </a:defRPr>
+            </a:pPr>
+            <a:r>
+              <a:t>HEXA FORCE CONTAINER SECURITY SERIES</a:t>
             </a:r>
           </a:p>
         </p:txBody>
@@ -5149,8 +6283,8 @@
         </p:nvSpPr>
         <p:spPr>
           <a:xfrm>
-            <a:off x="731520" y="548640"/>
-            <a:ext cx="10698480" cy="731520"/>
+            <a:off x="685800" y="594360"/>
+            <a:ext cx="10817352" cy="731520"/>
           </a:xfrm>
           <a:prstGeom prst="rect">
             <a:avLst/>
@@ -5164,11 +6298,11 @@
           <a:lstStyle/>
           <a:p>
             <a:pPr>
-              <a:defRPr sz="2600" b="1">
+              <a:defRPr sz="2800" b="1">
                 <a:solidFill>
                   <a:srgbClr val="FFFFFF"/>
                 </a:solidFill>
-                <a:latin typeface="Trebuchet MS"/>
+                <a:latin typeface="Arial"/>
               </a:defRPr>
             </a:pPr>
             <a:r>
@@ -5179,181 +6313,14 @@
       </p:sp>
       <p:sp>
         <p:nvSpPr>
-          <p:cNvPr id="4" name="TextBox 3"/>
-          <p:cNvSpPr txBox="1"/>
-          <p:nvPr/>
-        </p:nvSpPr>
-        <p:spPr>
-          <a:xfrm>
-            <a:off x="731520" y="1645920"/>
-            <a:ext cx="5486400" cy="4572000"/>
-          </a:xfrm>
-          <a:prstGeom prst="rect">
-            <a:avLst/>
-          </a:prstGeom>
-          <a:noFill/>
-        </p:spPr>
-        <p:txBody>
-          <a:bodyPr wrap="square" lIns="0" rIns="0" tIns="0" bIns="0">
-            <a:spAutoFit/>
-          </a:bodyPr>
-          <a:lstStyle/>
-          <a:p>
-            <a:pPr>
-              <a:spcAft>
-                <a:spcPts val="1000"/>
-              </a:spcAft>
-              <a:defRPr sz="1500" b="1">
-                <a:solidFill>
-                  <a:srgbClr val="FFFFFF"/>
-                </a:solidFill>
-                <a:latin typeface="Calibri"/>
-              </a:defRPr>
-            </a:pPr>
-            <a:r>
-              <a:t>•  Exploit Concept (CVE-2016-5195)</a:t>
-            </a:r>
-          </a:p>
-          <a:p>
-            <a:pPr>
-              <a:spcAft>
-                <a:spcPts val="1000"/>
-              </a:spcAft>
-              <a:defRPr sz="1400">
-                <a:solidFill>
-                  <a:srgbClr val="94A3B8"/>
-                </a:solidFill>
-                <a:latin typeface="Calibri"/>
-              </a:defRPr>
-            </a:pPr>
-            <a:r>
-              <a:t>   •  A kernel-level race condition in Linux's Copy-on-Write (COW) system.</a:t>
-            </a:r>
-          </a:p>
-          <a:p>
-            <a:pPr>
-              <a:spcAft>
-                <a:spcPts val="1000"/>
-              </a:spcAft>
-              <a:defRPr sz="1400">
-                <a:solidFill>
-                  <a:srgbClr val="94A3B8"/>
-                </a:solidFill>
-                <a:latin typeface="Calibri"/>
-              </a:defRPr>
-            </a:pPr>
-            <a:r>
-              <a:t>   •  Overwrites read-only cache pages using procfs self-memory loops.</a:t>
-            </a:r>
-          </a:p>
-          <a:p>
-            <a:pPr>
-              <a:spcAft>
-                <a:spcPts val="1000"/>
-              </a:spcAft>
-              <a:defRPr sz="1500" b="1">
-                <a:solidFill>
-                  <a:srgbClr val="EF4444"/>
-                </a:solidFill>
-                <a:latin typeface="Calibri"/>
-              </a:defRPr>
-            </a:pPr>
-            <a:r>
-              <a:t>🔴  Exploit Execution</a:t>
-            </a:r>
-          </a:p>
-          <a:p>
-            <a:pPr>
-              <a:spcAft>
-                <a:spcPts val="1000"/>
-              </a:spcAft>
-              <a:defRPr sz="1400">
-                <a:solidFill>
-                  <a:srgbClr val="94A3B8"/>
-                </a:solidFill>
-                <a:latin typeface="Calibri"/>
-              </a:defRPr>
-            </a:pPr>
-            <a:r>
-              <a:t>   •  Low-privilege container user compiles and runs dirtyc0w.c.</a:t>
-            </a:r>
-          </a:p>
-          <a:p>
-            <a:pPr>
-              <a:spcAft>
-                <a:spcPts val="1000"/>
-              </a:spcAft>
-              <a:defRPr sz="1400">
-                <a:solidFill>
-                  <a:srgbClr val="94A3B8"/>
-                </a:solidFill>
-                <a:latin typeface="Calibri"/>
-              </a:defRPr>
-            </a:pPr>
-            <a:r>
-              <a:t>   •  Targets a read-only root file: /var/secret/target.txt.</a:t>
-            </a:r>
-          </a:p>
-          <a:p>
-            <a:pPr>
-              <a:spcAft>
-                <a:spcPts val="1000"/>
-              </a:spcAft>
-              <a:defRPr sz="1500" b="1">
-                <a:solidFill>
-                  <a:srgbClr val="22C55E"/>
-                </a:solidFill>
-                <a:latin typeface="Calibri"/>
-              </a:defRPr>
-            </a:pPr>
-            <a:r>
-              <a:t>🟢  Automated Protection</a:t>
-            </a:r>
-          </a:p>
-          <a:p>
-            <a:pPr>
-              <a:spcAft>
-                <a:spcPts val="1000"/>
-              </a:spcAft>
-              <a:defRPr sz="1400">
-                <a:solidFill>
-                  <a:srgbClr val="94A3B8"/>
-                </a:solidFill>
-                <a:latin typeface="Calibri"/>
-              </a:defRPr>
-            </a:pPr>
-            <a:r>
-              <a:t>   •  On modern kernels (like GitHub runners), page faults are atomic.</a:t>
-            </a:r>
-          </a:p>
-          <a:p>
-            <a:pPr>
-              <a:spcAft>
-                <a:spcPts val="1000"/>
-              </a:spcAft>
-              <a:defRPr sz="1400">
-                <a:solidFill>
-                  <a:srgbClr val="94A3B8"/>
-                </a:solidFill>
-                <a:latin typeface="Calibri"/>
-              </a:defRPr>
-            </a:pPr>
-            <a:r>
-              <a:t>   •  The race condition fails safely (Exploit Prevented).</a:t>
-            </a:r>
-          </a:p>
-        </p:txBody>
-      </p:sp>
-      <p:sp>
-        <p:nvSpPr>
-          <p:cNvPr id="5" name="Rectangle 4"/>
+          <p:cNvPr id="4" name="Rectangle 3"/>
           <p:cNvSpPr/>
           <p:nvPr/>
         </p:nvSpPr>
         <p:spPr>
           <a:xfrm>
-            <a:off x="6583680" y="1645920"/>
-            <a:ext cx="4846320" cy="4389120"/>
+            <a:off x="685800" y="1645920"/>
+            <a:ext cx="5120640" cy="4389120"/>
           </a:xfrm>
           <a:prstGeom prst="rect">
             <a:avLst/>
@@ -5361,10 +6328,8 @@
           <a:solidFill>
             <a:srgbClr val="1E293B"/>
           </a:solidFill>
-          <a:ln w="19050">
-            <a:solidFill>
-              <a:srgbClr val="EF4444"/>
-            </a:solidFill>
+          <a:ln>
+            <a:noFill/>
           </a:ln>
         </p:spPr>
         <p:style>
@@ -5382,102 +6347,226 @@
           </a:fontRef>
         </p:style>
         <p:txBody>
-          <a:bodyPr rtlCol="0" anchor="ctr" wrap="square" lIns="182880" rIns="182880" tIns="182880" bIns="182880"/>
-          <a:lstStyle/>
-          <a:p>
-            <a:pPr algn="ctr">
+          <a:bodyPr rtlCol="0" anchor="ctr"/>
+          <a:lstStyle/>
+          <a:p>
+            <a:pPr algn="ctr"/>
+          </a:p>
+        </p:txBody>
+      </p:sp>
+      <p:sp>
+        <p:nvSpPr>
+          <p:cNvPr id="5" name="TextBox 4"/>
+          <p:cNvSpPr txBox="1"/>
+          <p:nvPr/>
+        </p:nvSpPr>
+        <p:spPr>
+          <a:xfrm>
+            <a:off x="868680" y="1828800"/>
+            <a:ext cx="4754880" cy="4023360"/>
+          </a:xfrm>
+          <a:prstGeom prst="rect">
+            <a:avLst/>
+          </a:prstGeom>
+          <a:noFill/>
+        </p:spPr>
+        <p:txBody>
+          <a:bodyPr wrap="square" lIns="0" rIns="0" tIns="0" bIns="0">
+            <a:spAutoFit/>
+          </a:bodyPr>
+          <a:lstStyle/>
+          <a:p>
+            <a:pPr>
               <a:spcAft>
-                <a:spcPts val="400"/>
+                <a:spcPts val="1000"/>
               </a:spcAft>
-              <a:defRPr sz="1400" b="1">
-                <a:solidFill>
-                  <a:srgbClr val="FFFFFF"/>
-                </a:solidFill>
-                <a:latin typeface="Trebuchet MS"/>
-              </a:defRPr>
-            </a:pPr>
-            <a:r>
-              <a:t>DETECTION &amp; MITIGATION BLUEPRINT</a:t>
+              <a:defRPr sz="1300" b="1">
+                <a:solidFill>
+                  <a:srgbClr val="2563EB"/>
+                </a:solidFill>
+                <a:latin typeface="Arial"/>
+              </a:defRPr>
+            </a:pPr>
+            <a:r>
+              <a:t>EXPLOIT VECTOR: CVE-2016-5195</a:t>
             </a:r>
           </a:p>
           <a:p>
             <a:pPr>
               <a:spcAft>
-                <a:spcPts val="800"/>
+                <a:spcPts val="600"/>
               </a:spcAft>
-              <a:defRPr sz="1100" b="1">
-                <a:solidFill>
-                  <a:srgbClr val="EF4444"/>
-                </a:solidFill>
-                <a:latin typeface="Calibri"/>
-              </a:defRPr>
-            </a:pPr>
-            <a:r>
-              <a:t>Hexa Force Remediation</a:t>
+              <a:defRPr sz="1300">
+                <a:solidFill>
+                  <a:srgbClr val="F1F5F9"/>
+                </a:solidFill>
+                <a:latin typeface="Arial"/>
+              </a:defRPr>
+            </a:pPr>
+            <a:r>
+              <a:t>• Initial shell secured as unprivileged user 'victim' inside the Docker container.</a:t>
             </a:r>
           </a:p>
           <a:p>
             <a:pPr>
               <a:spcAft>
-                <a:spcPts val="400"/>
+                <a:spcPts val="600"/>
               </a:spcAft>
-              <a:defRPr sz="1200">
-                <a:solidFill>
-                  <a:srgbClr val="94A3B8"/>
-                </a:solidFill>
-                <a:latin typeface="Calibri"/>
-              </a:defRPr>
-            </a:pPr>
-            <a:r>
-              <a:t>• Detection: Static scan container kernels for CVE-2016-5195 signatures.</a:t>
+              <a:defRPr sz="1300">
+                <a:solidFill>
+                  <a:srgbClr val="F1F5F9"/>
+                </a:solidFill>
+                <a:latin typeface="Arial"/>
+              </a:defRPr>
+            </a:pPr>
+            <a:r>
+              <a:t>• Exploit compiled: 'dirtyc0w.c' uses memory mapping and multi-threaded race conditions.</a:t>
             </a:r>
           </a:p>
           <a:p>
             <a:pPr>
               <a:spcAft>
-                <a:spcPts val="400"/>
+                <a:spcPts val="600"/>
               </a:spcAft>
-              <a:defRPr sz="1200">
-                <a:solidFill>
-                  <a:srgbClr val="94A3B8"/>
-                </a:solidFill>
-                <a:latin typeface="Calibri"/>
-              </a:defRPr>
-            </a:pPr>
-            <a:r>
-              <a:t>• Detection: Audit syscall sequences using seccomp/madvise logs.</a:t>
-            </a:r>
-          </a:p>
+              <a:defRPr sz="1300">
+                <a:solidFill>
+                  <a:srgbClr val="F1F5F9"/>
+                </a:solidFill>
+                <a:latin typeface="Arial"/>
+              </a:defRPr>
+            </a:pPr>
+            <a:r>
+              <a:t>• Memory target: Overwriting a read-only file ('/var/secret/target.txt') owned by container root.</a:t>
+            </a:r>
+          </a:p>
+        </p:txBody>
+      </p:sp>
+      <p:sp>
+        <p:nvSpPr>
+          <p:cNvPr id="6" name="Rectangle 5"/>
+          <p:cNvSpPr/>
+          <p:nvPr/>
+        </p:nvSpPr>
+        <p:spPr>
+          <a:xfrm>
+            <a:off x="6217920" y="1645920"/>
+            <a:ext cx="5120640" cy="4389120"/>
+          </a:xfrm>
+          <a:prstGeom prst="rect">
+            <a:avLst/>
+          </a:prstGeom>
+          <a:solidFill>
+            <a:srgbClr val="1E293B"/>
+          </a:solidFill>
+          <a:ln>
+            <a:noFill/>
+          </a:ln>
+        </p:spPr>
+        <p:style>
+          <a:lnRef idx="1">
+            <a:schemeClr val="accent1"/>
+          </a:lnRef>
+          <a:fillRef idx="3">
+            <a:schemeClr val="accent1"/>
+          </a:fillRef>
+          <a:effectRef idx="2">
+            <a:schemeClr val="accent1"/>
+          </a:effectRef>
+          <a:fontRef idx="minor">
+            <a:schemeClr val="lt1"/>
+          </a:fontRef>
+        </p:style>
+        <p:txBody>
+          <a:bodyPr rtlCol="0" anchor="ctr"/>
+          <a:lstStyle/>
+          <a:p>
+            <a:pPr algn="ctr"/>
+          </a:p>
+        </p:txBody>
+      </p:sp>
+      <p:sp>
+        <p:nvSpPr>
+          <p:cNvPr id="7" name="TextBox 6"/>
+          <p:cNvSpPr txBox="1"/>
+          <p:nvPr/>
+        </p:nvSpPr>
+        <p:spPr>
+          <a:xfrm>
+            <a:off x="6400800" y="1828800"/>
+            <a:ext cx="4754880" cy="4023360"/>
+          </a:xfrm>
+          <a:prstGeom prst="rect">
+            <a:avLst/>
+          </a:prstGeom>
+          <a:noFill/>
+        </p:spPr>
+        <p:txBody>
+          <a:bodyPr wrap="square" lIns="0" rIns="0" tIns="0" bIns="0">
+            <a:spAutoFit/>
+          </a:bodyPr>
+          <a:lstStyle/>
           <a:p>
             <a:pPr>
               <a:spcAft>
-                <a:spcPts val="400"/>
+                <a:spcPts val="1000"/>
               </a:spcAft>
-              <a:defRPr sz="1200">
-                <a:solidFill>
-                  <a:srgbClr val="94A3B8"/>
-                </a:solidFill>
-                <a:latin typeface="Calibri"/>
-              </a:defRPr>
-            </a:pPr>
-            <a:r>
-              <a:t>• Mitigation: Keep the underlying host OS kernel fully patched.</a:t>
+              <a:defRPr sz="1300" b="1">
+                <a:solidFill>
+                  <a:srgbClr val="2563EB"/>
+                </a:solidFill>
+                <a:latin typeface="Arial"/>
+              </a:defRPr>
+            </a:pPr>
+            <a:r>
+              <a:t>TECHNICAL OUTCOME</a:t>
             </a:r>
           </a:p>
           <a:p>
             <a:pPr>
               <a:spcAft>
-                <a:spcPts val="400"/>
+                <a:spcPts val="600"/>
               </a:spcAft>
-              <a:defRPr sz="1200">
-                <a:solidFill>
-                  <a:srgbClr val="94A3B8"/>
-                </a:solidFill>
-                <a:latin typeface="Calibri"/>
-              </a:defRPr>
-            </a:pPr>
-            <a:r>
-              <a:t>• Mitigation: Implement secure sandboxed runtimes (gVisor) to isolate guest system calls.</a:t>
+              <a:defRPr sz="1300">
+                <a:solidFill>
+                  <a:srgbClr val="F1F5F9"/>
+                </a:solidFill>
+                <a:latin typeface="Arial"/>
+              </a:defRPr>
+            </a:pPr>
+            <a:r>
+              <a:t>• The exploit utilizes the 'madvise(MADV_DONTNEED)' system call to discard mapped page frames.</a:t>
+            </a:r>
+          </a:p>
+          <a:p>
+            <a:pPr>
+              <a:spcAft>
+                <a:spcPts val="600"/>
+              </a:spcAft>
+              <a:defRPr sz="1300">
+                <a:solidFill>
+                  <a:srgbClr val="F1F5F9"/>
+                </a:solidFill>
+                <a:latin typeface="Arial"/>
+              </a:defRPr>
+            </a:pPr>
+            <a:r>
+              <a:t>• Concurrently writes payload through the '/proc/self/mem' interface.</a:t>
+            </a:r>
+          </a:p>
+          <a:p>
+            <a:pPr>
+              <a:spcAft>
+                <a:spcPts val="600"/>
+              </a:spcAft>
+              <a:defRPr sz="1300">
+                <a:solidFill>
+                  <a:srgbClr val="F1F5F9"/>
+                </a:solidFill>
+                <a:latin typeface="Arial"/>
+              </a:defRPr>
+            </a:pPr>
+            <a:r>
+              <a:t>• Result: Bypasses file permissions, overwrites target, and escalates process privileges to container root.</a:t>
             </a:r>
           </a:p>
         </p:txBody>
@@ -5516,8 +6605,8 @@
         </p:nvSpPr>
         <p:spPr>
           <a:xfrm>
-            <a:off x="731520" y="365760"/>
-            <a:ext cx="10698480" cy="274320"/>
+            <a:off x="685800" y="365760"/>
+            <a:ext cx="10817352" cy="274320"/>
           </a:xfrm>
           <a:prstGeom prst="rect">
             <a:avLst/>
@@ -5531,15 +6620,15 @@
           <a:lstStyle/>
           <a:p>
             <a:pPr>
-              <a:defRPr sz="1000" b="1">
-                <a:solidFill>
-                  <a:srgbClr val="06B6D4"/>
-                </a:solidFill>
-                <a:latin typeface="Trebuchet MS"/>
-              </a:defRPr>
-            </a:pPr>
-            <a:r>
-              <a:t>STAGE 2 WORKFLOW</a:t>
+              <a:defRPr sz="950" b="1">
+                <a:solidFill>
+                  <a:srgbClr val="2563EB"/>
+                </a:solidFill>
+                <a:latin typeface="Arial"/>
+              </a:defRPr>
+            </a:pPr>
+            <a:r>
+              <a:t>HEXA FORCE CONTAINER SECURITY SERIES</a:t>
             </a:r>
           </a:p>
         </p:txBody>
@@ -5552,8 +6641,8 @@
         </p:nvSpPr>
         <p:spPr>
           <a:xfrm>
-            <a:off x="731520" y="548640"/>
-            <a:ext cx="10698480" cy="731520"/>
+            <a:off x="685800" y="594360"/>
+            <a:ext cx="10817352" cy="731520"/>
           </a:xfrm>
           <a:prstGeom prst="rect">
             <a:avLst/>
@@ -5567,11 +6656,11 @@
           <a:lstStyle/>
           <a:p>
             <a:pPr>
-              <a:defRPr sz="2600" b="1">
+              <a:defRPr sz="2800" b="1">
                 <a:solidFill>
                   <a:srgbClr val="FFFFFF"/>
                 </a:solidFill>
-                <a:latin typeface="Trebuchet MS"/>
+                <a:latin typeface="Arial"/>
               </a:defRPr>
             </a:pPr>
             <a:r>
@@ -5582,181 +6671,14 @@
       </p:sp>
       <p:sp>
         <p:nvSpPr>
-          <p:cNvPr id="4" name="TextBox 3"/>
-          <p:cNvSpPr txBox="1"/>
-          <p:nvPr/>
-        </p:nvSpPr>
-        <p:spPr>
-          <a:xfrm>
-            <a:off x="731520" y="1645920"/>
-            <a:ext cx="5486400" cy="4572000"/>
-          </a:xfrm>
-          <a:prstGeom prst="rect">
-            <a:avLst/>
-          </a:prstGeom>
-          <a:noFill/>
-        </p:spPr>
-        <p:txBody>
-          <a:bodyPr wrap="square" lIns="0" rIns="0" tIns="0" bIns="0">
-            <a:spAutoFit/>
-          </a:bodyPr>
-          <a:lstStyle/>
-          <a:p>
-            <a:pPr>
-              <a:spcAft>
-                <a:spcPts val="1000"/>
-              </a:spcAft>
-              <a:defRPr sz="1500" b="1">
-                <a:solidFill>
-                  <a:srgbClr val="FFFFFF"/>
-                </a:solidFill>
-                <a:latin typeface="Calibri"/>
-              </a:defRPr>
-            </a:pPr>
-            <a:r>
-              <a:t>•  Exploit Concept (CAP_SYS_PTRACE)</a:t>
-            </a:r>
-          </a:p>
-          <a:p>
-            <a:pPr>
-              <a:spcAft>
-                <a:spcPts val="1000"/>
-              </a:spcAft>
-              <a:defRPr sz="1400">
-                <a:solidFill>
-                  <a:srgbClr val="94A3B8"/>
-                </a:solidFill>
-                <a:latin typeface="Calibri"/>
-              </a:defRPr>
-            </a:pPr>
-            <a:r>
-              <a:t>   •  Over-privileged capabilities allow reading and writing process memory.</a:t>
-            </a:r>
-          </a:p>
-          <a:p>
-            <a:pPr>
-              <a:spcAft>
-                <a:spcPts val="1000"/>
-              </a:spcAft>
-              <a:defRPr sz="1400">
-                <a:solidFill>
-                  <a:srgbClr val="94A3B8"/>
-                </a:solidFill>
-                <a:latin typeface="Calibri"/>
-              </a:defRPr>
-            </a:pPr>
-            <a:r>
-              <a:t>   •  Combined with shared host PID namespace, it allows host code injection.</a:t>
-            </a:r>
-          </a:p>
-          <a:p>
-            <a:pPr>
-              <a:spcAft>
-                <a:spcPts val="1000"/>
-              </a:spcAft>
-              <a:defRPr sz="1500" b="1">
-                <a:solidFill>
-                  <a:srgbClr val="06B6D4"/>
-                </a:solidFill>
-                <a:latin typeface="Calibri"/>
-              </a:defRPr>
-            </a:pPr>
-            <a:r>
-              <a:t>🔵  Capability Diagnostics</a:t>
-            </a:r>
-          </a:p>
-          <a:p>
-            <a:pPr>
-              <a:spcAft>
-                <a:spcPts val="1000"/>
-              </a:spcAft>
-              <a:defRPr sz="1400">
-                <a:solidFill>
-                  <a:srgbClr val="94A3B8"/>
-                </a:solidFill>
-                <a:latin typeface="Calibri"/>
-              </a:defRPr>
-            </a:pPr>
-            <a:r>
-              <a:t>   •  Evaluates active permissions using the 'capsh --print' utility.</a:t>
-            </a:r>
-          </a:p>
-          <a:p>
-            <a:pPr>
-              <a:spcAft>
-                <a:spcPts val="1000"/>
-              </a:spcAft>
-              <a:defRPr sz="1400">
-                <a:solidFill>
-                  <a:srgbClr val="94A3B8"/>
-                </a:solidFill>
-                <a:latin typeface="Calibri"/>
-              </a:defRPr>
-            </a:pPr>
-            <a:r>
-              <a:t>   •  Checks PID visibility to detect shared namespace profiles.</a:t>
-            </a:r>
-          </a:p>
-          <a:p>
-            <a:pPr>
-              <a:spcAft>
-                <a:spcPts val="1000"/>
-              </a:spcAft>
-              <a:defRPr sz="1500" b="1">
-                <a:solidFill>
-                  <a:srgbClr val="22C55E"/>
-                </a:solidFill>
-                <a:latin typeface="Calibri"/>
-              </a:defRPr>
-            </a:pPr>
-            <a:r>
-              <a:t>🟢  Namespace Isolation</a:t>
-            </a:r>
-          </a:p>
-          <a:p>
-            <a:pPr>
-              <a:spcAft>
-                <a:spcPts val="1000"/>
-              </a:spcAft>
-              <a:defRPr sz="1400">
-                <a:solidFill>
-                  <a:srgbClr val="94A3B8"/>
-                </a:solidFill>
-                <a:latin typeface="Calibri"/>
-              </a:defRPr>
-            </a:pPr>
-            <a:r>
-              <a:t>   •  With standard isolated namespaces, host processes are invisible.</a:t>
-            </a:r>
-          </a:p>
-          <a:p>
-            <a:pPr>
-              <a:spcAft>
-                <a:spcPts val="1000"/>
-              </a:spcAft>
-              <a:defRPr sz="1400">
-                <a:solidFill>
-                  <a:srgbClr val="94A3B8"/>
-                </a:solidFill>
-                <a:latin typeface="Calibri"/>
-              </a:defRPr>
-            </a:pPr>
-            <a:r>
-              <a:t>   •  Ensures container tasks are safely isolated.</a:t>
-            </a:r>
-          </a:p>
-        </p:txBody>
-      </p:sp>
-      <p:sp>
-        <p:nvSpPr>
-          <p:cNvPr id="5" name="Rectangle 4"/>
+          <p:cNvPr id="4" name="Rectangle 3"/>
           <p:cNvSpPr/>
           <p:nvPr/>
         </p:nvSpPr>
         <p:spPr>
           <a:xfrm>
-            <a:off x="6583680" y="1645920"/>
-            <a:ext cx="4846320" cy="4389120"/>
+            <a:off x="685800" y="1645920"/>
+            <a:ext cx="5120640" cy="4389120"/>
           </a:xfrm>
           <a:prstGeom prst="rect">
             <a:avLst/>
@@ -5764,10 +6686,8 @@
           <a:solidFill>
             <a:srgbClr val="1E293B"/>
           </a:solidFill>
-          <a:ln w="19050">
-            <a:solidFill>
-              <a:srgbClr val="06B6D4"/>
-            </a:solidFill>
+          <a:ln>
+            <a:noFill/>
           </a:ln>
         </p:spPr>
         <p:style>
@@ -5785,102 +6705,226 @@
           </a:fontRef>
         </p:style>
         <p:txBody>
-          <a:bodyPr rtlCol="0" anchor="ctr" wrap="square" lIns="182880" rIns="182880" tIns="182880" bIns="182880"/>
-          <a:lstStyle/>
-          <a:p>
-            <a:pPr algn="ctr">
+          <a:bodyPr rtlCol="0" anchor="ctr"/>
+          <a:lstStyle/>
+          <a:p>
+            <a:pPr algn="ctr"/>
+          </a:p>
+        </p:txBody>
+      </p:sp>
+      <p:sp>
+        <p:nvSpPr>
+          <p:cNvPr id="5" name="TextBox 4"/>
+          <p:cNvSpPr txBox="1"/>
+          <p:nvPr/>
+        </p:nvSpPr>
+        <p:spPr>
+          <a:xfrm>
+            <a:off x="868680" y="1828800"/>
+            <a:ext cx="4754880" cy="4023360"/>
+          </a:xfrm>
+          <a:prstGeom prst="rect">
+            <a:avLst/>
+          </a:prstGeom>
+          <a:noFill/>
+        </p:spPr>
+        <p:txBody>
+          <a:bodyPr wrap="square" lIns="0" rIns="0" tIns="0" bIns="0">
+            <a:spAutoFit/>
+          </a:bodyPr>
+          <a:lstStyle/>
+          <a:p>
+            <a:pPr>
               <a:spcAft>
-                <a:spcPts val="400"/>
+                <a:spcPts val="1000"/>
               </a:spcAft>
-              <a:defRPr sz="1400" b="1">
-                <a:solidFill>
-                  <a:srgbClr val="FFFFFF"/>
-                </a:solidFill>
-                <a:latin typeface="Trebuchet MS"/>
-              </a:defRPr>
-            </a:pPr>
-            <a:r>
-              <a:t>DETECTION &amp; MITIGATION BLUEPRINT</a:t>
+              <a:defRPr sz="1300" b="1">
+                <a:solidFill>
+                  <a:srgbClr val="2563EB"/>
+                </a:solidFill>
+                <a:latin typeface="Arial"/>
+              </a:defRPr>
+            </a:pPr>
+            <a:r>
+              <a:t>VULNERABILITY ANALYSIS</a:t>
             </a:r>
           </a:p>
           <a:p>
             <a:pPr>
               <a:spcAft>
-                <a:spcPts val="800"/>
+                <a:spcPts val="600"/>
               </a:spcAft>
-              <a:defRPr sz="1100" b="1">
-                <a:solidFill>
-                  <a:srgbClr val="06B6D4"/>
-                </a:solidFill>
-                <a:latin typeface="Calibri"/>
-              </a:defRPr>
-            </a:pPr>
-            <a:r>
-              <a:t>Hexa Force Remediation</a:t>
+              <a:defRPr sz="1300">
+                <a:solidFill>
+                  <a:srgbClr val="F1F5F9"/>
+                </a:solidFill>
+                <a:latin typeface="Arial"/>
+              </a:defRPr>
+            </a:pPr>
+            <a:r>
+              <a:t>• Linux capabilities partition superuser powers into distinct, assignable units.</a:t>
             </a:r>
           </a:p>
           <a:p>
             <a:pPr>
               <a:spcAft>
-                <a:spcPts val="400"/>
+                <a:spcPts val="600"/>
               </a:spcAft>
-              <a:defRPr sz="1200">
-                <a:solidFill>
-                  <a:srgbClr val="94A3B8"/>
-                </a:solidFill>
-                <a:latin typeface="Calibri"/>
-              </a:defRPr>
-            </a:pPr>
-            <a:r>
-              <a:t>• Detection: Scan configuration files for '--pid=host' namespace flags.</a:t>
+              <a:defRPr sz="1300">
+                <a:solidFill>
+                  <a:srgbClr val="F1F5F9"/>
+                </a:solidFill>
+                <a:latin typeface="Arial"/>
+              </a:defRPr>
+            </a:pPr>
+            <a:r>
+              <a:t>• If a container is misconfigured with 'CAP_SYS_ADMIN', its processes gain massive control.</a:t>
             </a:r>
           </a:p>
           <a:p>
             <a:pPr>
               <a:spcAft>
-                <a:spcPts val="400"/>
+                <a:spcPts val="600"/>
               </a:spcAft>
-              <a:defRPr sz="1200">
-                <a:solidFill>
-                  <a:srgbClr val="94A3B8"/>
-                </a:solidFill>
-                <a:latin typeface="Calibri"/>
-              </a:defRPr>
-            </a:pPr>
-            <a:r>
-              <a:t>• Detection: Monitor running processes for active CAP_SYS_PTRACE capabilities.</a:t>
-            </a:r>
-          </a:p>
+              <a:defRPr sz="1300">
+                <a:solidFill>
+                  <a:srgbClr val="F1F5F9"/>
+                </a:solidFill>
+                <a:latin typeface="Arial"/>
+              </a:defRPr>
+            </a:pPr>
+            <a:r>
+              <a:t>• This includes namespace management and raw storage device manipulation.</a:t>
+            </a:r>
+          </a:p>
+        </p:txBody>
+      </p:sp>
+      <p:sp>
+        <p:nvSpPr>
+          <p:cNvPr id="6" name="Rectangle 5"/>
+          <p:cNvSpPr/>
+          <p:nvPr/>
+        </p:nvSpPr>
+        <p:spPr>
+          <a:xfrm>
+            <a:off x="6217920" y="1645920"/>
+            <a:ext cx="5120640" cy="4389120"/>
+          </a:xfrm>
+          <a:prstGeom prst="rect">
+            <a:avLst/>
+          </a:prstGeom>
+          <a:solidFill>
+            <a:srgbClr val="1E293B"/>
+          </a:solidFill>
+          <a:ln>
+            <a:noFill/>
+          </a:ln>
+        </p:spPr>
+        <p:style>
+          <a:lnRef idx="1">
+            <a:schemeClr val="accent1"/>
+          </a:lnRef>
+          <a:fillRef idx="3">
+            <a:schemeClr val="accent1"/>
+          </a:fillRef>
+          <a:effectRef idx="2">
+            <a:schemeClr val="accent1"/>
+          </a:effectRef>
+          <a:fontRef idx="minor">
+            <a:schemeClr val="lt1"/>
+          </a:fontRef>
+        </p:style>
+        <p:txBody>
+          <a:bodyPr rtlCol="0" anchor="ctr"/>
+          <a:lstStyle/>
+          <a:p>
+            <a:pPr algn="ctr"/>
+          </a:p>
+        </p:txBody>
+      </p:sp>
+      <p:sp>
+        <p:nvSpPr>
+          <p:cNvPr id="7" name="TextBox 6"/>
+          <p:cNvSpPr txBox="1"/>
+          <p:nvPr/>
+        </p:nvSpPr>
+        <p:spPr>
+          <a:xfrm>
+            <a:off x="6400800" y="1828800"/>
+            <a:ext cx="4754880" cy="4023360"/>
+          </a:xfrm>
+          <a:prstGeom prst="rect">
+            <a:avLst/>
+          </a:prstGeom>
+          <a:noFill/>
+        </p:spPr>
+        <p:txBody>
+          <a:bodyPr wrap="square" lIns="0" rIns="0" tIns="0" bIns="0">
+            <a:spAutoFit/>
+          </a:bodyPr>
+          <a:lstStyle/>
           <a:p>
             <a:pPr>
               <a:spcAft>
-                <a:spcPts val="400"/>
+                <a:spcPts val="1000"/>
               </a:spcAft>
-              <a:defRPr sz="1200">
-                <a:solidFill>
-                  <a:srgbClr val="94A3B8"/>
-                </a:solidFill>
-                <a:latin typeface="Calibri"/>
-              </a:defRPr>
-            </a:pPr>
-            <a:r>
-              <a:t>• Mitigation: Drop all default capabilities: --cap-drop=ALL.</a:t>
+              <a:defRPr sz="1300" b="1">
+                <a:solidFill>
+                  <a:srgbClr val="2563EB"/>
+                </a:solidFill>
+                <a:latin typeface="Arial"/>
+              </a:defRPr>
+            </a:pPr>
+            <a:r>
+              <a:t>EXPLOITATION FLOW</a:t>
             </a:r>
           </a:p>
           <a:p>
             <a:pPr>
               <a:spcAft>
-                <a:spcPts val="400"/>
+                <a:spcPts val="600"/>
               </a:spcAft>
-              <a:defRPr sz="1200">
-                <a:solidFill>
-                  <a:srgbClr val="94A3B8"/>
-                </a:solidFill>
-                <a:latin typeface="Calibri"/>
-              </a:defRPr>
-            </a:pPr>
-            <a:r>
-              <a:t>• Mitigation: Strictly avoid running containers in host PID namespaces.</a:t>
+              <a:defRPr sz="1300">
+                <a:solidFill>
+                  <a:srgbClr val="F1F5F9"/>
+                </a:solidFill>
+                <a:latin typeface="Arial"/>
+              </a:defRPr>
+            </a:pPr>
+            <a:r>
+              <a:t>• The newly elevated container root user queries active capabilities.</a:t>
+            </a:r>
+          </a:p>
+          <a:p>
+            <a:pPr>
+              <a:spcAft>
+                <a:spcPts val="600"/>
+              </a:spcAft>
+              <a:defRPr sz="1300">
+                <a:solidFill>
+                  <a:srgbClr val="F1F5F9"/>
+                </a:solidFill>
+                <a:latin typeface="Arial"/>
+              </a:defRPr>
+            </a:pPr>
+            <a:r>
+              <a:t>• Finding CAP_SYS_ADMIN active, the attacker bypasses process limits.</a:t>
+            </a:r>
+          </a:p>
+          <a:p>
+            <a:pPr>
+              <a:spcAft>
+                <a:spcPts val="600"/>
+              </a:spcAft>
+              <a:defRPr sz="1300">
+                <a:solidFill>
+                  <a:srgbClr val="F1F5F9"/>
+                </a:solidFill>
+                <a:latin typeface="Arial"/>
+              </a:defRPr>
+            </a:pPr>
+            <a:r>
+              <a:t>• This privilege forms the architectural beachhead needed to compromise external host interfaces.</a:t>
             </a:r>
           </a:p>
         </p:txBody>
@@ -5919,8 +6963,8 @@
         </p:nvSpPr>
         <p:spPr>
           <a:xfrm>
-            <a:off x="731520" y="365760"/>
-            <a:ext cx="10698480" cy="274320"/>
+            <a:off x="685800" y="365760"/>
+            <a:ext cx="10817352" cy="274320"/>
           </a:xfrm>
           <a:prstGeom prst="rect">
             <a:avLst/>
@@ -5934,15 +6978,15 @@
           <a:lstStyle/>
           <a:p>
             <a:pPr>
-              <a:defRPr sz="1000" b="1">
-                <a:solidFill>
-                  <a:srgbClr val="06B6D4"/>
-                </a:solidFill>
-                <a:latin typeface="Trebuchet MS"/>
-              </a:defRPr>
-            </a:pPr>
-            <a:r>
-              <a:t>STAGE 3 WORKFLOW</a:t>
+              <a:defRPr sz="950" b="1">
+                <a:solidFill>
+                  <a:srgbClr val="2563EB"/>
+                </a:solidFill>
+                <a:latin typeface="Arial"/>
+              </a:defRPr>
+            </a:pPr>
+            <a:r>
+              <a:t>HEXA FORCE CONTAINER SECURITY SERIES</a:t>
             </a:r>
           </a:p>
         </p:txBody>
@@ -5955,8 +6999,8 @@
         </p:nvSpPr>
         <p:spPr>
           <a:xfrm>
-            <a:off x="731520" y="548640"/>
-            <a:ext cx="10698480" cy="731520"/>
+            <a:off x="685800" y="594360"/>
+            <a:ext cx="10817352" cy="731520"/>
           </a:xfrm>
           <a:prstGeom prst="rect">
             <a:avLst/>
@@ -5970,11 +7014,11 @@
           <a:lstStyle/>
           <a:p>
             <a:pPr>
-              <a:defRPr sz="2600" b="1">
+              <a:defRPr sz="2800" b="1">
                 <a:solidFill>
                   <a:srgbClr val="FFFFFF"/>
                 </a:solidFill>
-                <a:latin typeface="Trebuchet MS"/>
+                <a:latin typeface="Arial"/>
               </a:defRPr>
             </a:pPr>
             <a:r>
@@ -5985,181 +7029,14 @@
       </p:sp>
       <p:sp>
         <p:nvSpPr>
-          <p:cNvPr id="4" name="TextBox 3"/>
-          <p:cNvSpPr txBox="1"/>
-          <p:nvPr/>
-        </p:nvSpPr>
-        <p:spPr>
-          <a:xfrm>
-            <a:off x="731520" y="1645920"/>
-            <a:ext cx="5486400" cy="4572000"/>
-          </a:xfrm>
-          <a:prstGeom prst="rect">
-            <a:avLst/>
-          </a:prstGeom>
-          <a:noFill/>
-        </p:spPr>
-        <p:txBody>
-          <a:bodyPr wrap="square" lIns="0" rIns="0" tIns="0" bIns="0">
-            <a:spAutoFit/>
-          </a:bodyPr>
-          <a:lstStyle/>
-          <a:p>
-            <a:pPr>
-              <a:spcAft>
-                <a:spcPts val="1000"/>
-              </a:spcAft>
-              <a:defRPr sz="1500" b="1">
-                <a:solidFill>
-                  <a:srgbClr val="FFFFFF"/>
-                </a:solidFill>
-                <a:latin typeface="Calibri"/>
-              </a:defRPr>
-            </a:pPr>
-            <a:r>
-              <a:t>•  Exploit Concept (UNIX Socket Mount)</a:t>
-            </a:r>
-          </a:p>
-          <a:p>
-            <a:pPr>
-              <a:spcAft>
-                <a:spcPts val="1000"/>
-              </a:spcAft>
-              <a:defRPr sz="1400">
-                <a:solidFill>
-                  <a:srgbClr val="94A3B8"/>
-                </a:solidFill>
-                <a:latin typeface="Calibri"/>
-              </a:defRPr>
-            </a:pPr>
-            <a:r>
-              <a:t>   •  The Docker daemon runs as root on the host system.</a:t>
-            </a:r>
-          </a:p>
-          <a:p>
-            <a:pPr>
-              <a:spcAft>
-                <a:spcPts val="1000"/>
-              </a:spcAft>
-              <a:defRPr sz="1400">
-                <a:solidFill>
-                  <a:srgbClr val="94A3B8"/>
-                </a:solidFill>
-                <a:latin typeface="Calibri"/>
-              </a:defRPr>
-            </a:pPr>
-            <a:r>
-              <a:t>   •  Exposing docker.sock gives the container full daemon administrative access.</a:t>
-            </a:r>
-          </a:p>
-          <a:p>
-            <a:pPr>
-              <a:spcAft>
-                <a:spcPts val="1000"/>
-              </a:spcAft>
-              <a:defRPr sz="1500" b="1">
-                <a:solidFill>
-                  <a:srgbClr val="EF4444"/>
-                </a:solidFill>
-                <a:latin typeface="Calibri"/>
-              </a:defRPr>
-            </a:pPr>
-            <a:r>
-              <a:t>🔴  Sibling Hijack Simulation</a:t>
-            </a:r>
-          </a:p>
-          <a:p>
-            <a:pPr>
-              <a:spcAft>
-                <a:spcPts val="1000"/>
-              </a:spcAft>
-              <a:defRPr sz="1400">
-                <a:solidFill>
-                  <a:srgbClr val="94A3B8"/>
-                </a:solidFill>
-                <a:latin typeface="Calibri"/>
-              </a:defRPr>
-            </a:pPr>
-            <a:r>
-              <a:t>   •  Detects exposed sockets and constructs REST API payloads.</a:t>
-            </a:r>
-          </a:p>
-          <a:p>
-            <a:pPr>
-              <a:spcAft>
-                <a:spcPts val="1000"/>
-              </a:spcAft>
-              <a:defRPr sz="1400">
-                <a:solidFill>
-                  <a:srgbClr val="94A3B8"/>
-                </a:solidFill>
-                <a:latin typeface="Calibri"/>
-              </a:defRPr>
-            </a:pPr>
-            <a:r>
-              <a:t>   •  Spawns sibling containers with host root mounted on guest filesystems.</a:t>
-            </a:r>
-          </a:p>
-          <a:p>
-            <a:pPr>
-              <a:spcAft>
-                <a:spcPts val="1000"/>
-              </a:spcAft>
-              <a:defRPr sz="1500" b="1">
-                <a:solidFill>
-                  <a:srgbClr val="22C55E"/>
-                </a:solidFill>
-                <a:latin typeface="Calibri"/>
-              </a:defRPr>
-            </a:pPr>
-            <a:r>
-              <a:t>🟢  Socket Protection</a:t>
-            </a:r>
-          </a:p>
-          <a:p>
-            <a:pPr>
-              <a:spcAft>
-                <a:spcPts val="1000"/>
-              </a:spcAft>
-              <a:defRPr sz="1400">
-                <a:solidFill>
-                  <a:srgbClr val="94A3B8"/>
-                </a:solidFill>
-                <a:latin typeface="Calibri"/>
-              </a:defRPr>
-            </a:pPr>
-            <a:r>
-              <a:t>   •  Verifies that without socket file exposure, API queries are blocked.</a:t>
-            </a:r>
-          </a:p>
-          <a:p>
-            <a:pPr>
-              <a:spcAft>
-                <a:spcPts val="1000"/>
-              </a:spcAft>
-              <a:defRPr sz="1400">
-                <a:solidFill>
-                  <a:srgbClr val="94A3B8"/>
-                </a:solidFill>
-                <a:latin typeface="Calibri"/>
-              </a:defRPr>
-            </a:pPr>
-            <a:r>
-              <a:t>   •  Guest container remains securely separated.</a:t>
-            </a:r>
-          </a:p>
-        </p:txBody>
-      </p:sp>
-      <p:sp>
-        <p:nvSpPr>
-          <p:cNvPr id="5" name="Rectangle 4"/>
+          <p:cNvPr id="4" name="Rectangle 3"/>
           <p:cNvSpPr/>
           <p:nvPr/>
         </p:nvSpPr>
         <p:spPr>
           <a:xfrm>
-            <a:off x="6583680" y="1645920"/>
-            <a:ext cx="4846320" cy="4389120"/>
+            <a:off x="685800" y="1645920"/>
+            <a:ext cx="5120640" cy="4389120"/>
           </a:xfrm>
           <a:prstGeom prst="rect">
             <a:avLst/>
@@ -6167,10 +7044,8 @@
           <a:solidFill>
             <a:srgbClr val="1E293B"/>
           </a:solidFill>
-          <a:ln w="19050">
-            <a:solidFill>
-              <a:srgbClr val="EAB308"/>
-            </a:solidFill>
+          <a:ln>
+            <a:noFill/>
           </a:ln>
         </p:spPr>
         <p:style>
@@ -6188,102 +7063,210 @@
           </a:fontRef>
         </p:style>
         <p:txBody>
-          <a:bodyPr rtlCol="0" anchor="ctr" wrap="square" lIns="182880" rIns="182880" tIns="182880" bIns="182880"/>
-          <a:lstStyle/>
-          <a:p>
-            <a:pPr algn="ctr">
+          <a:bodyPr rtlCol="0" anchor="ctr"/>
+          <a:lstStyle/>
+          <a:p>
+            <a:pPr algn="ctr"/>
+          </a:p>
+        </p:txBody>
+      </p:sp>
+      <p:sp>
+        <p:nvSpPr>
+          <p:cNvPr id="5" name="TextBox 4"/>
+          <p:cNvSpPr txBox="1"/>
+          <p:nvPr/>
+        </p:nvSpPr>
+        <p:spPr>
+          <a:xfrm>
+            <a:off x="868680" y="1828800"/>
+            <a:ext cx="4754880" cy="4023360"/>
+          </a:xfrm>
+          <a:prstGeom prst="rect">
+            <a:avLst/>
+          </a:prstGeom>
+          <a:noFill/>
+        </p:spPr>
+        <p:txBody>
+          <a:bodyPr wrap="square" lIns="0" rIns="0" tIns="0" bIns="0">
+            <a:spAutoFit/>
+          </a:bodyPr>
+          <a:lstStyle/>
+          <a:p>
+            <a:pPr>
               <a:spcAft>
-                <a:spcPts val="400"/>
+                <a:spcPts val="1000"/>
               </a:spcAft>
-              <a:defRPr sz="1400" b="1">
-                <a:solidFill>
-                  <a:srgbClr val="FFFFFF"/>
-                </a:solidFill>
-                <a:latin typeface="Trebuchet MS"/>
-              </a:defRPr>
-            </a:pPr>
-            <a:r>
-              <a:t>DETECTION &amp; MITIGATION BLUEPRINT</a:t>
+              <a:defRPr sz="1300" b="1">
+                <a:solidFill>
+                  <a:srgbClr val="2563EB"/>
+                </a:solidFill>
+                <a:latin typeface="Arial"/>
+              </a:defRPr>
+            </a:pPr>
+            <a:r>
+              <a:t>THREAT VECTOR: EXPOSED UNIX SOCKETS</a:t>
             </a:r>
           </a:p>
           <a:p>
             <a:pPr>
               <a:spcAft>
-                <a:spcPts val="800"/>
+                <a:spcPts val="600"/>
               </a:spcAft>
-              <a:defRPr sz="1100" b="1">
-                <a:solidFill>
-                  <a:srgbClr val="EAB308"/>
-                </a:solidFill>
-                <a:latin typeface="Calibri"/>
-              </a:defRPr>
-            </a:pPr>
-            <a:r>
-              <a:t>Hexa Force Remediation</a:t>
+              <a:defRPr sz="1300">
+                <a:solidFill>
+                  <a:srgbClr val="F1F5F9"/>
+                </a:solidFill>
+                <a:latin typeface="Arial"/>
+              </a:defRPr>
+            </a:pPr>
+            <a:r>
+              <a:t>• Continuous integration and monitoring agents often mount the host's Docker socket '/var/run/docker.sock' inside the container.</a:t>
             </a:r>
           </a:p>
           <a:p>
             <a:pPr>
               <a:spcAft>
-                <a:spcPts val="400"/>
+                <a:spcPts val="600"/>
               </a:spcAft>
-              <a:defRPr sz="1200">
-                <a:solidFill>
-                  <a:srgbClr val="94A3B8"/>
-                </a:solidFill>
-                <a:latin typeface="Calibri"/>
-              </a:defRPr>
-            </a:pPr>
-            <a:r>
-              <a:t>• Detection: Scan container mount definitions for docker.sock references.</a:t>
-            </a:r>
-          </a:p>
+              <a:defRPr sz="1300">
+                <a:solidFill>
+                  <a:srgbClr val="F1F5F9"/>
+                </a:solidFill>
+                <a:latin typeface="Arial"/>
+              </a:defRPr>
+            </a:pPr>
+            <a:r>
+              <a:t>• This provides the container process with a direct control channel to the host's physical Docker daemon.</a:t>
+            </a:r>
+          </a:p>
+        </p:txBody>
+      </p:sp>
+      <p:sp>
+        <p:nvSpPr>
+          <p:cNvPr id="6" name="Rectangle 5"/>
+          <p:cNvSpPr/>
+          <p:nvPr/>
+        </p:nvSpPr>
+        <p:spPr>
+          <a:xfrm>
+            <a:off x="6217920" y="1645920"/>
+            <a:ext cx="5120640" cy="4389120"/>
+          </a:xfrm>
+          <a:prstGeom prst="rect">
+            <a:avLst/>
+          </a:prstGeom>
+          <a:solidFill>
+            <a:srgbClr val="1E293B"/>
+          </a:solidFill>
+          <a:ln>
+            <a:noFill/>
+          </a:ln>
+        </p:spPr>
+        <p:style>
+          <a:lnRef idx="1">
+            <a:schemeClr val="accent1"/>
+          </a:lnRef>
+          <a:fillRef idx="3">
+            <a:schemeClr val="accent1"/>
+          </a:fillRef>
+          <a:effectRef idx="2">
+            <a:schemeClr val="accent1"/>
+          </a:effectRef>
+          <a:fontRef idx="minor">
+            <a:schemeClr val="lt1"/>
+          </a:fontRef>
+        </p:style>
+        <p:txBody>
+          <a:bodyPr rtlCol="0" anchor="ctr"/>
+          <a:lstStyle/>
+          <a:p>
+            <a:pPr algn="ctr"/>
+          </a:p>
+        </p:txBody>
+      </p:sp>
+      <p:sp>
+        <p:nvSpPr>
+          <p:cNvPr id="7" name="TextBox 6"/>
+          <p:cNvSpPr txBox="1"/>
+          <p:nvPr/>
+        </p:nvSpPr>
+        <p:spPr>
+          <a:xfrm>
+            <a:off x="6400800" y="1828800"/>
+            <a:ext cx="4754880" cy="4023360"/>
+          </a:xfrm>
+          <a:prstGeom prst="rect">
+            <a:avLst/>
+          </a:prstGeom>
+          <a:noFill/>
+        </p:spPr>
+        <p:txBody>
+          <a:bodyPr wrap="square" lIns="0" rIns="0" tIns="0" bIns="0">
+            <a:spAutoFit/>
+          </a:bodyPr>
+          <a:lstStyle/>
           <a:p>
             <a:pPr>
               <a:spcAft>
-                <a:spcPts val="400"/>
+                <a:spcPts val="1000"/>
               </a:spcAft>
-              <a:defRPr sz="1200">
-                <a:solidFill>
-                  <a:srgbClr val="94A3B8"/>
-                </a:solidFill>
-                <a:latin typeface="Calibri"/>
-              </a:defRPr>
-            </a:pPr>
-            <a:r>
-              <a:t>• Detection: Implement runtime filters (e.g. Falco) to log raw curl queries to sockets.</a:t>
+              <a:defRPr sz="1300" b="1">
+                <a:solidFill>
+                  <a:srgbClr val="2563EB"/>
+                </a:solidFill>
+                <a:latin typeface="Arial"/>
+              </a:defRPr>
+            </a:pPr>
+            <a:r>
+              <a:t>COMMAND EXECUTION</a:t>
             </a:r>
           </a:p>
           <a:p>
             <a:pPr>
               <a:spcAft>
-                <a:spcPts val="400"/>
+                <a:spcPts val="600"/>
               </a:spcAft>
-              <a:defRPr sz="1200">
-                <a:solidFill>
-                  <a:srgbClr val="94A3B8"/>
-                </a:solidFill>
-                <a:latin typeface="Calibri"/>
-              </a:defRPr>
-            </a:pPr>
-            <a:r>
-              <a:t>• Mitigation: Prohibit socket mounts in unprivileged workloads.</a:t>
+              <a:defRPr sz="1300">
+                <a:solidFill>
+                  <a:srgbClr val="F1F5F9"/>
+                </a:solidFill>
+                <a:latin typeface="Arial"/>
+              </a:defRPr>
+            </a:pPr>
+            <a:r>
+              <a:t>• Since the attacker is now root inside the container, they gain read/write permissions to the mounted socket.</a:t>
             </a:r>
           </a:p>
           <a:p>
             <a:pPr>
               <a:spcAft>
-                <a:spcPts val="400"/>
+                <a:spcPts val="600"/>
               </a:spcAft>
-              <a:defRPr sz="1200">
-                <a:solidFill>
-                  <a:srgbClr val="94A3B8"/>
-                </a:solidFill>
-                <a:latin typeface="Calibri"/>
-              </a:defRPr>
-            </a:pPr>
-            <a:r>
-              <a:t>• Mitigation: Run Docker in Rootless Mode so the daemon has no host root power.</a:t>
+              <a:defRPr sz="1300">
+                <a:solidFill>
+                  <a:srgbClr val="F1F5F9"/>
+                </a:solidFill>
+                <a:latin typeface="Arial"/>
+              </a:defRPr>
+            </a:pPr>
+            <a:r>
+              <a:t>• The attacker issues direct Docker API curl commands to the daemon.</a:t>
+            </a:r>
+          </a:p>
+          <a:p>
+            <a:pPr>
+              <a:spcAft>
+                <a:spcPts val="600"/>
+              </a:spcAft>
+              <a:defRPr sz="1300">
+                <a:solidFill>
+                  <a:srgbClr val="F1F5F9"/>
+                </a:solidFill>
+                <a:latin typeface="Arial"/>
+              </a:defRPr>
+            </a:pPr>
+            <a:r>
+              <a:t>• They command the host to pull external images and instantiate new containers.</a:t>
             </a:r>
           </a:p>
         </p:txBody>
@@ -6322,8 +7305,8 @@
         </p:nvSpPr>
         <p:spPr>
           <a:xfrm>
-            <a:off x="731520" y="365760"/>
-            <a:ext cx="10698480" cy="274320"/>
+            <a:off x="685800" y="365760"/>
+            <a:ext cx="10817352" cy="274320"/>
           </a:xfrm>
           <a:prstGeom prst="rect">
             <a:avLst/>
@@ -6337,15 +7320,15 @@
           <a:lstStyle/>
           <a:p>
             <a:pPr>
-              <a:defRPr sz="1000" b="1">
-                <a:solidFill>
-                  <a:srgbClr val="06B6D4"/>
-                </a:solidFill>
-                <a:latin typeface="Trebuchet MS"/>
-              </a:defRPr>
-            </a:pPr>
-            <a:r>
-              <a:t>STAGE 4 WORKFLOW</a:t>
+              <a:defRPr sz="950" b="1">
+                <a:solidFill>
+                  <a:srgbClr val="2563EB"/>
+                </a:solidFill>
+                <a:latin typeface="Arial"/>
+              </a:defRPr>
+            </a:pPr>
+            <a:r>
+              <a:t>HEXA FORCE CONTAINER SECURITY SERIES</a:t>
             </a:r>
           </a:p>
         </p:txBody>
@@ -6358,8 +7341,8 @@
         </p:nvSpPr>
         <p:spPr>
           <a:xfrm>
-            <a:off x="731520" y="548640"/>
-            <a:ext cx="10698480" cy="731520"/>
+            <a:off x="685800" y="594360"/>
+            <a:ext cx="10817352" cy="731520"/>
           </a:xfrm>
           <a:prstGeom prst="rect">
             <a:avLst/>
@@ -6373,11 +7356,11 @@
           <a:lstStyle/>
           <a:p>
             <a:pPr>
-              <a:defRPr sz="2600" b="1">
+              <a:defRPr sz="2800" b="1">
                 <a:solidFill>
                   <a:srgbClr val="FFFFFF"/>
                 </a:solidFill>
-                <a:latin typeface="Trebuchet MS"/>
+                <a:latin typeface="Arial"/>
               </a:defRPr>
             </a:pPr>
             <a:r>
@@ -6388,181 +7371,14 @@
       </p:sp>
       <p:sp>
         <p:nvSpPr>
-          <p:cNvPr id="4" name="TextBox 3"/>
-          <p:cNvSpPr txBox="1"/>
-          <p:nvPr/>
-        </p:nvSpPr>
-        <p:spPr>
-          <a:xfrm>
-            <a:off x="731520" y="1645920"/>
-            <a:ext cx="5486400" cy="4572000"/>
-          </a:xfrm>
-          <a:prstGeom prst="rect">
-            <a:avLst/>
-          </a:prstGeom>
-          <a:noFill/>
-        </p:spPr>
-        <p:txBody>
-          <a:bodyPr wrap="square" lIns="0" rIns="0" tIns="0" bIns="0">
-            <a:spAutoFit/>
-          </a:bodyPr>
-          <a:lstStyle/>
-          <a:p>
-            <a:pPr>
-              <a:spcAft>
-                <a:spcPts val="1000"/>
-              </a:spcAft>
-              <a:defRPr sz="1500" b="1">
-                <a:solidFill>
-                  <a:srgbClr val="FFFFFF"/>
-                </a:solidFill>
-                <a:latin typeface="Calibri"/>
-              </a:defRPr>
-            </a:pPr>
-            <a:r>
-              <a:t>•  Exploit Concept (Writable Mounts)</a:t>
-            </a:r>
-          </a:p>
-          <a:p>
-            <a:pPr>
-              <a:spcAft>
-                <a:spcPts val="1000"/>
-              </a:spcAft>
-              <a:defRPr sz="1400">
-                <a:solidFill>
-                  <a:srgbClr val="94A3B8"/>
-                </a:solidFill>
-                <a:latin typeface="Calibri"/>
-              </a:defRPr>
-            </a:pPr>
-            <a:r>
-              <a:t>   •  Writable host directory mounts allow guess writes to local system files.</a:t>
-            </a:r>
-          </a:p>
-          <a:p>
-            <a:pPr>
-              <a:spcAft>
-                <a:spcPts val="1000"/>
-              </a:spcAft>
-              <a:defRPr sz="1400">
-                <a:solidFill>
-                  <a:srgbClr val="94A3B8"/>
-                </a:solidFill>
-                <a:latin typeface="Calibri"/>
-              </a:defRPr>
-            </a:pPr>
-            <a:r>
-              <a:t>   •  Compromised container writes scheduled tasks to host cron folders.</a:t>
-            </a:r>
-          </a:p>
-          <a:p>
-            <a:pPr>
-              <a:spcAft>
-                <a:spcPts val="1000"/>
-              </a:spcAft>
-              <a:defRPr sz="1500" b="1">
-                <a:solidFill>
-                  <a:srgbClr val="EF4444"/>
-                </a:solidFill>
-                <a:latin typeface="Calibri"/>
-              </a:defRPr>
-            </a:pPr>
-            <a:r>
-              <a:t>🔴  Cron Injection Attack</a:t>
-            </a:r>
-          </a:p>
-          <a:p>
-            <a:pPr>
-              <a:spcAft>
-                <a:spcPts val="1000"/>
-              </a:spcAft>
-              <a:defRPr sz="1400">
-                <a:solidFill>
-                  <a:srgbClr val="94A3B8"/>
-                </a:solidFill>
-                <a:latin typeface="Calibri"/>
-              </a:defRPr>
-            </a:pPr>
-            <a:r>
-              <a:t>   •  Simulates attempts to write reverse shell scripts to /mnt/host/etc/cron.d.</a:t>
-            </a:r>
-          </a:p>
-          <a:p>
-            <a:pPr>
-              <a:spcAft>
-                <a:spcPts val="1000"/>
-              </a:spcAft>
-              <a:defRPr sz="1400">
-                <a:solidFill>
-                  <a:srgbClr val="94A3B8"/>
-                </a:solidFill>
-                <a:latin typeface="Calibri"/>
-              </a:defRPr>
-            </a:pPr>
-            <a:r>
-              <a:t>   •  On success, the host runs the arbitrary script as root in 60s.</a:t>
-            </a:r>
-          </a:p>
-          <a:p>
-            <a:pPr>
-              <a:spcAft>
-                <a:spcPts val="1000"/>
-              </a:spcAft>
-              <a:defRPr sz="1500" b="1">
-                <a:solidFill>
-                  <a:srgbClr val="22C55E"/>
-                </a:solidFill>
-                <a:latin typeface="Calibri"/>
-              </a:defRPr>
-            </a:pPr>
-            <a:r>
-              <a:t>🟢  Read-Only Constraints</a:t>
-            </a:r>
-          </a:p>
-          <a:p>
-            <a:pPr>
-              <a:spcAft>
-                <a:spcPts val="1000"/>
-              </a:spcAft>
-              <a:defRPr sz="1400">
-                <a:solidFill>
-                  <a:srgbClr val="94A3B8"/>
-                </a:solidFill>
-                <a:latin typeface="Calibri"/>
-              </a:defRPr>
-            </a:pPr>
-            <a:r>
-              <a:t>   •  Mount is configured as read-only, returning 'Permission Denied' blocks.</a:t>
-            </a:r>
-          </a:p>
-          <a:p>
-            <a:pPr>
-              <a:spcAft>
-                <a:spcPts val="1000"/>
-              </a:spcAft>
-              <a:defRPr sz="1400">
-                <a:solidFill>
-                  <a:srgbClr val="94A3B8"/>
-                </a:solidFill>
-                <a:latin typeface="Calibri"/>
-              </a:defRPr>
-            </a:pPr>
-            <a:r>
-              <a:t>   •  Verifies that read-only volumes perfectly contain directory traversals.</a:t>
-            </a:r>
-          </a:p>
-        </p:txBody>
-      </p:sp>
-      <p:sp>
-        <p:nvSpPr>
-          <p:cNvPr id="5" name="Rectangle 4"/>
+          <p:cNvPr id="4" name="Rectangle 3"/>
           <p:cNvSpPr/>
           <p:nvPr/>
         </p:nvSpPr>
         <p:spPr>
           <a:xfrm>
-            <a:off x="6583680" y="1645920"/>
-            <a:ext cx="4846320" cy="4389120"/>
+            <a:off x="685800" y="1645920"/>
+            <a:ext cx="5120640" cy="4389120"/>
           </a:xfrm>
           <a:prstGeom prst="rect">
             <a:avLst/>
@@ -6570,10 +7386,8 @@
           <a:solidFill>
             <a:srgbClr val="1E293B"/>
           </a:solidFill>
-          <a:ln w="19050">
-            <a:solidFill>
-              <a:srgbClr val="22C55E"/>
-            </a:solidFill>
+          <a:ln>
+            <a:noFill/>
           </a:ln>
         </p:spPr>
         <p:style>
@@ -6591,102 +7405,226 @@
           </a:fontRef>
         </p:style>
         <p:txBody>
-          <a:bodyPr rtlCol="0" anchor="ctr" wrap="square" lIns="182880" rIns="182880" tIns="182880" bIns="182880"/>
-          <a:lstStyle/>
-          <a:p>
-            <a:pPr algn="ctr">
+          <a:bodyPr rtlCol="0" anchor="ctr"/>
+          <a:lstStyle/>
+          <a:p>
+            <a:pPr algn="ctr"/>
+          </a:p>
+        </p:txBody>
+      </p:sp>
+      <p:sp>
+        <p:nvSpPr>
+          <p:cNvPr id="5" name="TextBox 4"/>
+          <p:cNvSpPr txBox="1"/>
+          <p:nvPr/>
+        </p:nvSpPr>
+        <p:spPr>
+          <a:xfrm>
+            <a:off x="868680" y="1828800"/>
+            <a:ext cx="4754880" cy="4023360"/>
+          </a:xfrm>
+          <a:prstGeom prst="rect">
+            <a:avLst/>
+          </a:prstGeom>
+          <a:noFill/>
+        </p:spPr>
+        <p:txBody>
+          <a:bodyPr wrap="square" lIns="0" rIns="0" tIns="0" bIns="0">
+            <a:spAutoFit/>
+          </a:bodyPr>
+          <a:lstStyle/>
+          <a:p>
+            <a:pPr>
               <a:spcAft>
-                <a:spcPts val="400"/>
+                <a:spcPts val="1000"/>
               </a:spcAft>
-              <a:defRPr sz="1400" b="1">
-                <a:solidFill>
-                  <a:srgbClr val="FFFFFF"/>
-                </a:solidFill>
-                <a:latin typeface="Trebuchet MS"/>
-              </a:defRPr>
-            </a:pPr>
-            <a:r>
-              <a:t>DETECTION &amp; MITIGATION BLUEPRINT</a:t>
+              <a:defRPr sz="1300" b="1">
+                <a:solidFill>
+                  <a:srgbClr val="2563EB"/>
+                </a:solidFill>
+                <a:latin typeface="Arial"/>
+              </a:defRPr>
+            </a:pPr>
+            <a:r>
+              <a:t>PHYSICAL BREAKOUT VECTOR</a:t>
             </a:r>
           </a:p>
           <a:p>
             <a:pPr>
               <a:spcAft>
-                <a:spcPts val="800"/>
+                <a:spcPts val="600"/>
               </a:spcAft>
-              <a:defRPr sz="1100" b="1">
-                <a:solidFill>
-                  <a:srgbClr val="22C55E"/>
-                </a:solidFill>
-                <a:latin typeface="Calibri"/>
-              </a:defRPr>
-            </a:pPr>
-            <a:r>
-              <a:t>Hexa Force Remediation</a:t>
+              <a:defRPr sz="1300">
+                <a:solidFill>
+                  <a:srgbClr val="F1F5F9"/>
+                </a:solidFill>
+                <a:latin typeface="Arial"/>
+              </a:defRPr>
+            </a:pPr>
+            <a:r>
+              <a:t>• Using the exposed Docker socket, the attacker spawns a new privileged container on the host.</a:t>
             </a:r>
           </a:p>
           <a:p>
             <a:pPr>
               <a:spcAft>
-                <a:spcPts val="400"/>
+                <a:spcPts val="600"/>
               </a:spcAft>
-              <a:defRPr sz="1200">
-                <a:solidFill>
-                  <a:srgbClr val="94A3B8"/>
-                </a:solidFill>
-                <a:latin typeface="Calibri"/>
-              </a:defRPr>
-            </a:pPr>
-            <a:r>
-              <a:t>• Detection: Configure File Integrity Monitoring (FIM) on host /etc/cron* directories.</a:t>
+              <a:defRPr sz="1300">
+                <a:solidFill>
+                  <a:srgbClr val="F1F5F9"/>
+                </a:solidFill>
+                <a:latin typeface="Arial"/>
+              </a:defRPr>
+            </a:pPr>
+            <a:r>
+              <a:t>• Configuration: The host's physical root filesystem ('/') is mounted directly to '/mnt/host' inside the container.</a:t>
             </a:r>
           </a:p>
           <a:p>
             <a:pPr>
               <a:spcAft>
-                <a:spcPts val="400"/>
+                <a:spcPts val="600"/>
               </a:spcAft>
-              <a:defRPr sz="1200">
-                <a:solidFill>
-                  <a:srgbClr val="94A3B8"/>
-                </a:solidFill>
-                <a:latin typeface="Calibri"/>
-              </a:defRPr>
-            </a:pPr>
-            <a:r>
-              <a:t>• Detection: Set up auditd rules to log write activity on host cron folders.</a:t>
-            </a:r>
-          </a:p>
+              <a:defRPr sz="1300">
+                <a:solidFill>
+                  <a:srgbClr val="F1F5F9"/>
+                </a:solidFill>
+                <a:latin typeface="Arial"/>
+              </a:defRPr>
+            </a:pPr>
+            <a:r>
+              <a:t>• The attacker now has write permissions to all physical host files.</a:t>
+            </a:r>
+          </a:p>
+        </p:txBody>
+      </p:sp>
+      <p:sp>
+        <p:nvSpPr>
+          <p:cNvPr id="6" name="Rectangle 5"/>
+          <p:cNvSpPr/>
+          <p:nvPr/>
+        </p:nvSpPr>
+        <p:spPr>
+          <a:xfrm>
+            <a:off x="6217920" y="1645920"/>
+            <a:ext cx="5120640" cy="4389120"/>
+          </a:xfrm>
+          <a:prstGeom prst="rect">
+            <a:avLst/>
+          </a:prstGeom>
+          <a:solidFill>
+            <a:srgbClr val="1E293B"/>
+          </a:solidFill>
+          <a:ln>
+            <a:noFill/>
+          </a:ln>
+        </p:spPr>
+        <p:style>
+          <a:lnRef idx="1">
+            <a:schemeClr val="accent1"/>
+          </a:lnRef>
+          <a:fillRef idx="3">
+            <a:schemeClr val="accent1"/>
+          </a:fillRef>
+          <a:effectRef idx="2">
+            <a:schemeClr val="accent1"/>
+          </a:effectRef>
+          <a:fontRef idx="minor">
+            <a:schemeClr val="lt1"/>
+          </a:fontRef>
+        </p:style>
+        <p:txBody>
+          <a:bodyPr rtlCol="0" anchor="ctr"/>
+          <a:lstStyle/>
+          <a:p>
+            <a:pPr algn="ctr"/>
+          </a:p>
+        </p:txBody>
+      </p:sp>
+      <p:sp>
+        <p:nvSpPr>
+          <p:cNvPr id="7" name="TextBox 6"/>
+          <p:cNvSpPr txBox="1"/>
+          <p:nvPr/>
+        </p:nvSpPr>
+        <p:spPr>
+          <a:xfrm>
+            <a:off x="6400800" y="1828800"/>
+            <a:ext cx="4754880" cy="4023360"/>
+          </a:xfrm>
+          <a:prstGeom prst="rect">
+            <a:avLst/>
+          </a:prstGeom>
+          <a:noFill/>
+        </p:spPr>
+        <p:txBody>
+          <a:bodyPr wrap="square" lIns="0" rIns="0" tIns="0" bIns="0">
+            <a:spAutoFit/>
+          </a:bodyPr>
+          <a:lstStyle/>
           <a:p>
             <a:pPr>
               <a:spcAft>
-                <a:spcPts val="400"/>
+                <a:spcPts val="1000"/>
               </a:spcAft>
-              <a:defRPr sz="1200">
-                <a:solidFill>
-                  <a:srgbClr val="94A3B8"/>
-                </a:solidFill>
-                <a:latin typeface="Calibri"/>
-              </a:defRPr>
-            </a:pPr>
-            <a:r>
-              <a:t>• Mitigation: Always mount host directories strictly as read-only (:ro).</a:t>
+              <a:defRPr sz="1300" b="1">
+                <a:solidFill>
+                  <a:srgbClr val="2563EB"/>
+                </a:solidFill>
+                <a:latin typeface="Arial"/>
+              </a:defRPr>
+            </a:pPr>
+            <a:r>
+              <a:t>HOST TAKEOVER &amp; PERSISTENCE</a:t>
             </a:r>
           </a:p>
           <a:p>
             <a:pPr>
               <a:spcAft>
-                <a:spcPts val="400"/>
+                <a:spcPts val="600"/>
               </a:spcAft>
-              <a:defRPr sz="1200">
-                <a:solidFill>
-                  <a:srgbClr val="94A3B8"/>
-                </a:solidFill>
-                <a:latin typeface="Calibri"/>
-              </a:defRPr>
-            </a:pPr>
-            <a:r>
-              <a:t>• Mitigation: Avoid mounting root directories (/etc, /var/run, /root) into containers.</a:t>
+              <a:defRPr sz="1300">
+                <a:solidFill>
+                  <a:srgbClr val="F1F5F9"/>
+                </a:solidFill>
+                <a:latin typeface="Arial"/>
+              </a:defRPr>
+            </a:pPr>
+            <a:r>
+              <a:t>• The attacker navigates into '/mnt/host/etc/cron.d' and injects a custom cron job.</a:t>
+            </a:r>
+          </a:p>
+          <a:p>
+            <a:pPr>
+              <a:spcAft>
+                <a:spcPts val="600"/>
+              </a:spcAft>
+              <a:defRPr sz="1300">
+                <a:solidFill>
+                  <a:srgbClr val="F1F5F9"/>
+                </a:solidFill>
+                <a:latin typeface="Arial"/>
+              </a:defRPr>
+            </a:pPr>
+            <a:r>
+              <a:t>• The cron job triggers a root-privileged reverse shell back to the attack system.</a:t>
+            </a:r>
+          </a:p>
+          <a:p>
+            <a:pPr>
+              <a:spcAft>
+                <a:spcPts val="600"/>
+              </a:spcAft>
+              <a:defRPr sz="1300">
+                <a:solidFill>
+                  <a:srgbClr val="F1F5F9"/>
+                </a:solidFill>
+                <a:latin typeface="Arial"/>
+              </a:defRPr>
+            </a:pPr>
+            <a:r>
+              <a:t>• Physical host takeover is complete, establishing a persistent footprint on the node.</a:t>
             </a:r>
           </a:p>
         </p:txBody>
@@ -6725,8 +7663,8 @@
         </p:nvSpPr>
         <p:spPr>
           <a:xfrm>
-            <a:off x="731520" y="365760"/>
-            <a:ext cx="10698480" cy="274320"/>
+            <a:off x="685800" y="365760"/>
+            <a:ext cx="10817352" cy="274320"/>
           </a:xfrm>
           <a:prstGeom prst="rect">
             <a:avLst/>
@@ -6740,15 +7678,15 @@
           <a:lstStyle/>
           <a:p>
             <a:pPr>
-              <a:defRPr sz="1000" b="1">
-                <a:solidFill>
-                  <a:srgbClr val="06B6D4"/>
-                </a:solidFill>
-                <a:latin typeface="Trebuchet MS"/>
-              </a:defRPr>
-            </a:pPr>
-            <a:r>
-              <a:t>SUPPLY CHAIN INTEGRITY</a:t>
+              <a:defRPr sz="950" b="1">
+                <a:solidFill>
+                  <a:srgbClr val="2563EB"/>
+                </a:solidFill>
+                <a:latin typeface="Arial"/>
+              </a:defRPr>
+            </a:pPr>
+            <a:r>
+              <a:t>HEXA FORCE CONTAINER SECURITY SERIES</a:t>
             </a:r>
           </a:p>
         </p:txBody>
@@ -6761,8 +7699,8 @@
         </p:nvSpPr>
         <p:spPr>
           <a:xfrm>
-            <a:off x="731520" y="548640"/>
-            <a:ext cx="10698480" cy="731520"/>
+            <a:off x="685800" y="594360"/>
+            <a:ext cx="10817352" cy="731520"/>
           </a:xfrm>
           <a:prstGeom prst="rect">
             <a:avLst/>
@@ -6776,11 +7714,11 @@
           <a:lstStyle/>
           <a:p>
             <a:pPr>
-              <a:defRPr sz="2600" b="1">
+              <a:defRPr sz="2800" b="1">
                 <a:solidFill>
                   <a:srgbClr val="FFFFFF"/>
                 </a:solidFill>
-                <a:latin typeface="Trebuchet MS"/>
+                <a:latin typeface="Arial"/>
               </a:defRPr>
             </a:pPr>
             <a:r>
@@ -6791,181 +7729,14 @@
       </p:sp>
       <p:sp>
         <p:nvSpPr>
-          <p:cNvPr id="4" name="TextBox 3"/>
-          <p:cNvSpPr txBox="1"/>
-          <p:nvPr/>
-        </p:nvSpPr>
-        <p:spPr>
-          <a:xfrm>
-            <a:off x="731520" y="1645920"/>
-            <a:ext cx="5486400" cy="4572000"/>
-          </a:xfrm>
-          <a:prstGeom prst="rect">
-            <a:avLst/>
-          </a:prstGeom>
-          <a:noFill/>
-        </p:spPr>
-        <p:txBody>
-          <a:bodyPr wrap="square" lIns="0" rIns="0" tIns="0" bIns="0">
-            <a:spAutoFit/>
-          </a:bodyPr>
-          <a:lstStyle/>
-          <a:p>
-            <a:pPr>
-              <a:spcAft>
-                <a:spcPts val="1000"/>
-              </a:spcAft>
-              <a:defRPr sz="1500" b="1">
-                <a:solidFill>
-                  <a:srgbClr val="FFFFFF"/>
-                </a:solidFill>
-                <a:latin typeface="Calibri"/>
-              </a:defRPr>
-            </a:pPr>
-            <a:r>
-              <a:t>•  Secure Supply Chain</a:t>
-            </a:r>
-          </a:p>
-          <a:p>
-            <a:pPr>
-              <a:spcAft>
-                <a:spcPts val="1000"/>
-              </a:spcAft>
-              <a:defRPr sz="1400">
-                <a:solidFill>
-                  <a:srgbClr val="94A3B8"/>
-                </a:solidFill>
-                <a:latin typeface="Calibri"/>
-              </a:defRPr>
-            </a:pPr>
-            <a:r>
-              <a:t>   •  Signatures protect against registry compromises, spoofing, and tagging attacks.</a:t>
-            </a:r>
-          </a:p>
-          <a:p>
-            <a:pPr>
-              <a:spcAft>
-                <a:spcPts val="1000"/>
-              </a:spcAft>
-              <a:defRPr sz="1400">
-                <a:solidFill>
-                  <a:srgbClr val="94A3B8"/>
-                </a:solidFill>
-                <a:latin typeface="Calibri"/>
-              </a:defRPr>
-            </a:pPr>
-            <a:r>
-              <a:t>   •  Verifies that only authorized, scanned images are executed in clusters.</a:t>
-            </a:r>
-          </a:p>
-          <a:p>
-            <a:pPr>
-              <a:spcAft>
-                <a:spcPts val="1000"/>
-              </a:spcAft>
-              <a:defRPr sz="1500" b="1">
-                <a:solidFill>
-                  <a:srgbClr val="06B6D4"/>
-                </a:solidFill>
-                <a:latin typeface="Calibri"/>
-              </a:defRPr>
-            </a:pPr>
-            <a:r>
-              <a:t>⚡  Keyless OIDC Authentication</a:t>
-            </a:r>
-          </a:p>
-          <a:p>
-            <a:pPr>
-              <a:spcAft>
-                <a:spcPts val="1000"/>
-              </a:spcAft>
-              <a:defRPr sz="1400">
-                <a:solidFill>
-                  <a:srgbClr val="94A3B8"/>
-                </a:solidFill>
-                <a:latin typeface="Calibri"/>
-              </a:defRPr>
-            </a:pPr>
-            <a:r>
-              <a:t>   •  Connects GitHub's OpenID Connect (OIDC) identity with Sigstore's CA (Fulcio).</a:t>
-            </a:r>
-          </a:p>
-          <a:p>
-            <a:pPr>
-              <a:spcAft>
-                <a:spcPts val="1000"/>
-              </a:spcAft>
-              <a:defRPr sz="1400">
-                <a:solidFill>
-                  <a:srgbClr val="94A3B8"/>
-                </a:solidFill>
-                <a:latin typeface="Calibri"/>
-              </a:defRPr>
-            </a:pPr>
-            <a:r>
-              <a:t>   •  Eliminates private key storage, rotation, and leakage risks entirely.</a:t>
-            </a:r>
-          </a:p>
-          <a:p>
-            <a:pPr>
-              <a:spcAft>
-                <a:spcPts val="1000"/>
-              </a:spcAft>
-              <a:defRPr sz="1500" b="1">
-                <a:solidFill>
-                  <a:srgbClr val="FFFFFF"/>
-                </a:solidFill>
-                <a:latin typeface="Calibri"/>
-              </a:defRPr>
-            </a:pPr>
-            <a:r>
-              <a:t>•  Short-Lived Certificates</a:t>
-            </a:r>
-          </a:p>
-          <a:p>
-            <a:pPr>
-              <a:spcAft>
-                <a:spcPts val="1000"/>
-              </a:spcAft>
-              <a:defRPr sz="1400">
-                <a:solidFill>
-                  <a:srgbClr val="94A3B8"/>
-                </a:solidFill>
-                <a:latin typeface="Calibri"/>
-              </a:defRPr>
-            </a:pPr>
-            <a:r>
-              <a:t>   •  Fulcio issues temporary 10-minute signing certificates based on runner JWTs.</a:t>
-            </a:r>
-          </a:p>
-          <a:p>
-            <a:pPr>
-              <a:spcAft>
-                <a:spcPts val="1000"/>
-              </a:spcAft>
-              <a:defRPr sz="1400">
-                <a:solidFill>
-                  <a:srgbClr val="94A3B8"/>
-                </a:solidFill>
-                <a:latin typeface="Calibri"/>
-              </a:defRPr>
-            </a:pPr>
-            <a:r>
-              <a:t>   •  The signature is pushed to the registry and verified keylessly using public APIs.</a:t>
-            </a:r>
-          </a:p>
-        </p:txBody>
-      </p:sp>
-      <p:sp>
-        <p:nvSpPr>
-          <p:cNvPr id="5" name="Rectangle 4"/>
+          <p:cNvPr id="4" name="Rectangle 3"/>
           <p:cNvSpPr/>
           <p:nvPr/>
         </p:nvSpPr>
         <p:spPr>
           <a:xfrm>
-            <a:off x="6583680" y="1645920"/>
-            <a:ext cx="4846320" cy="4389120"/>
+            <a:off x="685800" y="1645920"/>
+            <a:ext cx="5120640" cy="4389120"/>
           </a:xfrm>
           <a:prstGeom prst="rect">
             <a:avLst/>
@@ -6973,10 +7744,8 @@
           <a:solidFill>
             <a:srgbClr val="1E293B"/>
           </a:solidFill>
-          <a:ln w="19050">
-            <a:solidFill>
-              <a:srgbClr val="06B6D4"/>
-            </a:solidFill>
+          <a:ln>
+            <a:noFill/>
           </a:ln>
         </p:spPr>
         <p:style>
@@ -6994,118 +7763,212 @@
           </a:fontRef>
         </p:style>
         <p:txBody>
-          <a:bodyPr rtlCol="0" anchor="ctr" wrap="square" lIns="182880" rIns="182880" tIns="182880" bIns="182880"/>
-          <a:lstStyle/>
-          <a:p>
-            <a:pPr algn="ctr">
+          <a:bodyPr rtlCol="0" anchor="ctr"/>
+          <a:lstStyle/>
+          <a:p>
+            <a:pPr algn="ctr"/>
+          </a:p>
+        </p:txBody>
+      </p:sp>
+      <p:sp>
+        <p:nvSpPr>
+          <p:cNvPr id="5" name="TextBox 4"/>
+          <p:cNvSpPr txBox="1"/>
+          <p:nvPr/>
+        </p:nvSpPr>
+        <p:spPr>
+          <a:xfrm>
+            <a:off x="868680" y="1828800"/>
+            <a:ext cx="4754880" cy="4023360"/>
+          </a:xfrm>
+          <a:prstGeom prst="rect">
+            <a:avLst/>
+          </a:prstGeom>
+          <a:noFill/>
+        </p:spPr>
+        <p:txBody>
+          <a:bodyPr wrap="square" lIns="0" rIns="0" tIns="0" bIns="0">
+            <a:spAutoFit/>
+          </a:bodyPr>
+          <a:lstStyle/>
+          <a:p>
+            <a:pPr>
               <a:spcAft>
-                <a:spcPts val="400"/>
+                <a:spcPts val="1000"/>
               </a:spcAft>
-              <a:defRPr sz="1400" b="1">
-                <a:solidFill>
-                  <a:srgbClr val="FFFFFF"/>
-                </a:solidFill>
-                <a:latin typeface="Trebuchet MS"/>
-              </a:defRPr>
-            </a:pPr>
-            <a:r>
-              <a:t>OIDC CRYPTOGRAPHIC TRUST CHAIN</a:t>
+              <a:defRPr sz="1300" b="1">
+                <a:solidFill>
+                  <a:srgbClr val="2563EB"/>
+                </a:solidFill>
+                <a:latin typeface="Arial"/>
+              </a:defRPr>
+            </a:pPr>
+            <a:r>
+              <a:t>THE KEYLESS TRUST PARADIGM</a:t>
             </a:r>
           </a:p>
           <a:p>
             <a:pPr>
               <a:spcAft>
-                <a:spcPts val="800"/>
+                <a:spcPts val="600"/>
               </a:spcAft>
-              <a:defRPr sz="1100" b="1">
-                <a:solidFill>
-                  <a:srgbClr val="06B6D4"/>
-                </a:solidFill>
-                <a:latin typeface="Calibri"/>
-              </a:defRPr>
-            </a:pPr>
-            <a:r>
-              <a:t>Hexa Force Keyless signing</a:t>
+              <a:defRPr sz="1300">
+                <a:solidFill>
+                  <a:srgbClr val="F1F5F9"/>
+                </a:solidFill>
+                <a:latin typeface="Arial"/>
+              </a:defRPr>
+            </a:pPr>
+            <a:r>
+              <a:t>• Traditional container signing depends on managing sensitive private keys in CI/CD environments. If leaked, the entire supply chain falls.</a:t>
             </a:r>
           </a:p>
           <a:p>
             <a:pPr>
               <a:spcAft>
-                <a:spcPts val="400"/>
+                <a:spcPts val="600"/>
               </a:spcAft>
-              <a:defRPr sz="1200">
-                <a:solidFill>
-                  <a:srgbClr val="94A3B8"/>
-                </a:solidFill>
-                <a:latin typeface="Calibri"/>
-              </a:defRPr>
-            </a:pPr>
-            <a:r>
-              <a:t>• 1. Runner requests JWT from GitHub Actions identity provider.</a:t>
-            </a:r>
-          </a:p>
+              <a:defRPr sz="1300">
+                <a:solidFill>
+                  <a:srgbClr val="F1F5F9"/>
+                </a:solidFill>
+                <a:latin typeface="Arial"/>
+              </a:defRPr>
+            </a:pPr>
+            <a:r>
+              <a:t>• Hexa Force implements modern keyless signing via Sigstore/Cosign, eliminating key storage.</a:t>
+            </a:r>
+          </a:p>
+        </p:txBody>
+      </p:sp>
+      <p:sp>
+        <p:nvSpPr>
+          <p:cNvPr id="6" name="Rectangle 5"/>
+          <p:cNvSpPr/>
+          <p:nvPr/>
+        </p:nvSpPr>
+        <p:spPr>
+          <a:xfrm>
+            <a:off x="6217920" y="1645920"/>
+            <a:ext cx="5120640" cy="4389120"/>
+          </a:xfrm>
+          <a:prstGeom prst="rect">
+            <a:avLst/>
+          </a:prstGeom>
+          <a:solidFill>
+            <a:srgbClr val="1E293B"/>
+          </a:solidFill>
+          <a:ln w="19050">
+            <a:solidFill>
+              <a:srgbClr val="10B981"/>
+            </a:solidFill>
+          </a:ln>
+        </p:spPr>
+        <p:style>
+          <a:lnRef idx="1">
+            <a:schemeClr val="accent1"/>
+          </a:lnRef>
+          <a:fillRef idx="3">
+            <a:schemeClr val="accent1"/>
+          </a:fillRef>
+          <a:effectRef idx="2">
+            <a:schemeClr val="accent1"/>
+          </a:effectRef>
+          <a:fontRef idx="minor">
+            <a:schemeClr val="lt1"/>
+          </a:fontRef>
+        </p:style>
+        <p:txBody>
+          <a:bodyPr rtlCol="0" anchor="ctr"/>
+          <a:lstStyle/>
+          <a:p>
+            <a:pPr algn="ctr"/>
+          </a:p>
+        </p:txBody>
+      </p:sp>
+      <p:sp>
+        <p:nvSpPr>
+          <p:cNvPr id="7" name="TextBox 6"/>
+          <p:cNvSpPr txBox="1"/>
+          <p:nvPr/>
+        </p:nvSpPr>
+        <p:spPr>
+          <a:xfrm>
+            <a:off x="6400800" y="1828800"/>
+            <a:ext cx="4754880" cy="4023360"/>
+          </a:xfrm>
+          <a:prstGeom prst="rect">
+            <a:avLst/>
+          </a:prstGeom>
+          <a:noFill/>
+        </p:spPr>
+        <p:txBody>
+          <a:bodyPr wrap="square" lIns="0" rIns="0" tIns="0" bIns="0">
+            <a:spAutoFit/>
+          </a:bodyPr>
+          <a:lstStyle/>
           <a:p>
             <a:pPr>
               <a:spcAft>
-                <a:spcPts val="400"/>
+                <a:spcPts val="1000"/>
               </a:spcAft>
-              <a:defRPr sz="1200">
-                <a:solidFill>
-                  <a:srgbClr val="94A3B8"/>
-                </a:solidFill>
-                <a:latin typeface="Calibri"/>
-              </a:defRPr>
-            </a:pPr>
-            <a:r>
-              <a:t>• 2. Presents JWT token to Sigstore's certificate authority.</a:t>
+              <a:defRPr sz="1300" b="1">
+                <a:solidFill>
+                  <a:srgbClr val="10B981"/>
+                </a:solidFill>
+                <a:latin typeface="Arial"/>
+              </a:defRPr>
+            </a:pPr>
+            <a:r>
+              <a:t>CRYPTOGRAPHIC ARCHITECTURE</a:t>
             </a:r>
           </a:p>
           <a:p>
             <a:pPr>
               <a:spcAft>
-                <a:spcPts val="400"/>
+                <a:spcPts val="600"/>
               </a:spcAft>
-              <a:defRPr sz="1200">
-                <a:solidFill>
-                  <a:srgbClr val="94A3B8"/>
-                </a:solidFill>
-                <a:latin typeface="Calibri"/>
-              </a:defRPr>
-            </a:pPr>
-            <a:r>
-              <a:t>• 3. Sigstore verifies GHA identity and generates short-lived cert.</a:t>
+              <a:defRPr sz="1300">
+                <a:solidFill>
+                  <a:srgbClr val="F1F5F9"/>
+                </a:solidFill>
+                <a:latin typeface="Arial"/>
+              </a:defRPr>
+            </a:pPr>
+            <a:r>
+              <a:t>• The runner requests a short-lived X.509 certificate from the Fulcio Certificate Authority.</a:t>
             </a:r>
           </a:p>
           <a:p>
             <a:pPr>
               <a:spcAft>
-                <a:spcPts val="400"/>
+                <a:spcPts val="600"/>
               </a:spcAft>
-              <a:defRPr sz="1200">
-                <a:solidFill>
-                  <a:srgbClr val="94A3B8"/>
-                </a:solidFill>
-                <a:latin typeface="Calibri"/>
-              </a:defRPr>
-            </a:pPr>
-            <a:r>
-              <a:t>• 4. Image is cryptographically signed and signature pushed to GHCR.</a:t>
+              <a:defRPr sz="1300">
+                <a:solidFill>
+                  <a:srgbClr val="F1F5F9"/>
+                </a:solidFill>
+                <a:latin typeface="Arial"/>
+              </a:defRPr>
+            </a:pPr>
+            <a:r>
+              <a:t>• Authentication is federated using an OpenID Connect (OIDC) identity token issued by GitHub Actions.</a:t>
             </a:r>
           </a:p>
           <a:p>
             <a:pPr>
               <a:spcAft>
-                <a:spcPts val="400"/>
+                <a:spcPts val="600"/>
               </a:spcAft>
-              <a:defRPr sz="1200">
-                <a:solidFill>
-                  <a:srgbClr val="94A3B8"/>
-                </a:solidFill>
-                <a:latin typeface="Calibri"/>
-              </a:defRPr>
-            </a:pPr>
-            <a:r>
-              <a:t>• 5. Runtimes verify authenticity keylessly using GitHub public APIs.</a:t>
+              <a:defRPr sz="1300">
+                <a:solidFill>
+                  <a:srgbClr val="F1F5F9"/>
+                </a:solidFill>
+                <a:latin typeface="Arial"/>
+              </a:defRPr>
+            </a:pPr>
+            <a:r>
+              <a:t>• Signatures are logged in the immutable Rekor public transparency ledger.</a:t>
             </a:r>
           </a:p>
         </p:txBody>
@@ -7144,8 +8007,8 @@
         </p:nvSpPr>
         <p:spPr>
           <a:xfrm>
-            <a:off x="731520" y="365760"/>
-            <a:ext cx="10698480" cy="274320"/>
+            <a:off x="685800" y="365760"/>
+            <a:ext cx="10817352" cy="274320"/>
           </a:xfrm>
           <a:prstGeom prst="rect">
             <a:avLst/>
@@ -7159,15 +8022,15 @@
           <a:lstStyle/>
           <a:p>
             <a:pPr>
-              <a:defRPr sz="1000" b="1">
-                <a:solidFill>
-                  <a:srgbClr val="06B6D4"/>
-                </a:solidFill>
-                <a:latin typeface="Trebuchet MS"/>
-              </a:defRPr>
-            </a:pPr>
-            <a:r>
-              <a:t>PIPELINE ORCHESTRATION</a:t>
+              <a:defRPr sz="950" b="1">
+                <a:solidFill>
+                  <a:srgbClr val="2563EB"/>
+                </a:solidFill>
+                <a:latin typeface="Arial"/>
+              </a:defRPr>
+            </a:pPr>
+            <a:r>
+              <a:t>HEXA FORCE CONTAINER SECURITY SERIES</a:t>
             </a:r>
           </a:p>
         </p:txBody>
@@ -7180,8 +8043,8 @@
         </p:nvSpPr>
         <p:spPr>
           <a:xfrm>
-            <a:off x="731520" y="548640"/>
-            <a:ext cx="10698480" cy="731520"/>
+            <a:off x="685800" y="594360"/>
+            <a:ext cx="10817352" cy="731520"/>
           </a:xfrm>
           <a:prstGeom prst="rect">
             <a:avLst/>
@@ -7195,11 +8058,11 @@
           <a:lstStyle/>
           <a:p>
             <a:pPr>
-              <a:defRPr sz="2600" b="1">
+              <a:defRPr sz="2800" b="1">
                 <a:solidFill>
                   <a:srgbClr val="FFFFFF"/>
                 </a:solidFill>
-                <a:latin typeface="Trebuchet MS"/>
+                <a:latin typeface="Arial"/>
               </a:defRPr>
             </a:pPr>
             <a:r>
@@ -7210,181 +8073,14 @@
       </p:sp>
       <p:sp>
         <p:nvSpPr>
-          <p:cNvPr id="4" name="TextBox 3"/>
-          <p:cNvSpPr txBox="1"/>
-          <p:nvPr/>
-        </p:nvSpPr>
-        <p:spPr>
-          <a:xfrm>
-            <a:off x="731520" y="1645920"/>
-            <a:ext cx="5486400" cy="4572000"/>
-          </a:xfrm>
-          <a:prstGeom prst="rect">
-            <a:avLst/>
-          </a:prstGeom>
-          <a:noFill/>
-        </p:spPr>
-        <p:txBody>
-          <a:bodyPr wrap="square" lIns="0" rIns="0" tIns="0" bIns="0">
-            <a:spAutoFit/>
-          </a:bodyPr>
-          <a:lstStyle/>
-          <a:p>
-            <a:pPr>
-              <a:spcAft>
-                <a:spcPts val="1000"/>
-              </a:spcAft>
-              <a:defRPr sz="1500" b="1">
-                <a:solidFill>
-                  <a:srgbClr val="FFFFFF"/>
-                </a:solidFill>
-                <a:latin typeface="Calibri"/>
-              </a:defRPr>
-            </a:pPr>
-            <a:r>
-              <a:t>•  DevSecOps Orchestration</a:t>
-            </a:r>
-          </a:p>
-          <a:p>
-            <a:pPr>
-              <a:spcAft>
-                <a:spcPts val="1000"/>
-              </a:spcAft>
-              <a:defRPr sz="1400">
-                <a:solidFill>
-                  <a:srgbClr val="94A3B8"/>
-                </a:solidFill>
-                <a:latin typeface="Calibri"/>
-              </a:defRPr>
-            </a:pPr>
-            <a:r>
-              <a:t>   •  Fully integrated using GitHub Actions workflow automations.</a:t>
-            </a:r>
-          </a:p>
-          <a:p>
-            <a:pPr>
-              <a:spcAft>
-                <a:spcPts val="1000"/>
-              </a:spcAft>
-              <a:defRPr sz="1400">
-                <a:solidFill>
-                  <a:srgbClr val="94A3B8"/>
-                </a:solidFill>
-                <a:latin typeface="Calibri"/>
-              </a:defRPr>
-            </a:pPr>
-            <a:r>
-              <a:t>   •  Builds, tags, logs in, signs, and executes lab stages on commit.</a:t>
-            </a:r>
-          </a:p>
-          <a:p>
-            <a:pPr>
-              <a:spcAft>
-                <a:spcPts val="1000"/>
-              </a:spcAft>
-              <a:defRPr sz="1500" b="1">
-                <a:solidFill>
-                  <a:srgbClr val="06B6D4"/>
-                </a:solidFill>
-                <a:latin typeface="Calibri"/>
-              </a:defRPr>
-            </a:pPr>
-            <a:r>
-              <a:t>⚡  Lowercase Tag Compliance</a:t>
-            </a:r>
-          </a:p>
-          <a:p>
-            <a:pPr>
-              <a:spcAft>
-                <a:spcPts val="1000"/>
-              </a:spcAft>
-              <a:defRPr sz="1400">
-                <a:solidFill>
-                  <a:srgbClr val="94A3B8"/>
-                </a:solidFill>
-                <a:latin typeface="Calibri"/>
-              </a:defRPr>
-            </a:pPr>
-            <a:r>
-              <a:t>   •  Enforces strict lowercase registry tags using shell string conversions.</a:t>
-            </a:r>
-          </a:p>
-          <a:p>
-            <a:pPr>
-              <a:spcAft>
-                <a:spcPts val="1000"/>
-              </a:spcAft>
-              <a:defRPr sz="1400">
-                <a:solidFill>
-                  <a:srgbClr val="94A3B8"/>
-                </a:solidFill>
-                <a:latin typeface="Calibri"/>
-              </a:defRPr>
-            </a:pPr>
-            <a:r>
-              <a:t>   •  Resolves Docker build case-sensitivity requirements automatically.</a:t>
-            </a:r>
-          </a:p>
-          <a:p>
-            <a:pPr>
-              <a:spcAft>
-                <a:spcPts val="1000"/>
-              </a:spcAft>
-              <a:defRPr sz="1500" b="1">
-                <a:solidFill>
-                  <a:srgbClr val="FFFFFF"/>
-                </a:solidFill>
-                <a:latin typeface="Calibri"/>
-              </a:defRPr>
-            </a:pPr>
-            <a:r>
-              <a:t>•  Fast Execution Loop</a:t>
-            </a:r>
-          </a:p>
-          <a:p>
-            <a:pPr>
-              <a:spcAft>
-                <a:spcPts val="1000"/>
-              </a:spcAft>
-              <a:defRPr sz="1400">
-                <a:solidFill>
-                  <a:srgbClr val="94A3B8"/>
-                </a:solidFill>
-                <a:latin typeface="Calibri"/>
-              </a:defRPr>
-            </a:pPr>
-            <a:r>
-              <a:t>   •  Optimizations reduce execution duration to under 50 seconds.</a:t>
-            </a:r>
-          </a:p>
-          <a:p>
-            <a:pPr>
-              <a:spcAft>
-                <a:spcPts val="1000"/>
-              </a:spcAft>
-              <a:defRPr sz="1400">
-                <a:solidFill>
-                  <a:srgbClr val="94A3B8"/>
-                </a:solidFill>
-                <a:latin typeface="Calibri"/>
-              </a:defRPr>
-            </a:pPr>
-            <a:r>
-              <a:t>   •  Provides instant DevSecOps regression security assessment feedback.</a:t>
-            </a:r>
-          </a:p>
-        </p:txBody>
-      </p:sp>
-      <p:sp>
-        <p:nvSpPr>
-          <p:cNvPr id="5" name="Rectangle 4"/>
+          <p:cNvPr id="4" name="Rectangle 3"/>
           <p:cNvSpPr/>
           <p:nvPr/>
         </p:nvSpPr>
         <p:spPr>
           <a:xfrm>
-            <a:off x="6583680" y="1645920"/>
-            <a:ext cx="4846320" cy="4389120"/>
+            <a:off x="685800" y="1645920"/>
+            <a:ext cx="5120640" cy="4389120"/>
           </a:xfrm>
           <a:prstGeom prst="rect">
             <a:avLst/>
@@ -7392,10 +8088,8 @@
           <a:solidFill>
             <a:srgbClr val="1E293B"/>
           </a:solidFill>
-          <a:ln w="12700">
-            <a:solidFill>
-              <a:srgbClr val="06B6D4"/>
-            </a:solidFill>
+          <a:ln>
+            <a:noFill/>
           </a:ln>
         </p:spPr>
         <p:style>
@@ -7413,301 +8107,226 @@
           </a:fontRef>
         </p:style>
         <p:txBody>
-          <a:bodyPr rtlCol="0" anchor="ctr" wrap="square" lIns="182880" rIns="182880" tIns="137160" bIns="137160"/>
-          <a:lstStyle/>
-          <a:p>
-            <a:pPr algn="l">
+          <a:bodyPr rtlCol="0" anchor="ctr"/>
+          <a:lstStyle/>
+          <a:p>
+            <a:pPr algn="ctr"/>
+          </a:p>
+        </p:txBody>
+      </p:sp>
+      <p:sp>
+        <p:nvSpPr>
+          <p:cNvPr id="5" name="TextBox 4"/>
+          <p:cNvSpPr txBox="1"/>
+          <p:nvPr/>
+        </p:nvSpPr>
+        <p:spPr>
+          <a:xfrm>
+            <a:off x="868680" y="1828800"/>
+            <a:ext cx="4754880" cy="4023360"/>
+          </a:xfrm>
+          <a:prstGeom prst="rect">
+            <a:avLst/>
+          </a:prstGeom>
+          <a:noFill/>
+        </p:spPr>
+        <p:txBody>
+          <a:bodyPr wrap="square" lIns="0" rIns="0" tIns="0" bIns="0">
+            <a:spAutoFit/>
+          </a:bodyPr>
+          <a:lstStyle/>
+          <a:p>
+            <a:pPr>
               <a:spcAft>
-                <a:spcPts val="200"/>
+                <a:spcPts val="1000"/>
               </a:spcAft>
-              <a:defRPr sz="950">
-                <a:solidFill>
-                  <a:srgbClr val="FFFFFF"/>
-                </a:solidFill>
-                <a:latin typeface="Consolas"/>
-              </a:defRPr>
-            </a:pPr>
-            <a:r>
-              <a:t># Set lowercase repository name for Docker/GHCR</a:t>
-            </a:r>
-          </a:p>
-          <a:p>
-            <a:pPr algn="l">
+              <a:defRPr sz="1300" b="1">
+                <a:solidFill>
+                  <a:srgbClr val="2563EB"/>
+                </a:solidFill>
+                <a:latin typeface="Arial"/>
+              </a:defRPr>
+            </a:pPr>
+            <a:r>
+              <a:t>AUTOMATED DEVSECOPS WORKFLOW</a:t>
+            </a:r>
+          </a:p>
+          <a:p>
+            <a:pPr>
               <a:spcAft>
-                <a:spcPts val="200"/>
+                <a:spcPts val="600"/>
               </a:spcAft>
-              <a:defRPr sz="950">
-                <a:solidFill>
-                  <a:srgbClr val="FFFFFF"/>
-                </a:solidFill>
-                <a:latin typeface="Consolas"/>
-              </a:defRPr>
-            </a:pPr>
-            <a:r>
-              <a:t>- name: Set lowercase repository name</a:t>
-            </a:r>
-          </a:p>
-          <a:p>
-            <a:pPr algn="l">
+              <a:defRPr sz="1300">
+                <a:solidFill>
+                  <a:srgbClr val="F1F5F9"/>
+                </a:solidFill>
+                <a:latin typeface="Arial"/>
+              </a:defRPr>
+            </a:pPr>
+            <a:r>
+              <a:t>• Source code push triggers the GitHub Actions workflow runner.</a:t>
+            </a:r>
+          </a:p>
+          <a:p>
+            <a:pPr>
               <a:spcAft>
-                <a:spcPts val="200"/>
+                <a:spcPts val="600"/>
               </a:spcAft>
-              <a:defRPr sz="950">
-                <a:solidFill>
-                  <a:srgbClr val="FFFFFF"/>
-                </a:solidFill>
-                <a:latin typeface="Consolas"/>
-              </a:defRPr>
-            </a:pPr>
-            <a:r>
-              <a:t>  run: |</a:t>
-            </a:r>
-          </a:p>
-          <a:p>
-            <a:pPr algn="l">
+              <a:defRPr sz="1300">
+                <a:solidFill>
+                  <a:srgbClr val="F1F5F9"/>
+                </a:solidFill>
+                <a:latin typeface="Arial"/>
+              </a:defRPr>
+            </a:pPr>
+            <a:r>
+              <a:t>• Docker image compiled and tagged dynamically with lowercase parameter expansion.</a:t>
+            </a:r>
+          </a:p>
+          <a:p>
+            <a:pPr>
               <a:spcAft>
-                <a:spcPts val="200"/>
+                <a:spcPts val="600"/>
               </a:spcAft>
-              <a:defRPr sz="950">
-                <a:solidFill>
-                  <a:srgbClr val="22C55E"/>
-                </a:solidFill>
-                <a:latin typeface="Consolas"/>
-              </a:defRPr>
-            </a:pPr>
-            <a:r>
-              <a:t>    echo "IMAGE_TAG=ghcr.io/${GITHUB_REPOSITORY,,}" &gt;&gt; ${GITHUB_ENV}</a:t>
-            </a:r>
-          </a:p>
-          <a:p>
-            <a:pPr algn="l">
+              <a:defRPr sz="1300">
+                <a:solidFill>
+                  <a:srgbClr val="F1F5F9"/>
+                </a:solidFill>
+                <a:latin typeface="Arial"/>
+              </a:defRPr>
+            </a:pPr>
+            <a:r>
+              <a:t>• Image pushed securely to the GitHub Container Registry (GHCR).</a:t>
+            </a:r>
+          </a:p>
+        </p:txBody>
+      </p:sp>
+      <p:sp>
+        <p:nvSpPr>
+          <p:cNvPr id="6" name="Rectangle 5"/>
+          <p:cNvSpPr/>
+          <p:nvPr/>
+        </p:nvSpPr>
+        <p:spPr>
+          <a:xfrm>
+            <a:off x="6217920" y="1645920"/>
+            <a:ext cx="5120640" cy="4389120"/>
+          </a:xfrm>
+          <a:prstGeom prst="rect">
+            <a:avLst/>
+          </a:prstGeom>
+          <a:solidFill>
+            <a:srgbClr val="1E293B"/>
+          </a:solidFill>
+          <a:ln>
+            <a:noFill/>
+          </a:ln>
+        </p:spPr>
+        <p:style>
+          <a:lnRef idx="1">
+            <a:schemeClr val="accent1"/>
+          </a:lnRef>
+          <a:fillRef idx="3">
+            <a:schemeClr val="accent1"/>
+          </a:fillRef>
+          <a:effectRef idx="2">
+            <a:schemeClr val="accent1"/>
+          </a:effectRef>
+          <a:fontRef idx="minor">
+            <a:schemeClr val="lt1"/>
+          </a:fontRef>
+        </p:style>
+        <p:txBody>
+          <a:bodyPr rtlCol="0" anchor="ctr"/>
+          <a:lstStyle/>
+          <a:p>
+            <a:pPr algn="ctr"/>
+          </a:p>
+        </p:txBody>
+      </p:sp>
+      <p:sp>
+        <p:nvSpPr>
+          <p:cNvPr id="7" name="TextBox 6"/>
+          <p:cNvSpPr txBox="1"/>
+          <p:nvPr/>
+        </p:nvSpPr>
+        <p:spPr>
+          <a:xfrm>
+            <a:off x="6400800" y="1828800"/>
+            <a:ext cx="4754880" cy="4023360"/>
+          </a:xfrm>
+          <a:prstGeom prst="rect">
+            <a:avLst/>
+          </a:prstGeom>
+          <a:noFill/>
+        </p:spPr>
+        <p:txBody>
+          <a:bodyPr wrap="square" lIns="0" rIns="0" tIns="0" bIns="0">
+            <a:spAutoFit/>
+          </a:bodyPr>
+          <a:lstStyle/>
+          <a:p>
+            <a:pPr>
               <a:spcAft>
-                <a:spcPts val="200"/>
+                <a:spcPts val="1000"/>
               </a:spcAft>
-              <a:defRPr sz="950">
-                <a:solidFill>
-                  <a:srgbClr val="FFFFFF"/>
-                </a:solidFill>
-                <a:latin typeface="Consolas"/>
-              </a:defRPr>
-            </a:pPr>
-          </a:p>
-          <a:p>
-            <a:pPr algn="l">
+              <a:defRPr sz="1300" b="1">
+                <a:solidFill>
+                  <a:srgbClr val="2563EB"/>
+                </a:solidFill>
+                <a:latin typeface="Arial"/>
+              </a:defRPr>
+            </a:pPr>
+            <a:r>
+              <a:t>AUTOMATED VERIFICATION GATES</a:t>
+            </a:r>
+          </a:p>
+          <a:p>
+            <a:pPr>
               <a:spcAft>
-                <a:spcPts val="200"/>
+                <a:spcPts val="600"/>
               </a:spcAft>
-              <a:defRPr sz="950">
-                <a:solidFill>
-                  <a:srgbClr val="FFFFFF"/>
-                </a:solidFill>
-                <a:latin typeface="Consolas"/>
-              </a:defRPr>
-            </a:pPr>
-            <a:r>
-              <a:t># Install Cosign (Sigstore)</a:t>
-            </a:r>
-          </a:p>
-          <a:p>
-            <a:pPr algn="l">
+              <a:defRPr sz="1300">
+                <a:solidFill>
+                  <a:srgbClr val="F1F5F9"/>
+                </a:solidFill>
+                <a:latin typeface="Arial"/>
+              </a:defRPr>
+            </a:pPr>
+            <a:r>
+              <a:t>• Immediate execution of Cosign keyless signing using the runner's OIDC identity.</a:t>
+            </a:r>
+          </a:p>
+          <a:p>
+            <a:pPr>
               <a:spcAft>
-                <a:spcPts val="200"/>
+                <a:spcPts val="600"/>
               </a:spcAft>
-              <a:defRPr sz="950">
-                <a:solidFill>
-                  <a:srgbClr val="FFFFFF"/>
-                </a:solidFill>
-                <a:latin typeface="Consolas"/>
-              </a:defRPr>
-            </a:pPr>
-            <a:r>
-              <a:t>- name: Install Cosign</a:t>
-            </a:r>
-          </a:p>
-          <a:p>
-            <a:pPr algn="l">
+              <a:defRPr sz="1300">
+                <a:solidFill>
+                  <a:srgbClr val="F1F5F9"/>
+                </a:solidFill>
+                <a:latin typeface="Arial"/>
+              </a:defRPr>
+            </a:pPr>
+            <a:r>
+              <a:t>• High-performance validation gates verify signatures during cluster deployment.</a:t>
+            </a:r>
+          </a:p>
+          <a:p>
+            <a:pPr>
               <a:spcAft>
-                <a:spcPts val="200"/>
+                <a:spcPts val="600"/>
               </a:spcAft>
-              <a:defRPr sz="950">
-                <a:solidFill>
-                  <a:srgbClr val="22C55E"/>
-                </a:solidFill>
-                <a:latin typeface="Consolas"/>
-              </a:defRPr>
-            </a:pPr>
-            <a:r>
-              <a:t>  uses: sigstore/cosign-installer@v3.5.0</a:t>
-            </a:r>
-          </a:p>
-          <a:p>
-            <a:pPr algn="l">
-              <a:spcAft>
-                <a:spcPts val="200"/>
-              </a:spcAft>
-              <a:defRPr sz="950">
-                <a:solidFill>
-                  <a:srgbClr val="FFFFFF"/>
-                </a:solidFill>
-                <a:latin typeface="Consolas"/>
-              </a:defRPr>
-            </a:pPr>
-          </a:p>
-          <a:p>
-            <a:pPr algn="l">
-              <a:spcAft>
-                <a:spcPts val="200"/>
-              </a:spcAft>
-              <a:defRPr sz="950">
-                <a:solidFill>
-                  <a:srgbClr val="FFFFFF"/>
-                </a:solidFill>
-                <a:latin typeface="Consolas"/>
-              </a:defRPr>
-            </a:pPr>
-            <a:r>
-              <a:t># Build &amp; Push Container</a:t>
-            </a:r>
-          </a:p>
-          <a:p>
-            <a:pPr algn="l">
-              <a:spcAft>
-                <a:spcPts val="200"/>
-              </a:spcAft>
-              <a:defRPr sz="950">
-                <a:solidFill>
-                  <a:srgbClr val="FFFFFF"/>
-                </a:solidFill>
-                <a:latin typeface="Consolas"/>
-              </a:defRPr>
-            </a:pPr>
-            <a:r>
-              <a:t>- name: Build and Push Docker Image</a:t>
-            </a:r>
-          </a:p>
-          <a:p>
-            <a:pPr algn="l">
-              <a:spcAft>
-                <a:spcPts val="200"/>
-              </a:spcAft>
-              <a:defRPr sz="950">
-                <a:solidFill>
-                  <a:srgbClr val="FFFFFF"/>
-                </a:solidFill>
-                <a:latin typeface="Consolas"/>
-              </a:defRPr>
-            </a:pPr>
-            <a:r>
-              <a:t>  uses: docker/build-push-action@v5</a:t>
-            </a:r>
-          </a:p>
-          <a:p>
-            <a:pPr algn="l">
-              <a:spcAft>
-                <a:spcPts val="200"/>
-              </a:spcAft>
-              <a:defRPr sz="950">
-                <a:solidFill>
-                  <a:srgbClr val="FFFFFF"/>
-                </a:solidFill>
-                <a:latin typeface="Consolas"/>
-              </a:defRPr>
-            </a:pPr>
-            <a:r>
-              <a:t>  with:</a:t>
-            </a:r>
-          </a:p>
-          <a:p>
-            <a:pPr algn="l">
-              <a:spcAft>
-                <a:spcPts val="200"/>
-              </a:spcAft>
-              <a:defRPr sz="950">
-                <a:solidFill>
-                  <a:srgbClr val="FFFFFF"/>
-                </a:solidFill>
-                <a:latin typeface="Consolas"/>
-              </a:defRPr>
-            </a:pPr>
-            <a:r>
-              <a:t>    push: true</a:t>
-            </a:r>
-          </a:p>
-          <a:p>
-            <a:pPr algn="l">
-              <a:spcAft>
-                <a:spcPts val="200"/>
-              </a:spcAft>
-              <a:defRPr sz="950">
-                <a:solidFill>
-                  <a:srgbClr val="22C55E"/>
-                </a:solidFill>
-                <a:latin typeface="Consolas"/>
-              </a:defRPr>
-            </a:pPr>
-            <a:r>
-              <a:t>    tags: ${{ env.IMAGE_TAG }}:latest</a:t>
-            </a:r>
-          </a:p>
-          <a:p>
-            <a:pPr algn="l">
-              <a:spcAft>
-                <a:spcPts val="200"/>
-              </a:spcAft>
-              <a:defRPr sz="950">
-                <a:solidFill>
-                  <a:srgbClr val="FFFFFF"/>
-                </a:solidFill>
-                <a:latin typeface="Consolas"/>
-              </a:defRPr>
-            </a:pPr>
-          </a:p>
-          <a:p>
-            <a:pPr algn="l">
-              <a:spcAft>
-                <a:spcPts val="200"/>
-              </a:spcAft>
-              <a:defRPr sz="950">
-                <a:solidFill>
-                  <a:srgbClr val="FFFFFF"/>
-                </a:solidFill>
-                <a:latin typeface="Consolas"/>
-              </a:defRPr>
-            </a:pPr>
-            <a:r>
-              <a:t># Keyless Sign the Published Image</a:t>
-            </a:r>
-          </a:p>
-          <a:p>
-            <a:pPr algn="l">
-              <a:spcAft>
-                <a:spcPts val="200"/>
-              </a:spcAft>
-              <a:defRPr sz="950">
-                <a:solidFill>
-                  <a:srgbClr val="FFFFFF"/>
-                </a:solidFill>
-                <a:latin typeface="Consolas"/>
-              </a:defRPr>
-            </a:pPr>
-            <a:r>
-              <a:t>- name: Sign the Published Image</a:t>
-            </a:r>
-          </a:p>
-          <a:p>
-            <a:pPr algn="l">
-              <a:spcAft>
-                <a:spcPts val="200"/>
-              </a:spcAft>
-              <a:defRPr sz="950">
-                <a:solidFill>
-                  <a:srgbClr val="06B6D4"/>
-                </a:solidFill>
-                <a:latin typeface="Consolas"/>
-              </a:defRPr>
-            </a:pPr>
-            <a:r>
-              <a:t>  run: cosign sign --yes "${{ env.IMAGE_TAG }}:${{ github.sha }}"</a:t>
+              <a:defRPr sz="1300">
+                <a:solidFill>
+                  <a:srgbClr val="F1F5F9"/>
+                </a:solidFill>
+                <a:latin typeface="Arial"/>
+              </a:defRPr>
+            </a:pPr>
+            <a:r>
+              <a:t>• Result: Completely blocks unsigned or unverified images from executing in production.</a:t>
             </a:r>
           </a:p>
         </p:txBody>
@@ -8038,4 +8657,324 @@
   </a:objectDefaults>
   <a:extraClrSchemeLst/>
 </a:theme>
+</file>
+
+<file path=ppt/theme/theme2.xml><?xml version="1.0" encoding="utf-8"?>
+<a:theme xmlns:a="http://schemas.openxmlformats.org/drawingml/2006/main" name="Office Theme">
+  <a:themeElements>
+    <a:clrScheme name="Office">
+      <a:dk1>
+        <a:sysClr val="windowText" lastClr="000000"/>
+      </a:dk1>
+      <a:lt1>
+        <a:sysClr val="window" lastClr="FFFFFF"/>
+      </a:lt1>
+      <a:dk2>
+        <a:srgbClr val="1F497D"/>
+      </a:dk2>
+      <a:lt2>
+        <a:srgbClr val="EEECE1"/>
+      </a:lt2>
+      <a:accent1>
+        <a:srgbClr val="4F81BD"/>
+      </a:accent1>
+      <a:accent2>
+        <a:srgbClr val="C0504D"/>
+      </a:accent2>
+      <a:accent3>
+        <a:srgbClr val="9BBB59"/>
+      </a:accent3>
+      <a:accent4>
+        <a:srgbClr val="8064A2"/>
+      </a:accent4>
+      <a:accent5>
+        <a:srgbClr val="4BACC6"/>
+      </a:accent5>
+      <a:accent6>
+        <a:srgbClr val="F79646"/>
+      </a:accent6>
+      <a:hlink>
+        <a:srgbClr val="0000FF"/>
+      </a:hlink>
+      <a:folHlink>
+        <a:srgbClr val="800080"/>
+      </a:folHlink>
+    </a:clrScheme>
+    <a:fontScheme name="Office">
+      <a:majorFont>
+        <a:latin typeface="Calibri"/>
+        <a:ea typeface=""/>
+        <a:cs typeface=""/>
+        <a:font script="Jpan" typeface="ＭＳ Ｐゴシック"/>
+        <a:font script="Hang" typeface="맑은 고딕"/>
+        <a:font script="Hans" typeface="宋体"/>
+        <a:font script="Hant" typeface="新細明體"/>
+        <a:font script="Arab" typeface="Times New Roman"/>
+        <a:font script="Hebr" typeface="Times New Roman"/>
+        <a:font script="Thai" typeface="Angsana New"/>
+        <a:font script="Ethi" typeface="Nyala"/>
+        <a:font script="Beng" typeface="Vrinda"/>
+        <a:font script="Gujr" typeface="Shruti"/>
+        <a:font script="Khmr" typeface="MoolBoran"/>
+        <a:font script="Knda" typeface="Tunga"/>
+        <a:font script="Guru" typeface="Raavi"/>
+        <a:font script="Cans" typeface="Euphemia"/>
+        <a:font script="Cher" typeface="Plantagenet Cherokee"/>
+        <a:font script="Yiii" typeface="Microsoft Yi Baiti"/>
+        <a:font script="Tibt" typeface="Microsoft Himalaya"/>
+        <a:font script="Thaa" typeface="MV Boli"/>
+        <a:font script="Deva" typeface="Mangal"/>
+        <a:font script="Telu" typeface="Gautami"/>
+        <a:font script="Taml" typeface="Latha"/>
+        <a:font script="Syrc" typeface="Estrangelo Edessa"/>
+        <a:font script="Orya" typeface="Kalinga"/>
+        <a:font script="Mlym" typeface="Kartika"/>
+        <a:font script="Laoo" typeface="DokChampa"/>
+        <a:font script="Sinh" typeface="Iskoola Pota"/>
+        <a:font script="Mong" typeface="Mongolian Baiti"/>
+        <a:font script="Viet" typeface="Times New Roman"/>
+        <a:font script="Uigh" typeface="Microsoft Uighur"/>
+        <a:font script="Geor" typeface="Sylfaen"/>
+      </a:majorFont>
+      <a:minorFont>
+        <a:latin typeface="Calibri"/>
+        <a:ea typeface=""/>
+        <a:cs typeface=""/>
+        <a:font script="Jpan" typeface="ＭＳ Ｐゴシック"/>
+        <a:font script="Hang" typeface="맑은 고딕"/>
+        <a:font script="Hans" typeface="宋体"/>
+        <a:font script="Hant" typeface="新細明體"/>
+        <a:font script="Arab" typeface="Arial"/>
+        <a:font script="Hebr" typeface="Arial"/>
+        <a:font script="Thai" typeface="Cordia New"/>
+        <a:font script="Ethi" typeface="Nyala"/>
+        <a:font script="Beng" typeface="Vrinda"/>
+        <a:font script="Gujr" typeface="Shruti"/>
+        <a:font script="Khmr" typeface="DaunPenh"/>
+        <a:font script="Knda" typeface="Tunga"/>
+        <a:font script="Guru" typeface="Raavi"/>
+        <a:font script="Cans" typeface="Euphemia"/>
+        <a:font script="Cher" typeface="Plantagenet Cherokee"/>
+        <a:font script="Yiii" typeface="Microsoft Yi Baiti"/>
+        <a:font script="Tibt" typeface="Microsoft Himalaya"/>
+        <a:font script="Thaa" typeface="MV Boli"/>
+        <a:font script="Deva" typeface="Mangal"/>
+        <a:font script="Telu" typeface="Gautami"/>
+        <a:font script="Taml" typeface="Latha"/>
+        <a:font script="Syrc" typeface="Estrangelo Edessa"/>
+        <a:font script="Orya" typeface="Kalinga"/>
+        <a:font script="Mlym" typeface="Kartika"/>
+        <a:font script="Laoo" typeface="DokChampa"/>
+        <a:font script="Sinh" typeface="Iskoola Pota"/>
+        <a:font script="Mong" typeface="Mongolian Baiti"/>
+        <a:font script="Viet" typeface="Arial"/>
+        <a:font script="Uigh" typeface="Microsoft Uighur"/>
+        <a:font script="Geor" typeface="Sylfaen"/>
+      </a:minorFont>
+    </a:fontScheme>
+    <a:fmtScheme name="Office">
+      <a:fillStyleLst>
+        <a:solidFill>
+          <a:schemeClr val="phClr"/>
+        </a:solidFill>
+        <a:gradFill rotWithShape="1">
+          <a:gsLst>
+            <a:gs pos="0">
+              <a:schemeClr val="phClr">
+                <a:tint val="50000"/>
+                <a:satMod val="300000"/>
+              </a:schemeClr>
+            </a:gs>
+            <a:gs pos="35000">
+              <a:schemeClr val="phClr">
+                <a:tint val="37000"/>
+                <a:satMod val="300000"/>
+              </a:schemeClr>
+            </a:gs>
+            <a:gs pos="100000">
+              <a:schemeClr val="phClr">
+                <a:tint val="15000"/>
+                <a:satMod val="350000"/>
+              </a:schemeClr>
+            </a:gs>
+          </a:gsLst>
+          <a:lin ang="16200000" scaled="1"/>
+        </a:gradFill>
+        <a:gradFill rotWithShape="1">
+          <a:gsLst>
+            <a:gs pos="0">
+              <a:schemeClr val="phClr">
+                <a:tint val="100000"/>
+                <a:shade val="100000"/>
+                <a:satMod val="130000"/>
+              </a:schemeClr>
+            </a:gs>
+            <a:gs pos="100000">
+              <a:schemeClr val="phClr">
+                <a:tint val="50000"/>
+                <a:shade val="100000"/>
+                <a:satMod val="350000"/>
+              </a:schemeClr>
+            </a:gs>
+          </a:gsLst>
+          <a:lin ang="16200000" scaled="0"/>
+        </a:gradFill>
+      </a:fillStyleLst>
+      <a:lnStyleLst>
+        <a:ln w="9525" cap="flat" cmpd="sng" algn="ctr">
+          <a:solidFill>
+            <a:schemeClr val="phClr">
+              <a:shade val="95000"/>
+              <a:satMod val="105000"/>
+            </a:schemeClr>
+          </a:solidFill>
+          <a:prstDash val="solid"/>
+        </a:ln>
+        <a:ln w="25400" cap="flat" cmpd="sng" algn="ctr">
+          <a:solidFill>
+            <a:schemeClr val="phClr"/>
+          </a:solidFill>
+          <a:prstDash val="solid"/>
+        </a:ln>
+        <a:ln w="38100" cap="flat" cmpd="sng" algn="ctr">
+          <a:solidFill>
+            <a:schemeClr val="phClr"/>
+          </a:solidFill>
+          <a:prstDash val="solid"/>
+        </a:ln>
+      </a:lnStyleLst>
+      <a:effectStyleLst>
+        <a:effectStyle>
+          <a:effectLst>
+            <a:outerShdw blurRad="40000" dist="20000" dir="5400000" rotWithShape="0">
+              <a:srgbClr val="000000">
+                <a:alpha val="38000"/>
+              </a:srgbClr>
+            </a:outerShdw>
+          </a:effectLst>
+        </a:effectStyle>
+        <a:effectStyle>
+          <a:effectLst>
+            <a:outerShdw blurRad="40000" dist="23000" dir="5400000" rotWithShape="0">
+              <a:srgbClr val="000000">
+                <a:alpha val="35000"/>
+              </a:srgbClr>
+            </a:outerShdw>
+          </a:effectLst>
+        </a:effectStyle>
+        <a:effectStyle>
+          <a:effectLst>
+            <a:outerShdw blurRad="40000" dist="23000" dir="5400000" rotWithShape="0">
+              <a:srgbClr val="000000">
+                <a:alpha val="35000"/>
+              </a:srgbClr>
+            </a:outerShdw>
+          </a:effectLst>
+          <a:scene3d>
+            <a:camera prst="orthographicFront">
+              <a:rot lat="0" lon="0" rev="0"/>
+            </a:camera>
+            <a:lightRig rig="threePt" dir="t">
+              <a:rot lat="0" lon="0" rev="1200000"/>
+            </a:lightRig>
+          </a:scene3d>
+          <a:sp3d>
+            <a:bevelT w="63500" h="25400"/>
+          </a:sp3d>
+        </a:effectStyle>
+      </a:effectStyleLst>
+      <a:bgFillStyleLst>
+        <a:solidFill>
+          <a:schemeClr val="phClr"/>
+        </a:solidFill>
+        <a:gradFill rotWithShape="1">
+          <a:gsLst>
+            <a:gs pos="0">
+              <a:schemeClr val="phClr">
+                <a:tint val="40000"/>
+                <a:satMod val="350000"/>
+              </a:schemeClr>
+            </a:gs>
+            <a:gs pos="40000">
+              <a:schemeClr val="phClr">
+                <a:tint val="45000"/>
+                <a:shade val="99000"/>
+                <a:satMod val="350000"/>
+              </a:schemeClr>
+            </a:gs>
+            <a:gs pos="100000">
+              <a:schemeClr val="phClr">
+                <a:shade val="20000"/>
+                <a:satMod val="255000"/>
+              </a:schemeClr>
+            </a:gs>
+          </a:gsLst>
+          <a:path path="circle">
+            <a:fillToRect l="50000" t="-80000" r="50000" b="180000"/>
+          </a:path>
+        </a:gradFill>
+        <a:gradFill rotWithShape="1">
+          <a:gsLst>
+            <a:gs pos="0">
+              <a:schemeClr val="phClr">
+                <a:tint val="80000"/>
+                <a:satMod val="300000"/>
+              </a:schemeClr>
+            </a:gs>
+            <a:gs pos="100000">
+              <a:schemeClr val="phClr">
+                <a:shade val="30000"/>
+                <a:satMod val="200000"/>
+              </a:schemeClr>
+            </a:gs>
+          </a:gsLst>
+          <a:path path="circle">
+            <a:fillToRect l="50000" t="50000" r="50000" b="50000"/>
+          </a:path>
+        </a:gradFill>
+      </a:bgFillStyleLst>
+    </a:fmtScheme>
+  </a:themeElements>
+  <a:objectDefaults>
+    <a:spDef>
+      <a:spPr/>
+      <a:bodyPr/>
+      <a:lstStyle/>
+      <a:style>
+        <a:lnRef idx="1">
+          <a:schemeClr val="accent1"/>
+        </a:lnRef>
+        <a:fillRef idx="3">
+          <a:schemeClr val="accent1"/>
+        </a:fillRef>
+        <a:effectRef idx="2">
+          <a:schemeClr val="accent1"/>
+        </a:effectRef>
+        <a:fontRef idx="minor">
+          <a:schemeClr val="lt1"/>
+        </a:fontRef>
+      </a:style>
+    </a:spDef>
+    <a:lnDef>
+      <a:spPr/>
+      <a:bodyPr/>
+      <a:lstStyle/>
+      <a:style>
+        <a:lnRef idx="2">
+          <a:schemeClr val="accent1"/>
+        </a:lnRef>
+        <a:fillRef idx="0">
+          <a:schemeClr val="accent1"/>
+        </a:fillRef>
+        <a:effectRef idx="1">
+          <a:schemeClr val="accent1"/>
+        </a:effectRef>
+        <a:fontRef idx="minor">
+          <a:schemeClr val="tx1"/>
+        </a:fontRef>
+      </a:style>
+    </a:lnDef>
+  </a:objectDefaults>
+  <a:extraClrSchemeLst/>
+</a:theme>
 </file>